--- a/toolchains/runtime-xxx/runtime-analyzing/运行时分析.pptx
+++ b/toolchains/runtime-xxx/runtime-analyzing/运行时分析.pptx
@@ -5,18 +5,33 @@
     <p:sldMasterId id="2147483648" r:id="rId1"/>
   </p:sldMasterIdLst>
   <p:notesMasterIdLst>
-    <p:notesMasterId r:id="rId9"/>
+    <p:notesMasterId r:id="rId24"/>
   </p:notesMasterIdLst>
   <p:handoutMasterIdLst>
-    <p:handoutMasterId r:id="rId10"/>
+    <p:handoutMasterId r:id="rId25"/>
   </p:handoutMasterIdLst>
   <p:sldIdLst>
     <p:sldId id="257" r:id="rId3"/>
     <p:sldId id="258" r:id="rId4"/>
-    <p:sldId id="259" r:id="rId5"/>
-    <p:sldId id="260" r:id="rId6"/>
-    <p:sldId id="261" r:id="rId7"/>
-    <p:sldId id="262" r:id="rId8"/>
+    <p:sldId id="277" r:id="rId5"/>
+    <p:sldId id="276" r:id="rId6"/>
+    <p:sldId id="275" r:id="rId7"/>
+    <p:sldId id="259" r:id="rId8"/>
+    <p:sldId id="274" r:id="rId9"/>
+    <p:sldId id="273" r:id="rId10"/>
+    <p:sldId id="272" r:id="rId11"/>
+    <p:sldId id="260" r:id="rId12"/>
+    <p:sldId id="271" r:id="rId13"/>
+    <p:sldId id="270" r:id="rId14"/>
+    <p:sldId id="269" r:id="rId15"/>
+    <p:sldId id="267" r:id="rId16"/>
+    <p:sldId id="268" r:id="rId17"/>
+    <p:sldId id="261" r:id="rId18"/>
+    <p:sldId id="266" r:id="rId19"/>
+    <p:sldId id="262" r:id="rId20"/>
+    <p:sldId id="265" r:id="rId21"/>
+    <p:sldId id="264" r:id="rId22"/>
+    <p:sldId id="263" r:id="rId23"/>
   </p:sldIdLst>
   <p:sldSz cx="12192000" cy="6858000"/>
   <p:notesSz cx="7103745" cy="10234295"/>
@@ -3702,6 +3717,4603 @@
 </p:sld>
 </file>
 
+<file path=ppt/slides/slide10.xml><?xml version="1.0" encoding="utf-8"?>
+<p:sld xmlns:a="http://schemas.openxmlformats.org/drawingml/2006/main" xmlns:r="http://schemas.openxmlformats.org/officeDocument/2006/relationships" xmlns:p="http://schemas.openxmlformats.org/presentationml/2006/main">
+  <p:cSld>
+    <p:bg>
+      <p:bgPr>
+        <a:solidFill>
+          <a:schemeClr val="tx1"/>
+        </a:solidFill>
+        <a:effectLst/>
+      </p:bgPr>
+    </p:bg>
+    <p:spTree>
+      <p:nvGrpSpPr>
+        <p:cNvPr id="1" name=""/>
+        <p:cNvGrpSpPr/>
+        <p:nvPr/>
+      </p:nvGrpSpPr>
+      <p:grpSpPr/>
+      <p:sp>
+        <p:nvSpPr>
+          <p:cNvPr id="2" name="Title 1"/>
+          <p:cNvSpPr>
+            <a:spLocks noGrp="1"/>
+          </p:cNvSpPr>
+          <p:nvPr>
+            <p:ph type="title"/>
+          </p:nvPr>
+        </p:nvSpPr>
+        <p:spPr>
+          <a:xfrm>
+            <a:off x="647700" y="146685"/>
+            <a:ext cx="10515600" cy="604520"/>
+          </a:xfrm>
+        </p:spPr>
+        <p:txBody>
+          <a:bodyPr/>
+          <a:p>
+            <a:pPr algn="ctr"/>
+            <a:r>
+              <a:rPr lang="zh-CN" altLang="en-US">
+                <a:solidFill>
+                  <a:schemeClr val="accent6"/>
+                </a:solidFill>
+                <a:sym typeface="+mn-ea"/>
+              </a:rPr>
+              <a:t>运行时分析：</a:t>
+            </a:r>
+            <a:r>
+              <a:rPr lang="zh-CN" altLang="en-US">
+                <a:solidFill>
+                  <a:schemeClr val="accent6"/>
+                </a:solidFill>
+                <a:sym typeface="+mn-ea"/>
+              </a:rPr>
+              <a:t>具体内容：</a:t>
+            </a:r>
+            <a:r>
+              <a:rPr lang="zh-CN" altLang="en-US">
+                <a:solidFill>
+                  <a:schemeClr val="accent6"/>
+                </a:solidFill>
+                <a:sym typeface="+mn-ea"/>
+              </a:rPr>
+              <a:t>问题</a:t>
+            </a:r>
+            <a:r>
+              <a:rPr lang="zh-CN" altLang="en-US">
+                <a:solidFill>
+                  <a:schemeClr val="accent6"/>
+                </a:solidFill>
+              </a:rPr>
+              <a:t>处理</a:t>
+            </a:r>
+            <a:endParaRPr lang="zh-CN" altLang="en-US">
+              <a:solidFill>
+                <a:schemeClr val="accent6"/>
+              </a:solidFill>
+            </a:endParaRPr>
+          </a:p>
+        </p:txBody>
+      </p:sp>
+      <p:sp>
+        <p:nvSpPr>
+          <p:cNvPr id="5" name="Content Placeholder 4"/>
+          <p:cNvSpPr>
+            <a:spLocks noGrp="1"/>
+          </p:cNvSpPr>
+          <p:nvPr>
+            <p:ph idx="1"/>
+          </p:nvPr>
+        </p:nvSpPr>
+        <p:spPr>
+          <a:xfrm>
+            <a:off x="647700" y="952500"/>
+            <a:ext cx="11151870" cy="5859780"/>
+          </a:xfrm>
+        </p:spPr>
+        <p:txBody>
+          <a:bodyPr/>
+          <a:p>
+            <a:r>
+              <a:rPr lang="zh-CN" altLang="en-US">
+                <a:solidFill>
+                  <a:schemeClr val="accent6"/>
+                </a:solidFill>
+              </a:rPr>
+              <a:t>概要描述</a:t>
+            </a:r>
+            <a:endParaRPr lang="zh-CN" altLang="en-US">
+              <a:solidFill>
+                <a:schemeClr val="accent6"/>
+              </a:solidFill>
+            </a:endParaRPr>
+          </a:p>
+          <a:p>
+            <a:pPr lvl="1"/>
+            <a:endParaRPr lang="zh-CN" altLang="en-US" sz="1800">
+              <a:solidFill>
+                <a:schemeClr val="accent6"/>
+              </a:solidFill>
+            </a:endParaRPr>
+          </a:p>
+          <a:p>
+            <a:pPr lvl="1"/>
+            <a:endParaRPr lang="zh-CN" altLang="en-US" sz="1800">
+              <a:solidFill>
+                <a:schemeClr val="accent6"/>
+              </a:solidFill>
+            </a:endParaRPr>
+          </a:p>
+          <a:p>
+            <a:pPr lvl="1"/>
+            <a:endParaRPr lang="zh-CN" altLang="en-US">
+              <a:solidFill>
+                <a:schemeClr val="accent6"/>
+              </a:solidFill>
+            </a:endParaRPr>
+          </a:p>
+          <a:p>
+            <a:r>
+              <a:rPr lang="zh-CN" altLang="en-US">
+                <a:solidFill>
+                  <a:schemeClr val="accent6"/>
+                </a:solidFill>
+              </a:rPr>
+              <a:t>处理方法</a:t>
+            </a:r>
+            <a:endParaRPr lang="zh-CN" altLang="en-US">
+              <a:solidFill>
+                <a:schemeClr val="accent6"/>
+              </a:solidFill>
+            </a:endParaRPr>
+          </a:p>
+          <a:p>
+            <a:pPr lvl="1"/>
+            <a:endParaRPr lang="zh-CN" altLang="en-US" sz="1800">
+              <a:solidFill>
+                <a:schemeClr val="accent6"/>
+              </a:solidFill>
+            </a:endParaRPr>
+          </a:p>
+          <a:p>
+            <a:pPr lvl="1"/>
+            <a:endParaRPr lang="zh-CN" altLang="en-US" sz="1800">
+              <a:solidFill>
+                <a:schemeClr val="accent6"/>
+              </a:solidFill>
+            </a:endParaRPr>
+          </a:p>
+          <a:p>
+            <a:pPr lvl="1"/>
+            <a:endParaRPr lang="zh-CN" altLang="en-US">
+              <a:solidFill>
+                <a:schemeClr val="accent6"/>
+              </a:solidFill>
+              <a:sym typeface="+mn-ea"/>
+            </a:endParaRPr>
+          </a:p>
+          <a:p>
+            <a:pPr lvl="1"/>
+            <a:endParaRPr lang="zh-CN" altLang="en-US">
+              <a:solidFill>
+                <a:schemeClr val="accent6"/>
+              </a:solidFill>
+            </a:endParaRPr>
+          </a:p>
+          <a:p>
+            <a:r>
+              <a:rPr lang="zh-CN" altLang="en-US">
+                <a:solidFill>
+                  <a:schemeClr val="accent6"/>
+                </a:solidFill>
+              </a:rPr>
+              <a:t>核心难点</a:t>
+            </a:r>
+            <a:endParaRPr lang="zh-CN" altLang="en-US">
+              <a:solidFill>
+                <a:schemeClr val="accent6"/>
+              </a:solidFill>
+            </a:endParaRPr>
+          </a:p>
+          <a:p>
+            <a:pPr marL="0" indent="0">
+              <a:buNone/>
+            </a:pPr>
+            <a:endParaRPr lang="zh-CN" altLang="en-US" sz="1620">
+              <a:solidFill>
+                <a:schemeClr val="accent6"/>
+              </a:solidFill>
+            </a:endParaRPr>
+          </a:p>
+        </p:txBody>
+      </p:sp>
+    </p:spTree>
+  </p:cSld>
+  <p:clrMapOvr>
+    <a:masterClrMapping/>
+  </p:clrMapOvr>
+</p:sld>
+</file>
+
+<file path=ppt/slides/slide11.xml><?xml version="1.0" encoding="utf-8"?>
+<p:sld xmlns:a="http://schemas.openxmlformats.org/drawingml/2006/main" xmlns:r="http://schemas.openxmlformats.org/officeDocument/2006/relationships" xmlns:p="http://schemas.openxmlformats.org/presentationml/2006/main">
+  <p:cSld>
+    <p:bg>
+      <p:bgPr>
+        <a:solidFill>
+          <a:schemeClr val="tx1"/>
+        </a:solidFill>
+        <a:effectLst/>
+      </p:bgPr>
+    </p:bg>
+    <p:spTree>
+      <p:nvGrpSpPr>
+        <p:cNvPr id="1" name=""/>
+        <p:cNvGrpSpPr/>
+        <p:nvPr/>
+      </p:nvGrpSpPr>
+      <p:grpSpPr/>
+      <p:sp>
+        <p:nvSpPr>
+          <p:cNvPr id="2" name="Title 1"/>
+          <p:cNvSpPr>
+            <a:spLocks noGrp="1"/>
+          </p:cNvSpPr>
+          <p:nvPr>
+            <p:ph type="title"/>
+          </p:nvPr>
+        </p:nvSpPr>
+        <p:spPr>
+          <a:xfrm>
+            <a:off x="647700" y="146685"/>
+            <a:ext cx="10515600" cy="604520"/>
+          </a:xfrm>
+        </p:spPr>
+        <p:txBody>
+          <a:bodyPr/>
+          <a:p>
+            <a:pPr algn="ctr"/>
+            <a:r>
+              <a:rPr lang="zh-CN" altLang="en-US">
+                <a:solidFill>
+                  <a:schemeClr val="accent6"/>
+                </a:solidFill>
+                <a:sym typeface="+mn-ea"/>
+              </a:rPr>
+              <a:t>运行时分析：</a:t>
+            </a:r>
+            <a:r>
+              <a:rPr lang="zh-CN" altLang="en-US">
+                <a:solidFill>
+                  <a:schemeClr val="accent6"/>
+                </a:solidFill>
+                <a:sym typeface="+mn-ea"/>
+              </a:rPr>
+              <a:t>具体内容：</a:t>
+            </a:r>
+            <a:r>
+              <a:rPr lang="zh-CN" altLang="en-US">
+                <a:solidFill>
+                  <a:schemeClr val="accent6"/>
+                </a:solidFill>
+                <a:sym typeface="+mn-ea"/>
+              </a:rPr>
+              <a:t>问题</a:t>
+            </a:r>
+            <a:r>
+              <a:rPr lang="zh-CN" altLang="en-US">
+                <a:solidFill>
+                  <a:schemeClr val="accent6"/>
+                </a:solidFill>
+              </a:rPr>
+              <a:t>处理</a:t>
+            </a:r>
+            <a:endParaRPr lang="zh-CN" altLang="en-US">
+              <a:solidFill>
+                <a:schemeClr val="accent6"/>
+              </a:solidFill>
+            </a:endParaRPr>
+          </a:p>
+        </p:txBody>
+      </p:sp>
+      <p:sp>
+        <p:nvSpPr>
+          <p:cNvPr id="5" name="Content Placeholder 4"/>
+          <p:cNvSpPr>
+            <a:spLocks noGrp="1"/>
+          </p:cNvSpPr>
+          <p:nvPr>
+            <p:ph idx="1"/>
+          </p:nvPr>
+        </p:nvSpPr>
+        <p:spPr>
+          <a:xfrm>
+            <a:off x="647700" y="952500"/>
+            <a:ext cx="11151870" cy="5859780"/>
+          </a:xfrm>
+        </p:spPr>
+        <p:txBody>
+          <a:bodyPr/>
+          <a:p>
+            <a:r>
+              <a:rPr lang="zh-CN" altLang="en-US">
+                <a:solidFill>
+                  <a:schemeClr val="accent6"/>
+                </a:solidFill>
+              </a:rPr>
+              <a:t>概要描述</a:t>
+            </a:r>
+            <a:endParaRPr lang="zh-CN" altLang="en-US">
+              <a:solidFill>
+                <a:schemeClr val="accent6"/>
+              </a:solidFill>
+            </a:endParaRPr>
+          </a:p>
+          <a:p>
+            <a:pPr lvl="1"/>
+            <a:r>
+              <a:rPr lang="zh-CN" altLang="en-US">
+                <a:solidFill>
+                  <a:schemeClr val="accent6"/>
+                </a:solidFill>
+                <a:sym typeface="+mn-ea"/>
+              </a:rPr>
+              <a:t>处理具体的</a:t>
+            </a:r>
+            <a:r>
+              <a:rPr lang="en-US" altLang="zh-CN">
+                <a:solidFill>
+                  <a:schemeClr val="accent6"/>
+                </a:solidFill>
+                <a:sym typeface="+mn-ea"/>
+              </a:rPr>
+              <a:t>bug</a:t>
+            </a:r>
+            <a:r>
+              <a:rPr lang="zh-CN" altLang="en-US">
+                <a:solidFill>
+                  <a:schemeClr val="accent6"/>
+                </a:solidFill>
+                <a:sym typeface="+mn-ea"/>
+              </a:rPr>
+              <a:t>（错误）；可能涉及多个组件，多方人员配合处理；也可能是单一模块单一人员。</a:t>
+            </a:r>
+            <a:endParaRPr lang="zh-CN" altLang="en-US" sz="1800">
+              <a:solidFill>
+                <a:schemeClr val="accent6"/>
+              </a:solidFill>
+            </a:endParaRPr>
+          </a:p>
+          <a:p>
+            <a:pPr lvl="1"/>
+            <a:r>
+              <a:rPr lang="zh-CN" altLang="en-US" sz="1800">
+                <a:solidFill>
+                  <a:schemeClr val="accent6"/>
+                </a:solidFill>
+              </a:rPr>
+              <a:t>需求目的：解决问题（不一定必须解决</a:t>
+            </a:r>
+            <a:r>
+              <a:rPr lang="en-US" altLang="zh-CN" sz="1800">
+                <a:solidFill>
+                  <a:schemeClr val="accent6"/>
+                </a:solidFill>
+              </a:rPr>
+              <a:t>bug</a:t>
+            </a:r>
+            <a:r>
+              <a:rPr lang="zh-CN" altLang="en-US" sz="1800">
+                <a:solidFill>
+                  <a:schemeClr val="accent6"/>
+                </a:solidFill>
+              </a:rPr>
+              <a:t>），功能类（业务</a:t>
+            </a:r>
+            <a:r>
+              <a:rPr lang="en-US" altLang="zh-CN" sz="1800">
+                <a:solidFill>
+                  <a:schemeClr val="accent6"/>
+                </a:solidFill>
+              </a:rPr>
+              <a:t>/</a:t>
+            </a:r>
+            <a:r>
+              <a:rPr lang="zh-CN" altLang="en-US" sz="1800">
+                <a:solidFill>
+                  <a:schemeClr val="accent6"/>
+                </a:solidFill>
+              </a:rPr>
+              <a:t>交互）</a:t>
+            </a:r>
+            <a:r>
+              <a:rPr lang="en-US" altLang="zh-CN" sz="1800">
+                <a:solidFill>
+                  <a:schemeClr val="accent6"/>
+                </a:solidFill>
+              </a:rPr>
+              <a:t>/</a:t>
+            </a:r>
+            <a:r>
+              <a:rPr lang="zh-CN" altLang="en-US" sz="1800">
+                <a:solidFill>
+                  <a:schemeClr val="accent6"/>
+                </a:solidFill>
+              </a:rPr>
+              <a:t>非功能类（性能</a:t>
+            </a:r>
+            <a:r>
+              <a:rPr lang="en-US" altLang="zh-CN" sz="1800">
+                <a:solidFill>
+                  <a:schemeClr val="accent6"/>
+                </a:solidFill>
+              </a:rPr>
+              <a:t>/</a:t>
+            </a:r>
+            <a:r>
+              <a:rPr lang="zh-CN" altLang="en-US" sz="1800">
+                <a:solidFill>
+                  <a:schemeClr val="accent6"/>
+                </a:solidFill>
+              </a:rPr>
+              <a:t>稳定性</a:t>
+            </a:r>
+            <a:r>
+              <a:rPr lang="en-US" altLang="zh-CN" sz="1800">
+                <a:solidFill>
+                  <a:schemeClr val="accent6"/>
+                </a:solidFill>
+              </a:rPr>
+              <a:t>/</a:t>
+            </a:r>
+            <a:r>
+              <a:rPr lang="zh-CN" altLang="en-US" sz="1800">
+                <a:solidFill>
+                  <a:schemeClr val="accent6"/>
+                </a:solidFill>
+              </a:rPr>
+              <a:t>兼容性）</a:t>
+            </a:r>
+            <a:endParaRPr lang="zh-CN" altLang="en-US" sz="1800">
+              <a:solidFill>
+                <a:schemeClr val="accent6"/>
+              </a:solidFill>
+            </a:endParaRPr>
+          </a:p>
+          <a:p>
+            <a:pPr lvl="1"/>
+            <a:r>
+              <a:rPr lang="zh-CN" altLang="en-US" sz="1800">
+                <a:solidFill>
+                  <a:schemeClr val="accent6"/>
+                </a:solidFill>
+              </a:rPr>
+              <a:t>基础资源：必备（有问题的详细描述和复现方法），</a:t>
+            </a:r>
+            <a:r>
+              <a:rPr lang="zh-CN" altLang="en-US">
+                <a:solidFill>
+                  <a:schemeClr val="accent6"/>
+                </a:solidFill>
+                <a:sym typeface="+mn-ea"/>
+              </a:rPr>
+              <a:t>可选（</a:t>
+            </a:r>
+            <a:r>
+              <a:rPr lang="zh-CN" altLang="en-US">
+                <a:solidFill>
+                  <a:schemeClr val="accent6"/>
+                </a:solidFill>
+                <a:sym typeface="+mn-ea"/>
+              </a:rPr>
+              <a:t>厂商或相关人员配合</a:t>
+            </a:r>
+            <a:r>
+              <a:rPr lang="en-US" altLang="zh-CN">
+                <a:solidFill>
+                  <a:schemeClr val="accent6"/>
+                </a:solidFill>
+                <a:sym typeface="+mn-ea"/>
+              </a:rPr>
+              <a:t>/</a:t>
+            </a:r>
+            <a:r>
+              <a:rPr lang="zh-CN" altLang="en-US">
+                <a:solidFill>
+                  <a:schemeClr val="accent6"/>
+                </a:solidFill>
+                <a:sym typeface="+mn-ea"/>
+              </a:rPr>
+              <a:t>文档</a:t>
+            </a:r>
+            <a:r>
+              <a:rPr lang="en-US" altLang="zh-CN">
+                <a:solidFill>
+                  <a:schemeClr val="accent6"/>
+                </a:solidFill>
+                <a:sym typeface="+mn-ea"/>
+              </a:rPr>
+              <a:t>/</a:t>
+            </a:r>
+            <a:r>
+              <a:rPr lang="zh-CN" altLang="en-US">
+                <a:solidFill>
+                  <a:schemeClr val="accent6"/>
+                </a:solidFill>
+                <a:sym typeface="+mn-ea"/>
+              </a:rPr>
+              <a:t>源码</a:t>
+            </a:r>
+            <a:r>
+              <a:rPr lang="en-US" altLang="zh-CN">
+                <a:solidFill>
+                  <a:schemeClr val="accent6"/>
+                </a:solidFill>
+                <a:sym typeface="+mn-ea"/>
+              </a:rPr>
+              <a:t>/</a:t>
+            </a:r>
+            <a:r>
+              <a:rPr lang="zh-CN" altLang="en-US">
+                <a:solidFill>
+                  <a:schemeClr val="accent6"/>
+                </a:solidFill>
+                <a:sym typeface="+mn-ea"/>
+              </a:rPr>
+              <a:t>反汇编）</a:t>
+            </a:r>
+            <a:endParaRPr lang="zh-CN" altLang="en-US">
+              <a:solidFill>
+                <a:schemeClr val="accent6"/>
+              </a:solidFill>
+            </a:endParaRPr>
+          </a:p>
+          <a:p>
+            <a:r>
+              <a:rPr lang="zh-CN" altLang="en-US">
+                <a:solidFill>
+                  <a:schemeClr val="accent6"/>
+                </a:solidFill>
+              </a:rPr>
+              <a:t>处理方法</a:t>
+            </a:r>
+            <a:endParaRPr lang="zh-CN" altLang="en-US">
+              <a:solidFill>
+                <a:schemeClr val="accent6"/>
+              </a:solidFill>
+            </a:endParaRPr>
+          </a:p>
+          <a:p>
+            <a:pPr lvl="1"/>
+            <a:endParaRPr lang="zh-CN" altLang="en-US" sz="1800">
+              <a:solidFill>
+                <a:schemeClr val="accent6"/>
+              </a:solidFill>
+            </a:endParaRPr>
+          </a:p>
+          <a:p>
+            <a:pPr lvl="1"/>
+            <a:endParaRPr lang="zh-CN" altLang="en-US" sz="1800">
+              <a:solidFill>
+                <a:schemeClr val="accent6"/>
+              </a:solidFill>
+            </a:endParaRPr>
+          </a:p>
+          <a:p>
+            <a:pPr lvl="1"/>
+            <a:endParaRPr lang="zh-CN" altLang="en-US">
+              <a:solidFill>
+                <a:schemeClr val="accent6"/>
+              </a:solidFill>
+              <a:sym typeface="+mn-ea"/>
+            </a:endParaRPr>
+          </a:p>
+          <a:p>
+            <a:pPr lvl="1"/>
+            <a:endParaRPr lang="zh-CN" altLang="en-US">
+              <a:solidFill>
+                <a:schemeClr val="accent6"/>
+              </a:solidFill>
+            </a:endParaRPr>
+          </a:p>
+          <a:p>
+            <a:r>
+              <a:rPr lang="zh-CN" altLang="en-US">
+                <a:solidFill>
+                  <a:schemeClr val="accent6"/>
+                </a:solidFill>
+              </a:rPr>
+              <a:t>核心难点</a:t>
+            </a:r>
+            <a:endParaRPr lang="zh-CN" altLang="en-US">
+              <a:solidFill>
+                <a:schemeClr val="accent6"/>
+              </a:solidFill>
+            </a:endParaRPr>
+          </a:p>
+          <a:p>
+            <a:pPr marL="0" indent="0">
+              <a:buNone/>
+            </a:pPr>
+            <a:endParaRPr lang="zh-CN" altLang="en-US" sz="1620">
+              <a:solidFill>
+                <a:schemeClr val="accent6"/>
+              </a:solidFill>
+            </a:endParaRPr>
+          </a:p>
+        </p:txBody>
+      </p:sp>
+    </p:spTree>
+  </p:cSld>
+  <p:clrMapOvr>
+    <a:masterClrMapping/>
+  </p:clrMapOvr>
+</p:sld>
+</file>
+
+<file path=ppt/slides/slide12.xml><?xml version="1.0" encoding="utf-8"?>
+<p:sld xmlns:a="http://schemas.openxmlformats.org/drawingml/2006/main" xmlns:r="http://schemas.openxmlformats.org/officeDocument/2006/relationships" xmlns:p="http://schemas.openxmlformats.org/presentationml/2006/main">
+  <p:cSld>
+    <p:bg>
+      <p:bgPr>
+        <a:solidFill>
+          <a:schemeClr val="tx1"/>
+        </a:solidFill>
+        <a:effectLst/>
+      </p:bgPr>
+    </p:bg>
+    <p:spTree>
+      <p:nvGrpSpPr>
+        <p:cNvPr id="1" name=""/>
+        <p:cNvGrpSpPr/>
+        <p:nvPr/>
+      </p:nvGrpSpPr>
+      <p:grpSpPr/>
+      <p:sp>
+        <p:nvSpPr>
+          <p:cNvPr id="2" name="Title 1"/>
+          <p:cNvSpPr>
+            <a:spLocks noGrp="1"/>
+          </p:cNvSpPr>
+          <p:nvPr>
+            <p:ph type="title"/>
+          </p:nvPr>
+        </p:nvSpPr>
+        <p:spPr>
+          <a:xfrm>
+            <a:off x="647700" y="146685"/>
+            <a:ext cx="10515600" cy="604520"/>
+          </a:xfrm>
+        </p:spPr>
+        <p:txBody>
+          <a:bodyPr/>
+          <a:p>
+            <a:pPr algn="ctr"/>
+            <a:r>
+              <a:rPr lang="zh-CN" altLang="en-US">
+                <a:solidFill>
+                  <a:schemeClr val="accent6"/>
+                </a:solidFill>
+                <a:sym typeface="+mn-ea"/>
+              </a:rPr>
+              <a:t>运行时分析：</a:t>
+            </a:r>
+            <a:r>
+              <a:rPr lang="zh-CN" altLang="en-US">
+                <a:solidFill>
+                  <a:schemeClr val="accent6"/>
+                </a:solidFill>
+                <a:sym typeface="+mn-ea"/>
+              </a:rPr>
+              <a:t>具体内容：</a:t>
+            </a:r>
+            <a:r>
+              <a:rPr lang="zh-CN" altLang="en-US">
+                <a:solidFill>
+                  <a:schemeClr val="accent6"/>
+                </a:solidFill>
+                <a:sym typeface="+mn-ea"/>
+              </a:rPr>
+              <a:t>问题</a:t>
+            </a:r>
+            <a:r>
+              <a:rPr lang="zh-CN" altLang="en-US">
+                <a:solidFill>
+                  <a:schemeClr val="accent6"/>
+                </a:solidFill>
+              </a:rPr>
+              <a:t>处理</a:t>
+            </a:r>
+            <a:endParaRPr lang="zh-CN" altLang="en-US">
+              <a:solidFill>
+                <a:schemeClr val="accent6"/>
+              </a:solidFill>
+            </a:endParaRPr>
+          </a:p>
+        </p:txBody>
+      </p:sp>
+      <p:sp>
+        <p:nvSpPr>
+          <p:cNvPr id="5" name="Content Placeholder 4"/>
+          <p:cNvSpPr>
+            <a:spLocks noGrp="1"/>
+          </p:cNvSpPr>
+          <p:nvPr>
+            <p:ph idx="1"/>
+          </p:nvPr>
+        </p:nvSpPr>
+        <p:spPr>
+          <a:xfrm>
+            <a:off x="647700" y="952500"/>
+            <a:ext cx="11151870" cy="5859780"/>
+          </a:xfrm>
+        </p:spPr>
+        <p:txBody>
+          <a:bodyPr/>
+          <a:p>
+            <a:r>
+              <a:rPr lang="zh-CN" altLang="en-US">
+                <a:solidFill>
+                  <a:schemeClr val="accent6"/>
+                </a:solidFill>
+              </a:rPr>
+              <a:t>概要描述</a:t>
+            </a:r>
+            <a:endParaRPr lang="zh-CN" altLang="en-US">
+              <a:solidFill>
+                <a:schemeClr val="accent6"/>
+              </a:solidFill>
+            </a:endParaRPr>
+          </a:p>
+          <a:p>
+            <a:pPr lvl="1"/>
+            <a:r>
+              <a:rPr lang="zh-CN" altLang="en-US">
+                <a:solidFill>
+                  <a:schemeClr val="accent6"/>
+                </a:solidFill>
+                <a:sym typeface="+mn-ea"/>
+              </a:rPr>
+              <a:t>处理具体的</a:t>
+            </a:r>
+            <a:r>
+              <a:rPr lang="en-US" altLang="zh-CN">
+                <a:solidFill>
+                  <a:schemeClr val="accent6"/>
+                </a:solidFill>
+                <a:sym typeface="+mn-ea"/>
+              </a:rPr>
+              <a:t>bug</a:t>
+            </a:r>
+            <a:r>
+              <a:rPr lang="zh-CN" altLang="en-US">
+                <a:solidFill>
+                  <a:schemeClr val="accent6"/>
+                </a:solidFill>
+                <a:sym typeface="+mn-ea"/>
+              </a:rPr>
+              <a:t>（错误）；可能涉及多个组件，多方人员配合处理；也可能是单一模块单一人员。</a:t>
+            </a:r>
+            <a:endParaRPr lang="zh-CN" altLang="en-US" sz="1800">
+              <a:solidFill>
+                <a:schemeClr val="accent6"/>
+              </a:solidFill>
+            </a:endParaRPr>
+          </a:p>
+          <a:p>
+            <a:pPr lvl="1"/>
+            <a:r>
+              <a:rPr lang="zh-CN" altLang="en-US" sz="1800">
+                <a:solidFill>
+                  <a:schemeClr val="accent6"/>
+                </a:solidFill>
+              </a:rPr>
+              <a:t>需求目的：解决问题（不一定必须解决</a:t>
+            </a:r>
+            <a:r>
+              <a:rPr lang="en-US" altLang="zh-CN" sz="1800">
+                <a:solidFill>
+                  <a:schemeClr val="accent6"/>
+                </a:solidFill>
+              </a:rPr>
+              <a:t>bug</a:t>
+            </a:r>
+            <a:r>
+              <a:rPr lang="zh-CN" altLang="en-US" sz="1800">
+                <a:solidFill>
+                  <a:schemeClr val="accent6"/>
+                </a:solidFill>
+              </a:rPr>
+              <a:t>），功能类（业务</a:t>
+            </a:r>
+            <a:r>
+              <a:rPr lang="en-US" altLang="zh-CN" sz="1800">
+                <a:solidFill>
+                  <a:schemeClr val="accent6"/>
+                </a:solidFill>
+              </a:rPr>
+              <a:t>/</a:t>
+            </a:r>
+            <a:r>
+              <a:rPr lang="zh-CN" altLang="en-US" sz="1800">
+                <a:solidFill>
+                  <a:schemeClr val="accent6"/>
+                </a:solidFill>
+              </a:rPr>
+              <a:t>交互）</a:t>
+            </a:r>
+            <a:r>
+              <a:rPr lang="en-US" altLang="zh-CN" sz="1800">
+                <a:solidFill>
+                  <a:schemeClr val="accent6"/>
+                </a:solidFill>
+              </a:rPr>
+              <a:t>/</a:t>
+            </a:r>
+            <a:r>
+              <a:rPr lang="zh-CN" altLang="en-US" sz="1800">
+                <a:solidFill>
+                  <a:schemeClr val="accent6"/>
+                </a:solidFill>
+              </a:rPr>
+              <a:t>非功能类（性能</a:t>
+            </a:r>
+            <a:r>
+              <a:rPr lang="en-US" altLang="zh-CN" sz="1800">
+                <a:solidFill>
+                  <a:schemeClr val="accent6"/>
+                </a:solidFill>
+              </a:rPr>
+              <a:t>/</a:t>
+            </a:r>
+            <a:r>
+              <a:rPr lang="zh-CN" altLang="en-US" sz="1800">
+                <a:solidFill>
+                  <a:schemeClr val="accent6"/>
+                </a:solidFill>
+              </a:rPr>
+              <a:t>稳定性</a:t>
+            </a:r>
+            <a:r>
+              <a:rPr lang="en-US" altLang="zh-CN" sz="1800">
+                <a:solidFill>
+                  <a:schemeClr val="accent6"/>
+                </a:solidFill>
+              </a:rPr>
+              <a:t>/</a:t>
+            </a:r>
+            <a:r>
+              <a:rPr lang="zh-CN" altLang="en-US" sz="1800">
+                <a:solidFill>
+                  <a:schemeClr val="accent6"/>
+                </a:solidFill>
+              </a:rPr>
+              <a:t>兼容性）</a:t>
+            </a:r>
+            <a:endParaRPr lang="zh-CN" altLang="en-US" sz="1800">
+              <a:solidFill>
+                <a:schemeClr val="accent6"/>
+              </a:solidFill>
+            </a:endParaRPr>
+          </a:p>
+          <a:p>
+            <a:pPr lvl="1"/>
+            <a:r>
+              <a:rPr lang="zh-CN" altLang="en-US" sz="1800">
+                <a:solidFill>
+                  <a:schemeClr val="accent6"/>
+                </a:solidFill>
+              </a:rPr>
+              <a:t>基础资源：必备（有问题的详细描述和复现方法），</a:t>
+            </a:r>
+            <a:r>
+              <a:rPr lang="zh-CN" altLang="en-US">
+                <a:solidFill>
+                  <a:schemeClr val="accent6"/>
+                </a:solidFill>
+                <a:sym typeface="+mn-ea"/>
+              </a:rPr>
+              <a:t>可选（</a:t>
+            </a:r>
+            <a:r>
+              <a:rPr lang="zh-CN" altLang="en-US">
+                <a:solidFill>
+                  <a:schemeClr val="accent6"/>
+                </a:solidFill>
+                <a:sym typeface="+mn-ea"/>
+              </a:rPr>
+              <a:t>厂商或相关人员配合</a:t>
+            </a:r>
+            <a:r>
+              <a:rPr lang="en-US" altLang="zh-CN">
+                <a:solidFill>
+                  <a:schemeClr val="accent6"/>
+                </a:solidFill>
+                <a:sym typeface="+mn-ea"/>
+              </a:rPr>
+              <a:t>/</a:t>
+            </a:r>
+            <a:r>
+              <a:rPr lang="zh-CN" altLang="en-US">
+                <a:solidFill>
+                  <a:schemeClr val="accent6"/>
+                </a:solidFill>
+                <a:sym typeface="+mn-ea"/>
+              </a:rPr>
+              <a:t>文档</a:t>
+            </a:r>
+            <a:r>
+              <a:rPr lang="en-US" altLang="zh-CN">
+                <a:solidFill>
+                  <a:schemeClr val="accent6"/>
+                </a:solidFill>
+                <a:sym typeface="+mn-ea"/>
+              </a:rPr>
+              <a:t>/</a:t>
+            </a:r>
+            <a:r>
+              <a:rPr lang="zh-CN" altLang="en-US">
+                <a:solidFill>
+                  <a:schemeClr val="accent6"/>
+                </a:solidFill>
+                <a:sym typeface="+mn-ea"/>
+              </a:rPr>
+              <a:t>源码</a:t>
+            </a:r>
+            <a:r>
+              <a:rPr lang="en-US" altLang="zh-CN">
+                <a:solidFill>
+                  <a:schemeClr val="accent6"/>
+                </a:solidFill>
+                <a:sym typeface="+mn-ea"/>
+              </a:rPr>
+              <a:t>/</a:t>
+            </a:r>
+            <a:r>
+              <a:rPr lang="zh-CN" altLang="en-US">
+                <a:solidFill>
+                  <a:schemeClr val="accent6"/>
+                </a:solidFill>
+                <a:sym typeface="+mn-ea"/>
+              </a:rPr>
+              <a:t>反汇编）</a:t>
+            </a:r>
+            <a:endParaRPr lang="zh-CN" altLang="en-US">
+              <a:solidFill>
+                <a:schemeClr val="accent6"/>
+              </a:solidFill>
+            </a:endParaRPr>
+          </a:p>
+          <a:p>
+            <a:r>
+              <a:rPr lang="zh-CN" altLang="en-US">
+                <a:solidFill>
+                  <a:schemeClr val="accent6"/>
+                </a:solidFill>
+              </a:rPr>
+              <a:t>处理方法</a:t>
+            </a:r>
+            <a:endParaRPr lang="zh-CN" altLang="en-US">
+              <a:solidFill>
+                <a:schemeClr val="accent6"/>
+              </a:solidFill>
+            </a:endParaRPr>
+          </a:p>
+          <a:p>
+            <a:pPr lvl="1"/>
+            <a:r>
+              <a:rPr lang="zh-CN" altLang="en-US" sz="1800">
+                <a:solidFill>
+                  <a:schemeClr val="accent6"/>
+                </a:solidFill>
+              </a:rPr>
+              <a:t>整体设计：了解整体结构</a:t>
+            </a:r>
+            <a:r>
+              <a:rPr lang="en-US" altLang="zh-CN" sz="1800">
+                <a:solidFill>
+                  <a:schemeClr val="accent6"/>
+                </a:solidFill>
+              </a:rPr>
+              <a:t>/</a:t>
+            </a:r>
+            <a:r>
+              <a:rPr lang="zh-CN" altLang="en-US" sz="1800">
+                <a:solidFill>
+                  <a:schemeClr val="accent6"/>
+                </a:solidFill>
+              </a:rPr>
+              <a:t>给出解决方案（临时</a:t>
+            </a:r>
+            <a:r>
+              <a:rPr lang="en-US" altLang="zh-CN" sz="1800">
+                <a:solidFill>
+                  <a:schemeClr val="accent6"/>
+                </a:solidFill>
+              </a:rPr>
+              <a:t>/</a:t>
+            </a:r>
+            <a:r>
+              <a:rPr lang="zh-CN" altLang="en-US" sz="1800">
+                <a:solidFill>
+                  <a:schemeClr val="accent6"/>
+                </a:solidFill>
+              </a:rPr>
+              <a:t>长期），</a:t>
+            </a:r>
+            <a:r>
+              <a:rPr lang="zh-CN" altLang="en-US">
+                <a:solidFill>
+                  <a:schemeClr val="accent6"/>
+                </a:solidFill>
+                <a:sym typeface="+mn-ea"/>
+              </a:rPr>
+              <a:t>监控</a:t>
+            </a:r>
+            <a:r>
+              <a:rPr lang="en-US" altLang="zh-CN">
+                <a:solidFill>
+                  <a:schemeClr val="accent6"/>
+                </a:solidFill>
+                <a:sym typeface="+mn-ea"/>
+              </a:rPr>
+              <a:t>/</a:t>
+            </a:r>
+            <a:r>
+              <a:rPr lang="zh-CN" altLang="en-US">
+                <a:solidFill>
+                  <a:schemeClr val="accent6"/>
+                </a:solidFill>
+                <a:sym typeface="+mn-ea"/>
+              </a:rPr>
+              <a:t>单元测试</a:t>
+            </a:r>
+            <a:r>
+              <a:rPr lang="en-US" altLang="zh-CN">
+                <a:solidFill>
+                  <a:schemeClr val="accent6"/>
+                </a:solidFill>
+                <a:sym typeface="+mn-ea"/>
+              </a:rPr>
+              <a:t>/</a:t>
+            </a:r>
+            <a:r>
+              <a:rPr lang="zh-CN" altLang="en-US" sz="1800">
+                <a:solidFill>
+                  <a:schemeClr val="accent6"/>
+                </a:solidFill>
+              </a:rPr>
+              <a:t>问题拆分，看文档</a:t>
+            </a:r>
+            <a:r>
+              <a:rPr lang="en-US" altLang="zh-CN" sz="1800">
+                <a:solidFill>
+                  <a:schemeClr val="accent6"/>
+                </a:solidFill>
+              </a:rPr>
+              <a:t>/</a:t>
+            </a:r>
+            <a:r>
+              <a:rPr lang="zh-CN" altLang="en-US" sz="1800">
+                <a:solidFill>
+                  <a:schemeClr val="accent6"/>
+                </a:solidFill>
+              </a:rPr>
+              <a:t>总结整理</a:t>
+            </a:r>
+            <a:endParaRPr lang="zh-CN" altLang="en-US" sz="1800">
+              <a:solidFill>
+                <a:schemeClr val="accent6"/>
+              </a:solidFill>
+            </a:endParaRPr>
+          </a:p>
+          <a:p>
+            <a:pPr lvl="1"/>
+            <a:r>
+              <a:rPr lang="zh-CN" altLang="en-US" sz="1800">
+                <a:solidFill>
+                  <a:schemeClr val="accent6"/>
+                </a:solidFill>
+              </a:rPr>
+              <a:t>静态开发：</a:t>
+            </a:r>
+            <a:r>
+              <a:rPr lang="zh-CN" altLang="en-US">
+                <a:solidFill>
+                  <a:schemeClr val="accent6"/>
+                </a:solidFill>
+                <a:sym typeface="+mn-ea"/>
+              </a:rPr>
+              <a:t>阅读相关源码（软硬件）</a:t>
+            </a:r>
+            <a:r>
+              <a:rPr lang="en-US" altLang="zh-CN">
+                <a:solidFill>
+                  <a:schemeClr val="accent6"/>
+                </a:solidFill>
+                <a:sym typeface="+mn-ea"/>
+              </a:rPr>
+              <a:t>/</a:t>
+            </a:r>
+            <a:r>
+              <a:rPr lang="zh-CN" altLang="en-US">
+                <a:solidFill>
+                  <a:schemeClr val="accent6"/>
+                </a:solidFill>
+                <a:sym typeface="+mn-ea"/>
+              </a:rPr>
+              <a:t>反汇编（布线板）</a:t>
+            </a:r>
+            <a:r>
+              <a:rPr lang="en-US" altLang="zh-CN">
+                <a:solidFill>
+                  <a:schemeClr val="accent6"/>
+                </a:solidFill>
+                <a:sym typeface="+mn-ea"/>
+              </a:rPr>
+              <a:t>/</a:t>
+            </a:r>
+            <a:r>
+              <a:rPr lang="zh-CN" altLang="en-US">
+                <a:solidFill>
+                  <a:schemeClr val="accent6"/>
+                </a:solidFill>
+                <a:sym typeface="+mn-ea"/>
+              </a:rPr>
+              <a:t>版本补丁，为整体设计和动态调试提供支撑</a:t>
+            </a:r>
+            <a:endParaRPr lang="zh-CN" altLang="en-US" sz="1800">
+              <a:solidFill>
+                <a:schemeClr val="accent6"/>
+              </a:solidFill>
+            </a:endParaRPr>
+          </a:p>
+          <a:p>
+            <a:pPr lvl="1"/>
+            <a:r>
+              <a:rPr lang="zh-CN" altLang="en-US" sz="1800">
+                <a:solidFill>
+                  <a:schemeClr val="accent6"/>
+                </a:solidFill>
+              </a:rPr>
+              <a:t>动态调试：</a:t>
+            </a:r>
+            <a:r>
+              <a:rPr lang="zh-CN" altLang="en-US">
+                <a:solidFill>
+                  <a:schemeClr val="accent6"/>
+                </a:solidFill>
+                <a:sym typeface="+mn-ea"/>
+              </a:rPr>
+              <a:t>调试源码</a:t>
+            </a:r>
+            <a:r>
+              <a:rPr lang="en-US" altLang="zh-CN">
+                <a:solidFill>
+                  <a:schemeClr val="accent6"/>
+                </a:solidFill>
+                <a:sym typeface="+mn-ea"/>
+              </a:rPr>
+              <a:t>/</a:t>
+            </a:r>
+            <a:r>
+              <a:rPr lang="zh-CN" altLang="en-US">
+                <a:solidFill>
+                  <a:schemeClr val="accent6"/>
+                </a:solidFill>
+                <a:sym typeface="+mn-ea"/>
+              </a:rPr>
+              <a:t>反汇编，</a:t>
+            </a:r>
+            <a:r>
+              <a:rPr lang="zh-CN" altLang="en-US" sz="1800">
+                <a:solidFill>
+                  <a:schemeClr val="accent6"/>
+                </a:solidFill>
+              </a:rPr>
+              <a:t>定制代码（打印日志</a:t>
+            </a:r>
+            <a:r>
+              <a:rPr lang="en-US" altLang="zh-CN" sz="1800">
+                <a:solidFill>
+                  <a:schemeClr val="accent6"/>
+                </a:solidFill>
+              </a:rPr>
+              <a:t>/</a:t>
+            </a:r>
+            <a:r>
+              <a:rPr lang="zh-CN" altLang="en-US" sz="1800">
+                <a:solidFill>
+                  <a:schemeClr val="accent6"/>
+                </a:solidFill>
+              </a:rPr>
+              <a:t>统计），</a:t>
+            </a:r>
+            <a:r>
+              <a:rPr lang="zh-CN" altLang="en-US">
+                <a:solidFill>
+                  <a:schemeClr val="accent6"/>
+                </a:solidFill>
+                <a:sym typeface="+mn-ea"/>
+              </a:rPr>
+              <a:t>比对分析（流程</a:t>
+            </a:r>
+            <a:r>
+              <a:rPr lang="en-US" altLang="zh-CN">
+                <a:solidFill>
+                  <a:schemeClr val="accent6"/>
+                </a:solidFill>
+                <a:sym typeface="+mn-ea"/>
+              </a:rPr>
+              <a:t>/</a:t>
+            </a:r>
+            <a:r>
+              <a:rPr lang="zh-CN" altLang="en-US">
+                <a:solidFill>
+                  <a:schemeClr val="accent6"/>
+                </a:solidFill>
+                <a:sym typeface="+mn-ea"/>
+              </a:rPr>
+              <a:t>数据</a:t>
+            </a:r>
+            <a:r>
+              <a:rPr lang="en-US" altLang="zh-CN">
+                <a:solidFill>
+                  <a:schemeClr val="accent6"/>
+                </a:solidFill>
+                <a:sym typeface="+mn-ea"/>
+              </a:rPr>
+              <a:t>/</a:t>
+            </a:r>
+            <a:r>
+              <a:rPr lang="zh-CN" altLang="en-US">
+                <a:solidFill>
+                  <a:schemeClr val="accent6"/>
+                </a:solidFill>
+                <a:sym typeface="+mn-ea"/>
+              </a:rPr>
+              <a:t>版本补丁代码</a:t>
+            </a:r>
+            <a:r>
+              <a:rPr lang="en-US" altLang="zh-CN">
+                <a:solidFill>
+                  <a:schemeClr val="accent6"/>
+                </a:solidFill>
+                <a:sym typeface="+mn-ea"/>
+              </a:rPr>
+              <a:t>/</a:t>
+            </a:r>
+            <a:r>
+              <a:rPr lang="zh-CN" altLang="en-US">
+                <a:solidFill>
+                  <a:schemeClr val="accent6"/>
+                </a:solidFill>
+                <a:sym typeface="+mn-ea"/>
+              </a:rPr>
+              <a:t>环境）</a:t>
+            </a:r>
+            <a:endParaRPr lang="zh-CN" altLang="en-US">
+              <a:solidFill>
+                <a:schemeClr val="accent6"/>
+              </a:solidFill>
+              <a:sym typeface="+mn-ea"/>
+            </a:endParaRPr>
+          </a:p>
+          <a:p>
+            <a:pPr lvl="1"/>
+            <a:r>
+              <a:rPr lang="en-US" altLang="zh-CN">
+                <a:solidFill>
+                  <a:schemeClr val="accent6"/>
+                </a:solidFill>
+                <a:sym typeface="+mn-ea"/>
+              </a:rPr>
+              <a:t>AI</a:t>
+            </a:r>
+            <a:r>
+              <a:rPr lang="zh-CN" altLang="en-US">
+                <a:solidFill>
+                  <a:schemeClr val="accent6"/>
+                </a:solidFill>
+                <a:sym typeface="+mn-ea"/>
+              </a:rPr>
+              <a:t>辅助：查资料，配合阅读源码，</a:t>
+            </a:r>
+            <a:r>
+              <a:rPr lang="zh-CN" altLang="en-US">
+                <a:solidFill>
+                  <a:schemeClr val="accent6"/>
+                </a:solidFill>
+                <a:sym typeface="+mn-ea"/>
+              </a:rPr>
+              <a:t>配合分析问题</a:t>
+            </a:r>
+            <a:endParaRPr lang="zh-CN" altLang="en-US">
+              <a:solidFill>
+                <a:schemeClr val="accent6"/>
+              </a:solidFill>
+            </a:endParaRPr>
+          </a:p>
+          <a:p>
+            <a:r>
+              <a:rPr lang="zh-CN" altLang="en-US">
+                <a:solidFill>
+                  <a:schemeClr val="accent6"/>
+                </a:solidFill>
+              </a:rPr>
+              <a:t>核心难点</a:t>
+            </a:r>
+            <a:endParaRPr lang="zh-CN" altLang="en-US">
+              <a:solidFill>
+                <a:schemeClr val="accent6"/>
+              </a:solidFill>
+            </a:endParaRPr>
+          </a:p>
+          <a:p>
+            <a:pPr marL="0" indent="0">
+              <a:buNone/>
+            </a:pPr>
+            <a:endParaRPr lang="zh-CN" altLang="en-US" sz="1620">
+              <a:solidFill>
+                <a:schemeClr val="accent6"/>
+              </a:solidFill>
+            </a:endParaRPr>
+          </a:p>
+        </p:txBody>
+      </p:sp>
+    </p:spTree>
+  </p:cSld>
+  <p:clrMapOvr>
+    <a:masterClrMapping/>
+  </p:clrMapOvr>
+</p:sld>
+</file>
+
+<file path=ppt/slides/slide13.xml><?xml version="1.0" encoding="utf-8"?>
+<p:sld xmlns:a="http://schemas.openxmlformats.org/drawingml/2006/main" xmlns:r="http://schemas.openxmlformats.org/officeDocument/2006/relationships" xmlns:p="http://schemas.openxmlformats.org/presentationml/2006/main">
+  <p:cSld>
+    <p:bg>
+      <p:bgPr>
+        <a:solidFill>
+          <a:schemeClr val="tx1"/>
+        </a:solidFill>
+        <a:effectLst/>
+      </p:bgPr>
+    </p:bg>
+    <p:spTree>
+      <p:nvGrpSpPr>
+        <p:cNvPr id="1" name=""/>
+        <p:cNvGrpSpPr/>
+        <p:nvPr/>
+      </p:nvGrpSpPr>
+      <p:grpSpPr/>
+      <p:sp>
+        <p:nvSpPr>
+          <p:cNvPr id="2" name="Title 1"/>
+          <p:cNvSpPr>
+            <a:spLocks noGrp="1"/>
+          </p:cNvSpPr>
+          <p:nvPr>
+            <p:ph type="title"/>
+          </p:nvPr>
+        </p:nvSpPr>
+        <p:spPr>
+          <a:xfrm>
+            <a:off x="647700" y="146685"/>
+            <a:ext cx="10515600" cy="604520"/>
+          </a:xfrm>
+        </p:spPr>
+        <p:txBody>
+          <a:bodyPr/>
+          <a:p>
+            <a:pPr algn="ctr"/>
+            <a:r>
+              <a:rPr lang="zh-CN" altLang="en-US">
+                <a:solidFill>
+                  <a:schemeClr val="accent6"/>
+                </a:solidFill>
+                <a:sym typeface="+mn-ea"/>
+              </a:rPr>
+              <a:t>运行时分析：</a:t>
+            </a:r>
+            <a:r>
+              <a:rPr lang="zh-CN" altLang="en-US">
+                <a:solidFill>
+                  <a:schemeClr val="accent6"/>
+                </a:solidFill>
+                <a:sym typeface="+mn-ea"/>
+              </a:rPr>
+              <a:t>具体内容：</a:t>
+            </a:r>
+            <a:r>
+              <a:rPr lang="zh-CN" altLang="en-US">
+                <a:solidFill>
+                  <a:schemeClr val="accent6"/>
+                </a:solidFill>
+                <a:sym typeface="+mn-ea"/>
+              </a:rPr>
+              <a:t>问题</a:t>
+            </a:r>
+            <a:r>
+              <a:rPr lang="zh-CN" altLang="en-US">
+                <a:solidFill>
+                  <a:schemeClr val="accent6"/>
+                </a:solidFill>
+              </a:rPr>
+              <a:t>处理</a:t>
+            </a:r>
+            <a:endParaRPr lang="zh-CN" altLang="en-US">
+              <a:solidFill>
+                <a:schemeClr val="accent6"/>
+              </a:solidFill>
+            </a:endParaRPr>
+          </a:p>
+        </p:txBody>
+      </p:sp>
+      <p:sp>
+        <p:nvSpPr>
+          <p:cNvPr id="5" name="Content Placeholder 4"/>
+          <p:cNvSpPr>
+            <a:spLocks noGrp="1"/>
+          </p:cNvSpPr>
+          <p:nvPr>
+            <p:ph idx="1"/>
+          </p:nvPr>
+        </p:nvSpPr>
+        <p:spPr>
+          <a:xfrm>
+            <a:off x="647700" y="952500"/>
+            <a:ext cx="11151870" cy="5859780"/>
+          </a:xfrm>
+        </p:spPr>
+        <p:txBody>
+          <a:bodyPr/>
+          <a:p>
+            <a:r>
+              <a:rPr lang="zh-CN" altLang="en-US">
+                <a:solidFill>
+                  <a:schemeClr val="accent6"/>
+                </a:solidFill>
+              </a:rPr>
+              <a:t>概要描述</a:t>
+            </a:r>
+            <a:endParaRPr lang="zh-CN" altLang="en-US">
+              <a:solidFill>
+                <a:schemeClr val="accent6"/>
+              </a:solidFill>
+            </a:endParaRPr>
+          </a:p>
+          <a:p>
+            <a:pPr lvl="1"/>
+            <a:r>
+              <a:rPr lang="zh-CN" altLang="en-US">
+                <a:solidFill>
+                  <a:schemeClr val="accent6"/>
+                </a:solidFill>
+                <a:sym typeface="+mn-ea"/>
+              </a:rPr>
+              <a:t>处理具体的</a:t>
+            </a:r>
+            <a:r>
+              <a:rPr lang="en-US" altLang="zh-CN">
+                <a:solidFill>
+                  <a:schemeClr val="accent6"/>
+                </a:solidFill>
+                <a:sym typeface="+mn-ea"/>
+              </a:rPr>
+              <a:t>bug</a:t>
+            </a:r>
+            <a:r>
+              <a:rPr lang="zh-CN" altLang="en-US">
+                <a:solidFill>
+                  <a:schemeClr val="accent6"/>
+                </a:solidFill>
+                <a:sym typeface="+mn-ea"/>
+              </a:rPr>
+              <a:t>（错误）；可能涉及多个组件，多方人员配合处理；也可能是单一模块单一人员。</a:t>
+            </a:r>
+            <a:endParaRPr lang="zh-CN" altLang="en-US" sz="1800">
+              <a:solidFill>
+                <a:schemeClr val="accent6"/>
+              </a:solidFill>
+            </a:endParaRPr>
+          </a:p>
+          <a:p>
+            <a:pPr lvl="1"/>
+            <a:r>
+              <a:rPr lang="zh-CN" altLang="en-US" sz="1800">
+                <a:solidFill>
+                  <a:schemeClr val="accent6"/>
+                </a:solidFill>
+              </a:rPr>
+              <a:t>需求目的：解决问题（不一定必须解决</a:t>
+            </a:r>
+            <a:r>
+              <a:rPr lang="en-US" altLang="zh-CN" sz="1800">
+                <a:solidFill>
+                  <a:schemeClr val="accent6"/>
+                </a:solidFill>
+              </a:rPr>
+              <a:t>bug</a:t>
+            </a:r>
+            <a:r>
+              <a:rPr lang="zh-CN" altLang="en-US" sz="1800">
+                <a:solidFill>
+                  <a:schemeClr val="accent6"/>
+                </a:solidFill>
+              </a:rPr>
+              <a:t>），功能类（业务</a:t>
+            </a:r>
+            <a:r>
+              <a:rPr lang="en-US" altLang="zh-CN" sz="1800">
+                <a:solidFill>
+                  <a:schemeClr val="accent6"/>
+                </a:solidFill>
+              </a:rPr>
+              <a:t>/</a:t>
+            </a:r>
+            <a:r>
+              <a:rPr lang="zh-CN" altLang="en-US" sz="1800">
+                <a:solidFill>
+                  <a:schemeClr val="accent6"/>
+                </a:solidFill>
+              </a:rPr>
+              <a:t>交互）</a:t>
+            </a:r>
+            <a:r>
+              <a:rPr lang="en-US" altLang="zh-CN" sz="1800">
+                <a:solidFill>
+                  <a:schemeClr val="accent6"/>
+                </a:solidFill>
+              </a:rPr>
+              <a:t>/</a:t>
+            </a:r>
+            <a:r>
+              <a:rPr lang="zh-CN" altLang="en-US" sz="1800">
+                <a:solidFill>
+                  <a:schemeClr val="accent6"/>
+                </a:solidFill>
+              </a:rPr>
+              <a:t>非功能类（性能</a:t>
+            </a:r>
+            <a:r>
+              <a:rPr lang="en-US" altLang="zh-CN" sz="1800">
+                <a:solidFill>
+                  <a:schemeClr val="accent6"/>
+                </a:solidFill>
+              </a:rPr>
+              <a:t>/</a:t>
+            </a:r>
+            <a:r>
+              <a:rPr lang="zh-CN" altLang="en-US" sz="1800">
+                <a:solidFill>
+                  <a:schemeClr val="accent6"/>
+                </a:solidFill>
+              </a:rPr>
+              <a:t>稳定性</a:t>
+            </a:r>
+            <a:r>
+              <a:rPr lang="en-US" altLang="zh-CN" sz="1800">
+                <a:solidFill>
+                  <a:schemeClr val="accent6"/>
+                </a:solidFill>
+              </a:rPr>
+              <a:t>/</a:t>
+            </a:r>
+            <a:r>
+              <a:rPr lang="zh-CN" altLang="en-US" sz="1800">
+                <a:solidFill>
+                  <a:schemeClr val="accent6"/>
+                </a:solidFill>
+              </a:rPr>
+              <a:t>兼容性）</a:t>
+            </a:r>
+            <a:endParaRPr lang="zh-CN" altLang="en-US" sz="1800">
+              <a:solidFill>
+                <a:schemeClr val="accent6"/>
+              </a:solidFill>
+            </a:endParaRPr>
+          </a:p>
+          <a:p>
+            <a:pPr lvl="1"/>
+            <a:r>
+              <a:rPr lang="zh-CN" altLang="en-US" sz="1800">
+                <a:solidFill>
+                  <a:schemeClr val="accent6"/>
+                </a:solidFill>
+              </a:rPr>
+              <a:t>基础资源：必备（有问题的详细描述和复现方法），</a:t>
+            </a:r>
+            <a:r>
+              <a:rPr lang="zh-CN" altLang="en-US">
+                <a:solidFill>
+                  <a:schemeClr val="accent6"/>
+                </a:solidFill>
+                <a:sym typeface="+mn-ea"/>
+              </a:rPr>
+              <a:t>可选（</a:t>
+            </a:r>
+            <a:r>
+              <a:rPr lang="zh-CN" altLang="en-US">
+                <a:solidFill>
+                  <a:schemeClr val="accent6"/>
+                </a:solidFill>
+                <a:sym typeface="+mn-ea"/>
+              </a:rPr>
+              <a:t>厂商或相关人员配合</a:t>
+            </a:r>
+            <a:r>
+              <a:rPr lang="en-US" altLang="zh-CN">
+                <a:solidFill>
+                  <a:schemeClr val="accent6"/>
+                </a:solidFill>
+                <a:sym typeface="+mn-ea"/>
+              </a:rPr>
+              <a:t>/</a:t>
+            </a:r>
+            <a:r>
+              <a:rPr lang="zh-CN" altLang="en-US">
+                <a:solidFill>
+                  <a:schemeClr val="accent6"/>
+                </a:solidFill>
+                <a:sym typeface="+mn-ea"/>
+              </a:rPr>
+              <a:t>文档</a:t>
+            </a:r>
+            <a:r>
+              <a:rPr lang="en-US" altLang="zh-CN">
+                <a:solidFill>
+                  <a:schemeClr val="accent6"/>
+                </a:solidFill>
+                <a:sym typeface="+mn-ea"/>
+              </a:rPr>
+              <a:t>/</a:t>
+            </a:r>
+            <a:r>
+              <a:rPr lang="zh-CN" altLang="en-US">
+                <a:solidFill>
+                  <a:schemeClr val="accent6"/>
+                </a:solidFill>
+                <a:sym typeface="+mn-ea"/>
+              </a:rPr>
+              <a:t>源码</a:t>
+            </a:r>
+            <a:r>
+              <a:rPr lang="en-US" altLang="zh-CN">
+                <a:solidFill>
+                  <a:schemeClr val="accent6"/>
+                </a:solidFill>
+                <a:sym typeface="+mn-ea"/>
+              </a:rPr>
+              <a:t>/</a:t>
+            </a:r>
+            <a:r>
+              <a:rPr lang="zh-CN" altLang="en-US">
+                <a:solidFill>
+                  <a:schemeClr val="accent6"/>
+                </a:solidFill>
+                <a:sym typeface="+mn-ea"/>
+              </a:rPr>
+              <a:t>反汇编）</a:t>
+            </a:r>
+            <a:endParaRPr lang="zh-CN" altLang="en-US">
+              <a:solidFill>
+                <a:schemeClr val="accent6"/>
+              </a:solidFill>
+            </a:endParaRPr>
+          </a:p>
+          <a:p>
+            <a:r>
+              <a:rPr lang="zh-CN" altLang="en-US">
+                <a:solidFill>
+                  <a:schemeClr val="accent6"/>
+                </a:solidFill>
+              </a:rPr>
+              <a:t>处理方法</a:t>
+            </a:r>
+            <a:endParaRPr lang="zh-CN" altLang="en-US">
+              <a:solidFill>
+                <a:schemeClr val="accent6"/>
+              </a:solidFill>
+            </a:endParaRPr>
+          </a:p>
+          <a:p>
+            <a:pPr lvl="1"/>
+            <a:r>
+              <a:rPr lang="zh-CN" altLang="en-US" sz="1800">
+                <a:solidFill>
+                  <a:schemeClr val="accent6"/>
+                </a:solidFill>
+              </a:rPr>
+              <a:t>整体设计：了解整体结构</a:t>
+            </a:r>
+            <a:r>
+              <a:rPr lang="en-US" altLang="zh-CN" sz="1800">
+                <a:solidFill>
+                  <a:schemeClr val="accent6"/>
+                </a:solidFill>
+              </a:rPr>
+              <a:t>/</a:t>
+            </a:r>
+            <a:r>
+              <a:rPr lang="zh-CN" altLang="en-US" sz="1800">
+                <a:solidFill>
+                  <a:schemeClr val="accent6"/>
+                </a:solidFill>
+              </a:rPr>
+              <a:t>给出解决方案（临时</a:t>
+            </a:r>
+            <a:r>
+              <a:rPr lang="en-US" altLang="zh-CN" sz="1800">
+                <a:solidFill>
+                  <a:schemeClr val="accent6"/>
+                </a:solidFill>
+              </a:rPr>
+              <a:t>/</a:t>
+            </a:r>
+            <a:r>
+              <a:rPr lang="zh-CN" altLang="en-US" sz="1800">
+                <a:solidFill>
+                  <a:schemeClr val="accent6"/>
+                </a:solidFill>
+              </a:rPr>
+              <a:t>长期），</a:t>
+            </a:r>
+            <a:r>
+              <a:rPr lang="zh-CN" altLang="en-US">
+                <a:solidFill>
+                  <a:schemeClr val="accent6"/>
+                </a:solidFill>
+                <a:sym typeface="+mn-ea"/>
+              </a:rPr>
+              <a:t>监控</a:t>
+            </a:r>
+            <a:r>
+              <a:rPr lang="en-US" altLang="zh-CN">
+                <a:solidFill>
+                  <a:schemeClr val="accent6"/>
+                </a:solidFill>
+                <a:sym typeface="+mn-ea"/>
+              </a:rPr>
+              <a:t>/</a:t>
+            </a:r>
+            <a:r>
+              <a:rPr lang="zh-CN" altLang="en-US">
+                <a:solidFill>
+                  <a:schemeClr val="accent6"/>
+                </a:solidFill>
+                <a:sym typeface="+mn-ea"/>
+              </a:rPr>
+              <a:t>单元测试</a:t>
+            </a:r>
+            <a:r>
+              <a:rPr lang="en-US" altLang="zh-CN">
+                <a:solidFill>
+                  <a:schemeClr val="accent6"/>
+                </a:solidFill>
+                <a:sym typeface="+mn-ea"/>
+              </a:rPr>
+              <a:t>/</a:t>
+            </a:r>
+            <a:r>
+              <a:rPr lang="zh-CN" altLang="en-US" sz="1800">
+                <a:solidFill>
+                  <a:schemeClr val="accent6"/>
+                </a:solidFill>
+              </a:rPr>
+              <a:t>问题拆分，看文档</a:t>
+            </a:r>
+            <a:r>
+              <a:rPr lang="en-US" altLang="zh-CN" sz="1800">
+                <a:solidFill>
+                  <a:schemeClr val="accent6"/>
+                </a:solidFill>
+              </a:rPr>
+              <a:t>/</a:t>
+            </a:r>
+            <a:r>
+              <a:rPr lang="zh-CN" altLang="en-US" sz="1800">
+                <a:solidFill>
+                  <a:schemeClr val="accent6"/>
+                </a:solidFill>
+              </a:rPr>
+              <a:t>总结整理</a:t>
+            </a:r>
+            <a:endParaRPr lang="zh-CN" altLang="en-US" sz="1800">
+              <a:solidFill>
+                <a:schemeClr val="accent6"/>
+              </a:solidFill>
+            </a:endParaRPr>
+          </a:p>
+          <a:p>
+            <a:pPr lvl="1"/>
+            <a:r>
+              <a:rPr lang="zh-CN" altLang="en-US" sz="1800">
+                <a:solidFill>
+                  <a:schemeClr val="accent6"/>
+                </a:solidFill>
+              </a:rPr>
+              <a:t>静态开发：</a:t>
+            </a:r>
+            <a:r>
+              <a:rPr lang="zh-CN" altLang="en-US">
+                <a:solidFill>
+                  <a:schemeClr val="accent6"/>
+                </a:solidFill>
+                <a:sym typeface="+mn-ea"/>
+              </a:rPr>
+              <a:t>阅读相关源码（软硬件）</a:t>
+            </a:r>
+            <a:r>
+              <a:rPr lang="en-US" altLang="zh-CN">
+                <a:solidFill>
+                  <a:schemeClr val="accent6"/>
+                </a:solidFill>
+                <a:sym typeface="+mn-ea"/>
+              </a:rPr>
+              <a:t>/</a:t>
+            </a:r>
+            <a:r>
+              <a:rPr lang="zh-CN" altLang="en-US">
+                <a:solidFill>
+                  <a:schemeClr val="accent6"/>
+                </a:solidFill>
+                <a:sym typeface="+mn-ea"/>
+              </a:rPr>
+              <a:t>反汇编（布线板）</a:t>
+            </a:r>
+            <a:r>
+              <a:rPr lang="en-US" altLang="zh-CN">
+                <a:solidFill>
+                  <a:schemeClr val="accent6"/>
+                </a:solidFill>
+                <a:sym typeface="+mn-ea"/>
+              </a:rPr>
+              <a:t>/</a:t>
+            </a:r>
+            <a:r>
+              <a:rPr lang="zh-CN" altLang="en-US">
+                <a:solidFill>
+                  <a:schemeClr val="accent6"/>
+                </a:solidFill>
+                <a:sym typeface="+mn-ea"/>
+              </a:rPr>
+              <a:t>版本补丁，为整体设计和动态调试提供支撑</a:t>
+            </a:r>
+            <a:endParaRPr lang="zh-CN" altLang="en-US" sz="1800">
+              <a:solidFill>
+                <a:schemeClr val="accent6"/>
+              </a:solidFill>
+            </a:endParaRPr>
+          </a:p>
+          <a:p>
+            <a:pPr lvl="1"/>
+            <a:r>
+              <a:rPr lang="zh-CN" altLang="en-US" sz="1800">
+                <a:solidFill>
+                  <a:schemeClr val="accent6"/>
+                </a:solidFill>
+              </a:rPr>
+              <a:t>动态调试：</a:t>
+            </a:r>
+            <a:r>
+              <a:rPr lang="zh-CN" altLang="en-US">
+                <a:solidFill>
+                  <a:schemeClr val="accent6"/>
+                </a:solidFill>
+                <a:sym typeface="+mn-ea"/>
+              </a:rPr>
+              <a:t>调试源码</a:t>
+            </a:r>
+            <a:r>
+              <a:rPr lang="en-US" altLang="zh-CN">
+                <a:solidFill>
+                  <a:schemeClr val="accent6"/>
+                </a:solidFill>
+                <a:sym typeface="+mn-ea"/>
+              </a:rPr>
+              <a:t>/</a:t>
+            </a:r>
+            <a:r>
+              <a:rPr lang="zh-CN" altLang="en-US">
+                <a:solidFill>
+                  <a:schemeClr val="accent6"/>
+                </a:solidFill>
+                <a:sym typeface="+mn-ea"/>
+              </a:rPr>
+              <a:t>反汇编，</a:t>
+            </a:r>
+            <a:r>
+              <a:rPr lang="zh-CN" altLang="en-US" sz="1800">
+                <a:solidFill>
+                  <a:schemeClr val="accent6"/>
+                </a:solidFill>
+              </a:rPr>
+              <a:t>定制代码（打印日志</a:t>
+            </a:r>
+            <a:r>
+              <a:rPr lang="en-US" altLang="zh-CN" sz="1800">
+                <a:solidFill>
+                  <a:schemeClr val="accent6"/>
+                </a:solidFill>
+              </a:rPr>
+              <a:t>/</a:t>
+            </a:r>
+            <a:r>
+              <a:rPr lang="zh-CN" altLang="en-US" sz="1800">
+                <a:solidFill>
+                  <a:schemeClr val="accent6"/>
+                </a:solidFill>
+              </a:rPr>
+              <a:t>统计），</a:t>
+            </a:r>
+            <a:r>
+              <a:rPr lang="zh-CN" altLang="en-US">
+                <a:solidFill>
+                  <a:schemeClr val="accent6"/>
+                </a:solidFill>
+                <a:sym typeface="+mn-ea"/>
+              </a:rPr>
+              <a:t>比对分析（流程</a:t>
+            </a:r>
+            <a:r>
+              <a:rPr lang="en-US" altLang="zh-CN">
+                <a:solidFill>
+                  <a:schemeClr val="accent6"/>
+                </a:solidFill>
+                <a:sym typeface="+mn-ea"/>
+              </a:rPr>
+              <a:t>/</a:t>
+            </a:r>
+            <a:r>
+              <a:rPr lang="zh-CN" altLang="en-US">
+                <a:solidFill>
+                  <a:schemeClr val="accent6"/>
+                </a:solidFill>
+                <a:sym typeface="+mn-ea"/>
+              </a:rPr>
+              <a:t>数据</a:t>
+            </a:r>
+            <a:r>
+              <a:rPr lang="en-US" altLang="zh-CN">
+                <a:solidFill>
+                  <a:schemeClr val="accent6"/>
+                </a:solidFill>
+                <a:sym typeface="+mn-ea"/>
+              </a:rPr>
+              <a:t>/</a:t>
+            </a:r>
+            <a:r>
+              <a:rPr lang="zh-CN" altLang="en-US">
+                <a:solidFill>
+                  <a:schemeClr val="accent6"/>
+                </a:solidFill>
+                <a:sym typeface="+mn-ea"/>
+              </a:rPr>
+              <a:t>版本补丁代码</a:t>
+            </a:r>
+            <a:r>
+              <a:rPr lang="en-US" altLang="zh-CN">
+                <a:solidFill>
+                  <a:schemeClr val="accent6"/>
+                </a:solidFill>
+                <a:sym typeface="+mn-ea"/>
+              </a:rPr>
+              <a:t>/</a:t>
+            </a:r>
+            <a:r>
+              <a:rPr lang="zh-CN" altLang="en-US">
+                <a:solidFill>
+                  <a:schemeClr val="accent6"/>
+                </a:solidFill>
+                <a:sym typeface="+mn-ea"/>
+              </a:rPr>
+              <a:t>环境）</a:t>
+            </a:r>
+            <a:endParaRPr lang="zh-CN" altLang="en-US">
+              <a:solidFill>
+                <a:schemeClr val="accent6"/>
+              </a:solidFill>
+              <a:sym typeface="+mn-ea"/>
+            </a:endParaRPr>
+          </a:p>
+          <a:p>
+            <a:pPr lvl="1"/>
+            <a:r>
+              <a:rPr lang="en-US" altLang="zh-CN">
+                <a:solidFill>
+                  <a:schemeClr val="accent6"/>
+                </a:solidFill>
+                <a:sym typeface="+mn-ea"/>
+              </a:rPr>
+              <a:t>AI</a:t>
+            </a:r>
+            <a:r>
+              <a:rPr lang="zh-CN" altLang="en-US">
+                <a:solidFill>
+                  <a:schemeClr val="accent6"/>
+                </a:solidFill>
+                <a:sym typeface="+mn-ea"/>
+              </a:rPr>
+              <a:t>辅助：查资料，配合阅读源码，</a:t>
+            </a:r>
+            <a:r>
+              <a:rPr lang="zh-CN" altLang="en-US">
+                <a:solidFill>
+                  <a:schemeClr val="accent6"/>
+                </a:solidFill>
+                <a:sym typeface="+mn-ea"/>
+              </a:rPr>
+              <a:t>配合分析问题</a:t>
+            </a:r>
+            <a:endParaRPr lang="zh-CN" altLang="en-US">
+              <a:solidFill>
+                <a:schemeClr val="accent6"/>
+              </a:solidFill>
+            </a:endParaRPr>
+          </a:p>
+          <a:p>
+            <a:r>
+              <a:rPr lang="zh-CN" altLang="en-US">
+                <a:solidFill>
+                  <a:schemeClr val="accent6"/>
+                </a:solidFill>
+              </a:rPr>
+              <a:t>核心难点</a:t>
+            </a:r>
+            <a:endParaRPr lang="zh-CN" altLang="en-US">
+              <a:solidFill>
+                <a:schemeClr val="accent6"/>
+              </a:solidFill>
+            </a:endParaRPr>
+          </a:p>
+          <a:p>
+            <a:pPr lvl="1"/>
+            <a:r>
+              <a:rPr lang="zh-CN" altLang="en-US">
+                <a:solidFill>
+                  <a:schemeClr val="accent6"/>
+                </a:solidFill>
+              </a:rPr>
+              <a:t>主观态度：害怕担责，顾及面子，工作量分配问题。</a:t>
+            </a:r>
+            <a:endParaRPr lang="zh-CN" altLang="en-US">
+              <a:solidFill>
+                <a:schemeClr val="accent6"/>
+              </a:solidFill>
+            </a:endParaRPr>
+          </a:p>
+          <a:p>
+            <a:pPr lvl="1"/>
+            <a:r>
+              <a:rPr lang="zh-CN" altLang="en-US">
+                <a:solidFill>
+                  <a:schemeClr val="accent6"/>
+                </a:solidFill>
+              </a:rPr>
+              <a:t>环境搭建：涉及多方协调沟通配合，复现难（出差</a:t>
+            </a:r>
+            <a:r>
+              <a:rPr lang="en-US" altLang="zh-CN">
+                <a:solidFill>
+                  <a:schemeClr val="accent6"/>
+                </a:solidFill>
+              </a:rPr>
+              <a:t>/</a:t>
+            </a:r>
+            <a:r>
+              <a:rPr lang="zh-CN" altLang="en-US">
+                <a:solidFill>
+                  <a:schemeClr val="accent6"/>
+                </a:solidFill>
+              </a:rPr>
+              <a:t>环境差</a:t>
+            </a:r>
+            <a:r>
+              <a:rPr lang="en-US" altLang="zh-CN">
+                <a:solidFill>
+                  <a:schemeClr val="accent6"/>
+                </a:solidFill>
+              </a:rPr>
+              <a:t>/</a:t>
+            </a:r>
+            <a:r>
+              <a:rPr lang="zh-CN" altLang="en-US">
+                <a:solidFill>
+                  <a:schemeClr val="accent6"/>
+                </a:solidFill>
+              </a:rPr>
+              <a:t>复现几率低）。</a:t>
+            </a:r>
+            <a:endParaRPr lang="zh-CN" altLang="en-US">
+              <a:solidFill>
+                <a:schemeClr val="accent6"/>
+              </a:solidFill>
+            </a:endParaRPr>
+          </a:p>
+          <a:p>
+            <a:pPr lvl="1"/>
+            <a:r>
+              <a:rPr lang="zh-CN" altLang="en-US">
+                <a:solidFill>
+                  <a:schemeClr val="accent6"/>
+                </a:solidFill>
+              </a:rPr>
+              <a:t>熟悉了解：业务（专业度高</a:t>
+            </a:r>
+            <a:r>
+              <a:rPr lang="en-US" altLang="zh-CN">
+                <a:solidFill>
+                  <a:schemeClr val="accent6"/>
+                </a:solidFill>
+              </a:rPr>
+              <a:t>/</a:t>
+            </a:r>
+            <a:r>
+              <a:rPr lang="zh-CN" altLang="en-US">
+                <a:solidFill>
+                  <a:schemeClr val="accent6"/>
+                </a:solidFill>
+              </a:rPr>
+              <a:t>模型复杂</a:t>
+            </a:r>
+            <a:r>
+              <a:rPr lang="en-US" altLang="zh-CN">
+                <a:solidFill>
+                  <a:schemeClr val="accent6"/>
+                </a:solidFill>
+              </a:rPr>
+              <a:t>/</a:t>
+            </a:r>
+            <a:r>
+              <a:rPr lang="zh-CN" altLang="en-US">
+                <a:solidFill>
+                  <a:schemeClr val="accent6"/>
+                </a:solidFill>
+              </a:rPr>
+              <a:t>无专业人员），设计（不了解结构），代码（不了解代码</a:t>
+            </a:r>
+            <a:r>
+              <a:rPr lang="en-US" altLang="zh-CN">
+                <a:solidFill>
+                  <a:schemeClr val="accent6"/>
+                </a:solidFill>
+              </a:rPr>
+              <a:t>/</a:t>
+            </a:r>
+            <a:r>
+              <a:rPr lang="zh-CN" altLang="en-US">
+                <a:solidFill>
+                  <a:schemeClr val="accent6"/>
+                </a:solidFill>
+              </a:rPr>
+              <a:t>无代码）</a:t>
+            </a:r>
+            <a:endParaRPr lang="zh-CN" altLang="en-US">
+              <a:solidFill>
+                <a:schemeClr val="accent6"/>
+              </a:solidFill>
+            </a:endParaRPr>
+          </a:p>
+          <a:p>
+            <a:pPr marL="0" indent="0">
+              <a:buNone/>
+            </a:pPr>
+            <a:endParaRPr lang="zh-CN" altLang="en-US" sz="1620">
+              <a:solidFill>
+                <a:schemeClr val="accent6"/>
+              </a:solidFill>
+            </a:endParaRPr>
+          </a:p>
+        </p:txBody>
+      </p:sp>
+    </p:spTree>
+  </p:cSld>
+  <p:clrMapOvr>
+    <a:masterClrMapping/>
+  </p:clrMapOvr>
+</p:sld>
+</file>
+
+<file path=ppt/slides/slide14.xml><?xml version="1.0" encoding="utf-8"?>
+<p:sld xmlns:a="http://schemas.openxmlformats.org/drawingml/2006/main" xmlns:r="http://schemas.openxmlformats.org/officeDocument/2006/relationships" xmlns:p="http://schemas.openxmlformats.org/presentationml/2006/main">
+  <p:cSld>
+    <p:bg>
+      <p:bgPr>
+        <a:solidFill>
+          <a:schemeClr val="tx1"/>
+        </a:solidFill>
+        <a:effectLst/>
+      </p:bgPr>
+    </p:bg>
+    <p:spTree>
+      <p:nvGrpSpPr>
+        <p:cNvPr id="1" name=""/>
+        <p:cNvGrpSpPr/>
+        <p:nvPr/>
+      </p:nvGrpSpPr>
+      <p:grpSpPr/>
+      <p:sp>
+        <p:nvSpPr>
+          <p:cNvPr id="2" name="Title 1"/>
+          <p:cNvSpPr>
+            <a:spLocks noGrp="1"/>
+          </p:cNvSpPr>
+          <p:nvPr>
+            <p:ph type="title"/>
+          </p:nvPr>
+        </p:nvSpPr>
+        <p:spPr>
+          <a:xfrm>
+            <a:off x="647700" y="146685"/>
+            <a:ext cx="10515600" cy="604520"/>
+          </a:xfrm>
+        </p:spPr>
+        <p:txBody>
+          <a:bodyPr/>
+          <a:p>
+            <a:pPr algn="ctr"/>
+            <a:r>
+              <a:rPr lang="zh-CN" altLang="en-US">
+                <a:solidFill>
+                  <a:schemeClr val="accent6"/>
+                </a:solidFill>
+                <a:sym typeface="+mn-ea"/>
+              </a:rPr>
+              <a:t>运行时分析：</a:t>
+            </a:r>
+            <a:r>
+              <a:rPr lang="zh-CN" altLang="en-US">
+                <a:solidFill>
+                  <a:schemeClr val="accent6"/>
+                </a:solidFill>
+                <a:sym typeface="+mn-ea"/>
+              </a:rPr>
+              <a:t>具体内容：</a:t>
+            </a:r>
+            <a:r>
+              <a:rPr lang="zh-CN" altLang="en-US">
+                <a:solidFill>
+                  <a:schemeClr val="accent6"/>
+                </a:solidFill>
+              </a:rPr>
+              <a:t>原理分析</a:t>
+            </a:r>
+            <a:endParaRPr lang="zh-CN" altLang="en-US">
+              <a:solidFill>
+                <a:schemeClr val="accent6"/>
+              </a:solidFill>
+            </a:endParaRPr>
+          </a:p>
+        </p:txBody>
+      </p:sp>
+      <p:sp>
+        <p:nvSpPr>
+          <p:cNvPr id="5" name="Content Placeholder 4"/>
+          <p:cNvSpPr>
+            <a:spLocks noGrp="1"/>
+          </p:cNvSpPr>
+          <p:nvPr>
+            <p:ph idx="1"/>
+          </p:nvPr>
+        </p:nvSpPr>
+        <p:spPr>
+          <a:xfrm>
+            <a:off x="647700" y="952500"/>
+            <a:ext cx="11357610" cy="5859780"/>
+          </a:xfrm>
+        </p:spPr>
+        <p:txBody>
+          <a:bodyPr/>
+          <a:p>
+            <a:r>
+              <a:rPr lang="zh-CN" altLang="en-US">
+                <a:solidFill>
+                  <a:schemeClr val="accent6"/>
+                </a:solidFill>
+              </a:rPr>
+              <a:t>概要描述</a:t>
+            </a:r>
+            <a:endParaRPr lang="zh-CN" altLang="en-US">
+              <a:solidFill>
+                <a:schemeClr val="accent6"/>
+              </a:solidFill>
+            </a:endParaRPr>
+          </a:p>
+          <a:p>
+            <a:pPr marL="457200" lvl="1" indent="0">
+              <a:buNone/>
+            </a:pPr>
+            <a:endParaRPr lang="zh-CN" altLang="en-US">
+              <a:solidFill>
+                <a:schemeClr val="accent6"/>
+              </a:solidFill>
+            </a:endParaRPr>
+          </a:p>
+          <a:p>
+            <a:pPr marL="457200" lvl="1" indent="0">
+              <a:buNone/>
+            </a:pPr>
+            <a:endParaRPr lang="zh-CN" altLang="en-US">
+              <a:solidFill>
+                <a:schemeClr val="accent6"/>
+              </a:solidFill>
+            </a:endParaRPr>
+          </a:p>
+          <a:p>
+            <a:pPr marL="457200" lvl="1" indent="0">
+              <a:buNone/>
+            </a:pPr>
+            <a:endParaRPr lang="zh-CN" altLang="en-US">
+              <a:solidFill>
+                <a:schemeClr val="accent6"/>
+              </a:solidFill>
+            </a:endParaRPr>
+          </a:p>
+          <a:p>
+            <a:r>
+              <a:rPr lang="zh-CN" altLang="en-US">
+                <a:solidFill>
+                  <a:schemeClr val="accent6"/>
+                </a:solidFill>
+              </a:rPr>
+              <a:t>处理方法</a:t>
+            </a:r>
+            <a:endParaRPr lang="zh-CN" altLang="en-US">
+              <a:solidFill>
+                <a:schemeClr val="accent6"/>
+              </a:solidFill>
+            </a:endParaRPr>
+          </a:p>
+          <a:p>
+            <a:pPr marL="457200" lvl="1" indent="0">
+              <a:buNone/>
+            </a:pPr>
+            <a:endParaRPr lang="zh-CN" altLang="en-US" sz="1800">
+              <a:solidFill>
+                <a:schemeClr val="accent6"/>
+              </a:solidFill>
+            </a:endParaRPr>
+          </a:p>
+          <a:p>
+            <a:pPr marL="457200" lvl="1" indent="0">
+              <a:buNone/>
+            </a:pPr>
+            <a:endParaRPr lang="zh-CN" altLang="en-US" sz="1800">
+              <a:solidFill>
+                <a:schemeClr val="accent6"/>
+              </a:solidFill>
+            </a:endParaRPr>
+          </a:p>
+          <a:p>
+            <a:pPr marL="457200" lvl="1" indent="0">
+              <a:buNone/>
+            </a:pPr>
+            <a:endParaRPr lang="zh-CN" altLang="en-US" sz="1800">
+              <a:solidFill>
+                <a:schemeClr val="accent6"/>
+              </a:solidFill>
+            </a:endParaRPr>
+          </a:p>
+          <a:p>
+            <a:pPr marL="457200" lvl="1" indent="0">
+              <a:buNone/>
+            </a:pPr>
+            <a:endParaRPr lang="zh-CN" altLang="en-US">
+              <a:solidFill>
+                <a:schemeClr val="accent6"/>
+              </a:solidFill>
+            </a:endParaRPr>
+          </a:p>
+          <a:p>
+            <a:r>
+              <a:rPr lang="zh-CN" altLang="en-US">
+                <a:solidFill>
+                  <a:schemeClr val="accent6"/>
+                </a:solidFill>
+              </a:rPr>
+              <a:t>主要难点</a:t>
+            </a:r>
+            <a:endParaRPr lang="zh-CN" altLang="en-US">
+              <a:solidFill>
+                <a:schemeClr val="accent6"/>
+              </a:solidFill>
+            </a:endParaRPr>
+          </a:p>
+          <a:p>
+            <a:pPr marL="457200" lvl="1" indent="0">
+              <a:buNone/>
+            </a:pPr>
+            <a:endParaRPr lang="zh-CN" altLang="en-US">
+              <a:solidFill>
+                <a:schemeClr val="accent6"/>
+              </a:solidFill>
+            </a:endParaRPr>
+          </a:p>
+          <a:p>
+            <a:pPr lvl="1"/>
+            <a:endParaRPr lang="zh-CN" altLang="en-US" sz="1620">
+              <a:solidFill>
+                <a:schemeClr val="accent6"/>
+              </a:solidFill>
+            </a:endParaRPr>
+          </a:p>
+        </p:txBody>
+      </p:sp>
+    </p:spTree>
+  </p:cSld>
+  <p:clrMapOvr>
+    <a:masterClrMapping/>
+  </p:clrMapOvr>
+</p:sld>
+</file>
+
+<file path=ppt/slides/slide15.xml><?xml version="1.0" encoding="utf-8"?>
+<p:sld xmlns:a="http://schemas.openxmlformats.org/drawingml/2006/main" xmlns:r="http://schemas.openxmlformats.org/officeDocument/2006/relationships" xmlns:p="http://schemas.openxmlformats.org/presentationml/2006/main">
+  <p:cSld>
+    <p:bg>
+      <p:bgPr>
+        <a:solidFill>
+          <a:schemeClr val="tx1"/>
+        </a:solidFill>
+        <a:effectLst/>
+      </p:bgPr>
+    </p:bg>
+    <p:spTree>
+      <p:nvGrpSpPr>
+        <p:cNvPr id="1" name=""/>
+        <p:cNvGrpSpPr/>
+        <p:nvPr/>
+      </p:nvGrpSpPr>
+      <p:grpSpPr/>
+      <p:sp>
+        <p:nvSpPr>
+          <p:cNvPr id="2" name="Title 1"/>
+          <p:cNvSpPr>
+            <a:spLocks noGrp="1"/>
+          </p:cNvSpPr>
+          <p:nvPr>
+            <p:ph type="title"/>
+          </p:nvPr>
+        </p:nvSpPr>
+        <p:spPr>
+          <a:xfrm>
+            <a:off x="647700" y="146685"/>
+            <a:ext cx="10515600" cy="604520"/>
+          </a:xfrm>
+        </p:spPr>
+        <p:txBody>
+          <a:bodyPr/>
+          <a:p>
+            <a:pPr algn="ctr"/>
+            <a:r>
+              <a:rPr lang="zh-CN" altLang="en-US">
+                <a:solidFill>
+                  <a:schemeClr val="accent6"/>
+                </a:solidFill>
+                <a:sym typeface="+mn-ea"/>
+              </a:rPr>
+              <a:t>运行时分析：</a:t>
+            </a:r>
+            <a:r>
+              <a:rPr lang="zh-CN" altLang="en-US">
+                <a:solidFill>
+                  <a:schemeClr val="accent6"/>
+                </a:solidFill>
+                <a:sym typeface="+mn-ea"/>
+              </a:rPr>
+              <a:t>具体内容：</a:t>
+            </a:r>
+            <a:r>
+              <a:rPr lang="zh-CN" altLang="en-US">
+                <a:solidFill>
+                  <a:schemeClr val="accent6"/>
+                </a:solidFill>
+              </a:rPr>
+              <a:t>原理分析</a:t>
+            </a:r>
+            <a:endParaRPr lang="zh-CN" altLang="en-US">
+              <a:solidFill>
+                <a:schemeClr val="accent6"/>
+              </a:solidFill>
+            </a:endParaRPr>
+          </a:p>
+        </p:txBody>
+      </p:sp>
+      <p:sp>
+        <p:nvSpPr>
+          <p:cNvPr id="5" name="Content Placeholder 4"/>
+          <p:cNvSpPr>
+            <a:spLocks noGrp="1"/>
+          </p:cNvSpPr>
+          <p:nvPr>
+            <p:ph idx="1"/>
+          </p:nvPr>
+        </p:nvSpPr>
+        <p:spPr>
+          <a:xfrm>
+            <a:off x="647700" y="952500"/>
+            <a:ext cx="11357610" cy="5859780"/>
+          </a:xfrm>
+        </p:spPr>
+        <p:txBody>
+          <a:bodyPr/>
+          <a:p>
+            <a:r>
+              <a:rPr lang="zh-CN" altLang="en-US">
+                <a:solidFill>
+                  <a:schemeClr val="accent6"/>
+                </a:solidFill>
+              </a:rPr>
+              <a:t>概要描述</a:t>
+            </a:r>
+            <a:endParaRPr lang="zh-CN" altLang="en-US">
+              <a:solidFill>
+                <a:schemeClr val="accent6"/>
+              </a:solidFill>
+            </a:endParaRPr>
+          </a:p>
+          <a:p>
+            <a:pPr lvl="1"/>
+            <a:r>
+              <a:rPr lang="zh-CN" altLang="en-US">
+                <a:solidFill>
+                  <a:schemeClr val="accent6"/>
+                </a:solidFill>
+              </a:rPr>
+              <a:t>对应用</a:t>
+            </a:r>
+            <a:r>
+              <a:rPr lang="en-US" altLang="zh-CN">
+                <a:solidFill>
+                  <a:schemeClr val="accent6"/>
+                </a:solidFill>
+              </a:rPr>
+              <a:t>/</a:t>
+            </a:r>
+            <a:r>
+              <a:rPr lang="zh-CN" altLang="en-US">
+                <a:solidFill>
+                  <a:schemeClr val="accent6"/>
+                </a:solidFill>
+              </a:rPr>
+              <a:t>系统</a:t>
+            </a:r>
+            <a:r>
+              <a:rPr lang="en-US" altLang="zh-CN">
+                <a:solidFill>
+                  <a:schemeClr val="accent6"/>
+                </a:solidFill>
+              </a:rPr>
+              <a:t>/</a:t>
+            </a:r>
+            <a:r>
+              <a:rPr lang="zh-CN" altLang="en-US">
+                <a:solidFill>
+                  <a:schemeClr val="accent6"/>
+                </a:solidFill>
+              </a:rPr>
+              <a:t>硬件的运行机理进行了解和学习，理论</a:t>
+            </a:r>
+            <a:r>
+              <a:rPr lang="en-US" altLang="zh-CN">
+                <a:solidFill>
+                  <a:schemeClr val="accent6"/>
+                </a:solidFill>
+              </a:rPr>
+              <a:t>+</a:t>
+            </a:r>
+            <a:r>
+              <a:rPr lang="zh-CN" altLang="en-US">
+                <a:solidFill>
+                  <a:schemeClr val="accent6"/>
+                </a:solidFill>
+              </a:rPr>
+              <a:t>实践，动态</a:t>
+            </a:r>
+            <a:r>
+              <a:rPr lang="en-US" altLang="zh-CN">
+                <a:solidFill>
+                  <a:schemeClr val="accent6"/>
+                </a:solidFill>
+              </a:rPr>
+              <a:t>+</a:t>
+            </a:r>
+            <a:r>
+              <a:rPr lang="zh-CN" altLang="en-US">
+                <a:solidFill>
+                  <a:schemeClr val="accent6"/>
+                </a:solidFill>
+              </a:rPr>
+              <a:t>静态。</a:t>
+            </a:r>
+            <a:endParaRPr lang="zh-CN" altLang="en-US">
+              <a:solidFill>
+                <a:schemeClr val="accent6"/>
+              </a:solidFill>
+            </a:endParaRPr>
+          </a:p>
+          <a:p>
+            <a:pPr lvl="1"/>
+            <a:r>
+              <a:rPr lang="zh-CN" altLang="en-US">
+                <a:solidFill>
+                  <a:schemeClr val="accent6"/>
+                </a:solidFill>
+              </a:rPr>
+              <a:t>需求目的：定制</a:t>
+            </a:r>
+            <a:r>
+              <a:rPr lang="en-US" altLang="zh-CN">
+                <a:solidFill>
+                  <a:schemeClr val="accent6"/>
+                </a:solidFill>
+              </a:rPr>
+              <a:t>/</a:t>
+            </a:r>
+            <a:r>
+              <a:rPr lang="zh-CN" altLang="en-US">
+                <a:solidFill>
+                  <a:schemeClr val="accent6"/>
+                </a:solidFill>
+              </a:rPr>
+              <a:t>评估</a:t>
+            </a:r>
+            <a:r>
+              <a:rPr lang="en-US" altLang="zh-CN">
+                <a:solidFill>
+                  <a:schemeClr val="accent6"/>
+                </a:solidFill>
+              </a:rPr>
+              <a:t>/</a:t>
+            </a:r>
+            <a:r>
+              <a:rPr lang="zh-CN" altLang="en-US">
+                <a:solidFill>
+                  <a:schemeClr val="accent6"/>
+                </a:solidFill>
+              </a:rPr>
+              <a:t>破解，全面掌控</a:t>
+            </a:r>
+            <a:r>
+              <a:rPr lang="en-US" altLang="zh-CN">
+                <a:solidFill>
+                  <a:schemeClr val="accent6"/>
+                </a:solidFill>
+              </a:rPr>
+              <a:t>/</a:t>
+            </a:r>
+            <a:r>
+              <a:rPr lang="zh-CN" altLang="en-US">
+                <a:solidFill>
+                  <a:schemeClr val="accent6"/>
+                </a:solidFill>
+              </a:rPr>
+              <a:t>局部重点</a:t>
+            </a:r>
+            <a:r>
+              <a:rPr lang="en-US" altLang="zh-CN">
+                <a:solidFill>
+                  <a:schemeClr val="accent6"/>
+                </a:solidFill>
+              </a:rPr>
+              <a:t>/</a:t>
+            </a:r>
+            <a:r>
+              <a:rPr lang="zh-CN" altLang="en-US">
+                <a:solidFill>
+                  <a:schemeClr val="accent6"/>
+                </a:solidFill>
+              </a:rPr>
+              <a:t>简要比对。</a:t>
+            </a:r>
+            <a:endParaRPr lang="zh-CN" altLang="en-US">
+              <a:solidFill>
+                <a:schemeClr val="accent6"/>
+              </a:solidFill>
+            </a:endParaRPr>
+          </a:p>
+          <a:p>
+            <a:pPr lvl="1"/>
+            <a:r>
+              <a:rPr lang="zh-CN" altLang="en-US">
+                <a:solidFill>
+                  <a:schemeClr val="accent6"/>
+                </a:solidFill>
+              </a:rPr>
+              <a:t>基础资源：必备（被分析的目标和运行环境），可选（</a:t>
+            </a:r>
+            <a:r>
+              <a:rPr lang="zh-CN" altLang="en-US">
+                <a:solidFill>
+                  <a:schemeClr val="accent6"/>
+                </a:solidFill>
+                <a:sym typeface="+mn-ea"/>
+              </a:rPr>
+              <a:t>厂商或相关人员配合</a:t>
+            </a:r>
+            <a:r>
+              <a:rPr lang="en-US" altLang="zh-CN">
+                <a:solidFill>
+                  <a:schemeClr val="accent6"/>
+                </a:solidFill>
+                <a:sym typeface="+mn-ea"/>
+              </a:rPr>
+              <a:t>/</a:t>
+            </a:r>
+            <a:r>
+              <a:rPr lang="zh-CN" altLang="en-US">
+                <a:solidFill>
+                  <a:schemeClr val="accent6"/>
+                </a:solidFill>
+              </a:rPr>
+              <a:t>文档</a:t>
+            </a:r>
+            <a:r>
+              <a:rPr lang="en-US" altLang="zh-CN">
+                <a:solidFill>
+                  <a:schemeClr val="accent6"/>
+                </a:solidFill>
+              </a:rPr>
+              <a:t>/</a:t>
+            </a:r>
+            <a:r>
+              <a:rPr lang="zh-CN" altLang="en-US">
+                <a:solidFill>
+                  <a:schemeClr val="accent6"/>
+                </a:solidFill>
+              </a:rPr>
+              <a:t>源码</a:t>
+            </a:r>
+            <a:r>
+              <a:rPr lang="en-US" altLang="zh-CN">
+                <a:solidFill>
+                  <a:schemeClr val="accent6"/>
+                </a:solidFill>
+              </a:rPr>
+              <a:t>/</a:t>
+            </a:r>
+            <a:r>
+              <a:rPr lang="zh-CN" altLang="en-US">
+                <a:solidFill>
+                  <a:schemeClr val="accent6"/>
+                </a:solidFill>
+              </a:rPr>
+              <a:t>反汇编）</a:t>
+            </a:r>
+            <a:endParaRPr lang="zh-CN" altLang="en-US">
+              <a:solidFill>
+                <a:schemeClr val="accent6"/>
+              </a:solidFill>
+            </a:endParaRPr>
+          </a:p>
+          <a:p>
+            <a:r>
+              <a:rPr lang="zh-CN" altLang="en-US">
+                <a:solidFill>
+                  <a:schemeClr val="accent6"/>
+                </a:solidFill>
+              </a:rPr>
+              <a:t>处理方法</a:t>
+            </a:r>
+            <a:endParaRPr lang="zh-CN" altLang="en-US">
+              <a:solidFill>
+                <a:schemeClr val="accent6"/>
+              </a:solidFill>
+            </a:endParaRPr>
+          </a:p>
+          <a:p>
+            <a:pPr marL="457200" lvl="1" indent="0">
+              <a:buNone/>
+            </a:pPr>
+            <a:endParaRPr lang="zh-CN" altLang="en-US" sz="1800">
+              <a:solidFill>
+                <a:schemeClr val="accent6"/>
+              </a:solidFill>
+            </a:endParaRPr>
+          </a:p>
+          <a:p>
+            <a:pPr marL="457200" lvl="1" indent="0">
+              <a:buNone/>
+            </a:pPr>
+            <a:endParaRPr lang="zh-CN" altLang="en-US" sz="1800">
+              <a:solidFill>
+                <a:schemeClr val="accent6"/>
+              </a:solidFill>
+            </a:endParaRPr>
+          </a:p>
+          <a:p>
+            <a:pPr marL="457200" lvl="1" indent="0">
+              <a:buNone/>
+            </a:pPr>
+            <a:endParaRPr lang="zh-CN" altLang="en-US" sz="1800">
+              <a:solidFill>
+                <a:schemeClr val="accent6"/>
+              </a:solidFill>
+            </a:endParaRPr>
+          </a:p>
+          <a:p>
+            <a:pPr marL="457200" lvl="1" indent="0">
+              <a:buNone/>
+            </a:pPr>
+            <a:endParaRPr lang="zh-CN" altLang="en-US">
+              <a:solidFill>
+                <a:schemeClr val="accent6"/>
+              </a:solidFill>
+            </a:endParaRPr>
+          </a:p>
+          <a:p>
+            <a:r>
+              <a:rPr lang="zh-CN" altLang="en-US">
+                <a:solidFill>
+                  <a:schemeClr val="accent6"/>
+                </a:solidFill>
+              </a:rPr>
+              <a:t>主要难点</a:t>
+            </a:r>
+            <a:endParaRPr lang="zh-CN" altLang="en-US">
+              <a:solidFill>
+                <a:schemeClr val="accent6"/>
+              </a:solidFill>
+            </a:endParaRPr>
+          </a:p>
+          <a:p>
+            <a:pPr marL="457200" lvl="1" indent="0">
+              <a:buNone/>
+            </a:pPr>
+            <a:endParaRPr lang="zh-CN" altLang="en-US">
+              <a:solidFill>
+                <a:schemeClr val="accent6"/>
+              </a:solidFill>
+            </a:endParaRPr>
+          </a:p>
+          <a:p>
+            <a:pPr lvl="1"/>
+            <a:endParaRPr lang="zh-CN" altLang="en-US" sz="1620">
+              <a:solidFill>
+                <a:schemeClr val="accent6"/>
+              </a:solidFill>
+            </a:endParaRPr>
+          </a:p>
+        </p:txBody>
+      </p:sp>
+    </p:spTree>
+  </p:cSld>
+  <p:clrMapOvr>
+    <a:masterClrMapping/>
+  </p:clrMapOvr>
+</p:sld>
+</file>
+
+<file path=ppt/slides/slide16.xml><?xml version="1.0" encoding="utf-8"?>
+<p:sld xmlns:a="http://schemas.openxmlformats.org/drawingml/2006/main" xmlns:r="http://schemas.openxmlformats.org/officeDocument/2006/relationships" xmlns:p="http://schemas.openxmlformats.org/presentationml/2006/main">
+  <p:cSld>
+    <p:bg>
+      <p:bgPr>
+        <a:solidFill>
+          <a:schemeClr val="tx1"/>
+        </a:solidFill>
+        <a:effectLst/>
+      </p:bgPr>
+    </p:bg>
+    <p:spTree>
+      <p:nvGrpSpPr>
+        <p:cNvPr id="1" name=""/>
+        <p:cNvGrpSpPr/>
+        <p:nvPr/>
+      </p:nvGrpSpPr>
+      <p:grpSpPr/>
+      <p:sp>
+        <p:nvSpPr>
+          <p:cNvPr id="2" name="Title 1"/>
+          <p:cNvSpPr>
+            <a:spLocks noGrp="1"/>
+          </p:cNvSpPr>
+          <p:nvPr>
+            <p:ph type="title"/>
+          </p:nvPr>
+        </p:nvSpPr>
+        <p:spPr>
+          <a:xfrm>
+            <a:off x="647700" y="146685"/>
+            <a:ext cx="10515600" cy="604520"/>
+          </a:xfrm>
+        </p:spPr>
+        <p:txBody>
+          <a:bodyPr/>
+          <a:p>
+            <a:pPr algn="ctr"/>
+            <a:r>
+              <a:rPr lang="zh-CN" altLang="en-US">
+                <a:solidFill>
+                  <a:schemeClr val="accent6"/>
+                </a:solidFill>
+                <a:sym typeface="+mn-ea"/>
+              </a:rPr>
+              <a:t>运行时分析：</a:t>
+            </a:r>
+            <a:r>
+              <a:rPr lang="zh-CN" altLang="en-US">
+                <a:solidFill>
+                  <a:schemeClr val="accent6"/>
+                </a:solidFill>
+                <a:sym typeface="+mn-ea"/>
+              </a:rPr>
+              <a:t>具体内容：</a:t>
+            </a:r>
+            <a:r>
+              <a:rPr lang="zh-CN" altLang="en-US">
+                <a:solidFill>
+                  <a:schemeClr val="accent6"/>
+                </a:solidFill>
+              </a:rPr>
+              <a:t>原理分析</a:t>
+            </a:r>
+            <a:endParaRPr lang="zh-CN" altLang="en-US">
+              <a:solidFill>
+                <a:schemeClr val="accent6"/>
+              </a:solidFill>
+            </a:endParaRPr>
+          </a:p>
+        </p:txBody>
+      </p:sp>
+      <p:sp>
+        <p:nvSpPr>
+          <p:cNvPr id="5" name="Content Placeholder 4"/>
+          <p:cNvSpPr>
+            <a:spLocks noGrp="1"/>
+          </p:cNvSpPr>
+          <p:nvPr>
+            <p:ph idx="1"/>
+          </p:nvPr>
+        </p:nvSpPr>
+        <p:spPr>
+          <a:xfrm>
+            <a:off x="647700" y="952500"/>
+            <a:ext cx="11357610" cy="5859780"/>
+          </a:xfrm>
+        </p:spPr>
+        <p:txBody>
+          <a:bodyPr/>
+          <a:p>
+            <a:r>
+              <a:rPr lang="zh-CN" altLang="en-US">
+                <a:solidFill>
+                  <a:schemeClr val="accent6"/>
+                </a:solidFill>
+              </a:rPr>
+              <a:t>概要描述</a:t>
+            </a:r>
+            <a:endParaRPr lang="zh-CN" altLang="en-US">
+              <a:solidFill>
+                <a:schemeClr val="accent6"/>
+              </a:solidFill>
+            </a:endParaRPr>
+          </a:p>
+          <a:p>
+            <a:pPr lvl="1"/>
+            <a:r>
+              <a:rPr lang="zh-CN" altLang="en-US">
+                <a:solidFill>
+                  <a:schemeClr val="accent6"/>
+                </a:solidFill>
+              </a:rPr>
+              <a:t>对应用</a:t>
+            </a:r>
+            <a:r>
+              <a:rPr lang="en-US" altLang="zh-CN">
+                <a:solidFill>
+                  <a:schemeClr val="accent6"/>
+                </a:solidFill>
+              </a:rPr>
+              <a:t>/</a:t>
+            </a:r>
+            <a:r>
+              <a:rPr lang="zh-CN" altLang="en-US">
+                <a:solidFill>
+                  <a:schemeClr val="accent6"/>
+                </a:solidFill>
+              </a:rPr>
+              <a:t>系统</a:t>
+            </a:r>
+            <a:r>
+              <a:rPr lang="en-US" altLang="zh-CN">
+                <a:solidFill>
+                  <a:schemeClr val="accent6"/>
+                </a:solidFill>
+              </a:rPr>
+              <a:t>/</a:t>
+            </a:r>
+            <a:r>
+              <a:rPr lang="zh-CN" altLang="en-US">
+                <a:solidFill>
+                  <a:schemeClr val="accent6"/>
+                </a:solidFill>
+              </a:rPr>
+              <a:t>硬件的运行机理进行了解和学习，理论</a:t>
+            </a:r>
+            <a:r>
+              <a:rPr lang="en-US" altLang="zh-CN">
+                <a:solidFill>
+                  <a:schemeClr val="accent6"/>
+                </a:solidFill>
+              </a:rPr>
+              <a:t>+</a:t>
+            </a:r>
+            <a:r>
+              <a:rPr lang="zh-CN" altLang="en-US">
+                <a:solidFill>
+                  <a:schemeClr val="accent6"/>
+                </a:solidFill>
+              </a:rPr>
+              <a:t>实践，动态</a:t>
+            </a:r>
+            <a:r>
+              <a:rPr lang="en-US" altLang="zh-CN">
+                <a:solidFill>
+                  <a:schemeClr val="accent6"/>
+                </a:solidFill>
+              </a:rPr>
+              <a:t>+</a:t>
+            </a:r>
+            <a:r>
+              <a:rPr lang="zh-CN" altLang="en-US">
+                <a:solidFill>
+                  <a:schemeClr val="accent6"/>
+                </a:solidFill>
+              </a:rPr>
+              <a:t>静态。</a:t>
+            </a:r>
+            <a:endParaRPr lang="zh-CN" altLang="en-US">
+              <a:solidFill>
+                <a:schemeClr val="accent6"/>
+              </a:solidFill>
+            </a:endParaRPr>
+          </a:p>
+          <a:p>
+            <a:pPr lvl="1"/>
+            <a:r>
+              <a:rPr lang="zh-CN" altLang="en-US">
+                <a:solidFill>
+                  <a:schemeClr val="accent6"/>
+                </a:solidFill>
+              </a:rPr>
+              <a:t>需求目的：定制</a:t>
+            </a:r>
+            <a:r>
+              <a:rPr lang="en-US" altLang="zh-CN">
+                <a:solidFill>
+                  <a:schemeClr val="accent6"/>
+                </a:solidFill>
+              </a:rPr>
+              <a:t>/</a:t>
+            </a:r>
+            <a:r>
+              <a:rPr lang="zh-CN" altLang="en-US">
+                <a:solidFill>
+                  <a:schemeClr val="accent6"/>
+                </a:solidFill>
+              </a:rPr>
+              <a:t>评估</a:t>
+            </a:r>
+            <a:r>
+              <a:rPr lang="en-US" altLang="zh-CN">
+                <a:solidFill>
+                  <a:schemeClr val="accent6"/>
+                </a:solidFill>
+              </a:rPr>
+              <a:t>/</a:t>
+            </a:r>
+            <a:r>
+              <a:rPr lang="zh-CN" altLang="en-US">
+                <a:solidFill>
+                  <a:schemeClr val="accent6"/>
+                </a:solidFill>
+              </a:rPr>
+              <a:t>破解，全面掌控</a:t>
+            </a:r>
+            <a:r>
+              <a:rPr lang="en-US" altLang="zh-CN">
+                <a:solidFill>
+                  <a:schemeClr val="accent6"/>
+                </a:solidFill>
+              </a:rPr>
+              <a:t>/</a:t>
+            </a:r>
+            <a:r>
+              <a:rPr lang="zh-CN" altLang="en-US">
+                <a:solidFill>
+                  <a:schemeClr val="accent6"/>
+                </a:solidFill>
+              </a:rPr>
+              <a:t>局部重点</a:t>
+            </a:r>
+            <a:r>
+              <a:rPr lang="en-US" altLang="zh-CN">
+                <a:solidFill>
+                  <a:schemeClr val="accent6"/>
+                </a:solidFill>
+              </a:rPr>
+              <a:t>/</a:t>
+            </a:r>
+            <a:r>
+              <a:rPr lang="zh-CN" altLang="en-US">
+                <a:solidFill>
+                  <a:schemeClr val="accent6"/>
+                </a:solidFill>
+              </a:rPr>
+              <a:t>简要比对。</a:t>
+            </a:r>
+            <a:endParaRPr lang="zh-CN" altLang="en-US">
+              <a:solidFill>
+                <a:schemeClr val="accent6"/>
+              </a:solidFill>
+            </a:endParaRPr>
+          </a:p>
+          <a:p>
+            <a:pPr lvl="1"/>
+            <a:r>
+              <a:rPr lang="zh-CN" altLang="en-US">
+                <a:solidFill>
+                  <a:schemeClr val="accent6"/>
+                </a:solidFill>
+              </a:rPr>
+              <a:t>基础资源：必备（被分析的目标和运行环境），可选（</a:t>
+            </a:r>
+            <a:r>
+              <a:rPr lang="zh-CN" altLang="en-US">
+                <a:solidFill>
+                  <a:schemeClr val="accent6"/>
+                </a:solidFill>
+                <a:sym typeface="+mn-ea"/>
+              </a:rPr>
+              <a:t>厂商或相关人员配合</a:t>
+            </a:r>
+            <a:r>
+              <a:rPr lang="en-US" altLang="zh-CN">
+                <a:solidFill>
+                  <a:schemeClr val="accent6"/>
+                </a:solidFill>
+                <a:sym typeface="+mn-ea"/>
+              </a:rPr>
+              <a:t>/</a:t>
+            </a:r>
+            <a:r>
+              <a:rPr lang="zh-CN" altLang="en-US">
+                <a:solidFill>
+                  <a:schemeClr val="accent6"/>
+                </a:solidFill>
+              </a:rPr>
+              <a:t>文档</a:t>
+            </a:r>
+            <a:r>
+              <a:rPr lang="en-US" altLang="zh-CN">
+                <a:solidFill>
+                  <a:schemeClr val="accent6"/>
+                </a:solidFill>
+              </a:rPr>
+              <a:t>/</a:t>
+            </a:r>
+            <a:r>
+              <a:rPr lang="zh-CN" altLang="en-US">
+                <a:solidFill>
+                  <a:schemeClr val="accent6"/>
+                </a:solidFill>
+              </a:rPr>
+              <a:t>源码</a:t>
+            </a:r>
+            <a:r>
+              <a:rPr lang="en-US" altLang="zh-CN">
+                <a:solidFill>
+                  <a:schemeClr val="accent6"/>
+                </a:solidFill>
+              </a:rPr>
+              <a:t>/</a:t>
+            </a:r>
+            <a:r>
+              <a:rPr lang="zh-CN" altLang="en-US">
+                <a:solidFill>
+                  <a:schemeClr val="accent6"/>
+                </a:solidFill>
+              </a:rPr>
+              <a:t>反汇编）</a:t>
+            </a:r>
+            <a:endParaRPr lang="zh-CN" altLang="en-US">
+              <a:solidFill>
+                <a:schemeClr val="accent6"/>
+              </a:solidFill>
+            </a:endParaRPr>
+          </a:p>
+          <a:p>
+            <a:r>
+              <a:rPr lang="zh-CN" altLang="en-US">
+                <a:solidFill>
+                  <a:schemeClr val="accent6"/>
+                </a:solidFill>
+              </a:rPr>
+              <a:t>处理方法</a:t>
+            </a:r>
+            <a:endParaRPr lang="zh-CN" altLang="en-US">
+              <a:solidFill>
+                <a:schemeClr val="accent6"/>
+              </a:solidFill>
+            </a:endParaRPr>
+          </a:p>
+          <a:p>
+            <a:pPr lvl="1"/>
+            <a:r>
+              <a:rPr lang="zh-CN" altLang="en-US" sz="1800">
+                <a:solidFill>
+                  <a:schemeClr val="accent6"/>
+                </a:solidFill>
+              </a:rPr>
+              <a:t>整体设计：看文档</a:t>
+            </a:r>
+            <a:r>
+              <a:rPr lang="en-US" altLang="zh-CN" sz="1800">
+                <a:solidFill>
+                  <a:schemeClr val="accent6"/>
+                </a:solidFill>
+              </a:rPr>
+              <a:t>/</a:t>
+            </a:r>
+            <a:r>
+              <a:rPr lang="zh-CN" altLang="en-US" sz="1800">
+                <a:solidFill>
+                  <a:schemeClr val="accent6"/>
+                </a:solidFill>
+              </a:rPr>
+              <a:t>总结整理</a:t>
+            </a:r>
+            <a:r>
+              <a:rPr lang="zh-CN" altLang="en-US">
+                <a:solidFill>
+                  <a:schemeClr val="accent6"/>
+                </a:solidFill>
+                <a:sym typeface="+mn-ea"/>
+              </a:rPr>
+              <a:t>，熟悉运行环境</a:t>
+            </a:r>
+            <a:r>
+              <a:rPr lang="en-US" altLang="zh-CN">
+                <a:solidFill>
+                  <a:schemeClr val="accent6"/>
+                </a:solidFill>
+                <a:sym typeface="+mn-ea"/>
+              </a:rPr>
+              <a:t>/</a:t>
+            </a:r>
+            <a:r>
+              <a:rPr lang="zh-CN" altLang="en-US">
+                <a:solidFill>
+                  <a:schemeClr val="accent6"/>
+                </a:solidFill>
+                <a:sym typeface="+mn-ea"/>
+              </a:rPr>
+              <a:t>模拟输入</a:t>
+            </a:r>
+            <a:r>
+              <a:rPr lang="en-US" altLang="zh-CN">
+                <a:solidFill>
+                  <a:schemeClr val="accent6"/>
+                </a:solidFill>
+                <a:sym typeface="+mn-ea"/>
+              </a:rPr>
+              <a:t>/</a:t>
+            </a:r>
+            <a:r>
+              <a:rPr lang="zh-CN" altLang="en-US">
+                <a:solidFill>
+                  <a:schemeClr val="accent6"/>
+                </a:solidFill>
+                <a:sym typeface="+mn-ea"/>
+              </a:rPr>
+              <a:t>监控输出</a:t>
+            </a:r>
+            <a:r>
+              <a:rPr lang="zh-CN" altLang="en-US" sz="1800">
+                <a:solidFill>
+                  <a:schemeClr val="accent6"/>
+                </a:solidFill>
+              </a:rPr>
+              <a:t>，逐步建立业务模型和组织结构</a:t>
+            </a:r>
+            <a:endParaRPr lang="zh-CN" altLang="en-US" sz="1800">
+              <a:solidFill>
+                <a:schemeClr val="accent6"/>
+              </a:solidFill>
+            </a:endParaRPr>
+          </a:p>
+          <a:p>
+            <a:pPr lvl="1"/>
+            <a:r>
+              <a:rPr lang="zh-CN" altLang="en-US" sz="1800">
+                <a:solidFill>
+                  <a:schemeClr val="accent6"/>
+                </a:solidFill>
+              </a:rPr>
+              <a:t>静态开发：阅读源码（软硬件）</a:t>
+            </a:r>
+            <a:r>
+              <a:rPr lang="en-US" altLang="zh-CN" sz="1800">
+                <a:solidFill>
+                  <a:schemeClr val="accent6"/>
+                </a:solidFill>
+              </a:rPr>
+              <a:t>/</a:t>
+            </a:r>
+            <a:r>
+              <a:rPr lang="zh-CN" altLang="en-US" sz="1800">
+                <a:solidFill>
+                  <a:schemeClr val="accent6"/>
+                </a:solidFill>
+              </a:rPr>
+              <a:t>反汇编（布线板），版本补丁</a:t>
+            </a:r>
+            <a:r>
+              <a:rPr lang="en-US" altLang="zh-CN" sz="1800">
+                <a:solidFill>
+                  <a:schemeClr val="accent6"/>
+                </a:solidFill>
+              </a:rPr>
+              <a:t>/</a:t>
+            </a:r>
+            <a:r>
+              <a:rPr lang="zh-CN" altLang="en-US" sz="1800">
+                <a:solidFill>
+                  <a:schemeClr val="accent6"/>
+                </a:solidFill>
+              </a:rPr>
+              <a:t>比对分析，</a:t>
+            </a:r>
+            <a:r>
+              <a:rPr lang="zh-CN" altLang="en-US">
+                <a:solidFill>
+                  <a:schemeClr val="accent6"/>
+                </a:solidFill>
+                <a:sym typeface="+mn-ea"/>
+              </a:rPr>
+              <a:t>支撑</a:t>
+            </a:r>
+            <a:r>
+              <a:rPr lang="zh-CN" altLang="en-US" sz="1800">
+                <a:solidFill>
+                  <a:schemeClr val="accent6"/>
+                </a:solidFill>
+              </a:rPr>
+              <a:t>整体设计和动态调试</a:t>
+            </a:r>
+            <a:endParaRPr lang="zh-CN" altLang="en-US" sz="1800">
+              <a:solidFill>
+                <a:schemeClr val="accent6"/>
+              </a:solidFill>
+            </a:endParaRPr>
+          </a:p>
+          <a:p>
+            <a:pPr lvl="1"/>
+            <a:r>
+              <a:rPr lang="zh-CN" altLang="en-US" sz="1800">
+                <a:solidFill>
+                  <a:schemeClr val="accent6"/>
+                </a:solidFill>
+              </a:rPr>
+              <a:t>动态调试：运行时调试</a:t>
+            </a:r>
+            <a:r>
+              <a:rPr lang="en-US" altLang="zh-CN" sz="1800">
+                <a:solidFill>
+                  <a:schemeClr val="accent6"/>
+                </a:solidFill>
+              </a:rPr>
+              <a:t>/</a:t>
+            </a:r>
+            <a:r>
+              <a:rPr lang="zh-CN" altLang="en-US" sz="1800">
+                <a:solidFill>
+                  <a:schemeClr val="accent6"/>
+                </a:solidFill>
+              </a:rPr>
+              <a:t>反调试，提供运行时详细流程数据，比对分析；配合静态开发，</a:t>
+            </a:r>
+            <a:r>
+              <a:rPr lang="zh-CN" altLang="en-US">
+                <a:solidFill>
+                  <a:schemeClr val="accent6"/>
+                </a:solidFill>
+                <a:sym typeface="+mn-ea"/>
+              </a:rPr>
+              <a:t>支撑</a:t>
+            </a:r>
+            <a:r>
+              <a:rPr lang="zh-CN" altLang="en-US" sz="1800">
+                <a:solidFill>
+                  <a:schemeClr val="accent6"/>
+                </a:solidFill>
+              </a:rPr>
+              <a:t>整体设计</a:t>
+            </a:r>
+            <a:endParaRPr lang="zh-CN" altLang="en-US" sz="1800">
+              <a:solidFill>
+                <a:schemeClr val="accent6"/>
+              </a:solidFill>
+            </a:endParaRPr>
+          </a:p>
+          <a:p>
+            <a:pPr lvl="1"/>
+            <a:r>
+              <a:rPr lang="en-US" altLang="zh-CN" sz="1800">
+                <a:solidFill>
+                  <a:schemeClr val="accent6"/>
+                </a:solidFill>
+              </a:rPr>
+              <a:t>AI</a:t>
+            </a:r>
+            <a:r>
+              <a:rPr lang="zh-CN" altLang="en-US" sz="1800">
+                <a:solidFill>
+                  <a:schemeClr val="accent6"/>
+                </a:solidFill>
+              </a:rPr>
+              <a:t>辅助：查资料，配合阅读源码，</a:t>
+            </a:r>
+            <a:r>
+              <a:rPr lang="zh-CN" altLang="en-US">
+                <a:solidFill>
+                  <a:schemeClr val="accent6"/>
+                </a:solidFill>
+                <a:sym typeface="+mn-ea"/>
+              </a:rPr>
+              <a:t>配合分析问题</a:t>
+            </a:r>
+            <a:endParaRPr lang="zh-CN" altLang="en-US">
+              <a:solidFill>
+                <a:schemeClr val="accent6"/>
+              </a:solidFill>
+            </a:endParaRPr>
+          </a:p>
+          <a:p>
+            <a:r>
+              <a:rPr lang="zh-CN" altLang="en-US">
+                <a:solidFill>
+                  <a:schemeClr val="accent6"/>
+                </a:solidFill>
+              </a:rPr>
+              <a:t>主要难点</a:t>
+            </a:r>
+            <a:endParaRPr lang="zh-CN" altLang="en-US">
+              <a:solidFill>
+                <a:schemeClr val="accent6"/>
+              </a:solidFill>
+            </a:endParaRPr>
+          </a:p>
+          <a:p>
+            <a:pPr marL="457200" lvl="1" indent="0">
+              <a:buNone/>
+            </a:pPr>
+            <a:endParaRPr lang="zh-CN" altLang="en-US">
+              <a:solidFill>
+                <a:schemeClr val="accent6"/>
+              </a:solidFill>
+            </a:endParaRPr>
+          </a:p>
+          <a:p>
+            <a:pPr lvl="1"/>
+            <a:endParaRPr lang="zh-CN" altLang="en-US" sz="1620">
+              <a:solidFill>
+                <a:schemeClr val="accent6"/>
+              </a:solidFill>
+            </a:endParaRPr>
+          </a:p>
+        </p:txBody>
+      </p:sp>
+    </p:spTree>
+  </p:cSld>
+  <p:clrMapOvr>
+    <a:masterClrMapping/>
+  </p:clrMapOvr>
+</p:sld>
+</file>
+
+<file path=ppt/slides/slide17.xml><?xml version="1.0" encoding="utf-8"?>
+<p:sld xmlns:a="http://schemas.openxmlformats.org/drawingml/2006/main" xmlns:r="http://schemas.openxmlformats.org/officeDocument/2006/relationships" xmlns:p="http://schemas.openxmlformats.org/presentationml/2006/main">
+  <p:cSld>
+    <p:bg>
+      <p:bgPr>
+        <a:solidFill>
+          <a:schemeClr val="tx1"/>
+        </a:solidFill>
+        <a:effectLst/>
+      </p:bgPr>
+    </p:bg>
+    <p:spTree>
+      <p:nvGrpSpPr>
+        <p:cNvPr id="1" name=""/>
+        <p:cNvGrpSpPr/>
+        <p:nvPr/>
+      </p:nvGrpSpPr>
+      <p:grpSpPr/>
+      <p:sp>
+        <p:nvSpPr>
+          <p:cNvPr id="2" name="Title 1"/>
+          <p:cNvSpPr>
+            <a:spLocks noGrp="1"/>
+          </p:cNvSpPr>
+          <p:nvPr>
+            <p:ph type="title"/>
+          </p:nvPr>
+        </p:nvSpPr>
+        <p:spPr>
+          <a:xfrm>
+            <a:off x="647700" y="146685"/>
+            <a:ext cx="10515600" cy="604520"/>
+          </a:xfrm>
+        </p:spPr>
+        <p:txBody>
+          <a:bodyPr/>
+          <a:p>
+            <a:pPr algn="ctr"/>
+            <a:r>
+              <a:rPr lang="zh-CN" altLang="en-US">
+                <a:solidFill>
+                  <a:schemeClr val="accent6"/>
+                </a:solidFill>
+                <a:sym typeface="+mn-ea"/>
+              </a:rPr>
+              <a:t>运行时分析：</a:t>
+            </a:r>
+            <a:r>
+              <a:rPr lang="zh-CN" altLang="en-US">
+                <a:solidFill>
+                  <a:schemeClr val="accent6"/>
+                </a:solidFill>
+                <a:sym typeface="+mn-ea"/>
+              </a:rPr>
+              <a:t>具体内容：</a:t>
+            </a:r>
+            <a:r>
+              <a:rPr lang="zh-CN" altLang="en-US">
+                <a:solidFill>
+                  <a:schemeClr val="accent6"/>
+                </a:solidFill>
+              </a:rPr>
+              <a:t>原理分析</a:t>
+            </a:r>
+            <a:endParaRPr lang="zh-CN" altLang="en-US">
+              <a:solidFill>
+                <a:schemeClr val="accent6"/>
+              </a:solidFill>
+            </a:endParaRPr>
+          </a:p>
+        </p:txBody>
+      </p:sp>
+      <p:sp>
+        <p:nvSpPr>
+          <p:cNvPr id="5" name="Content Placeholder 4"/>
+          <p:cNvSpPr>
+            <a:spLocks noGrp="1"/>
+          </p:cNvSpPr>
+          <p:nvPr>
+            <p:ph idx="1"/>
+          </p:nvPr>
+        </p:nvSpPr>
+        <p:spPr>
+          <a:xfrm>
+            <a:off x="647700" y="952500"/>
+            <a:ext cx="11357610" cy="5859780"/>
+          </a:xfrm>
+        </p:spPr>
+        <p:txBody>
+          <a:bodyPr/>
+          <a:p>
+            <a:r>
+              <a:rPr lang="zh-CN" altLang="en-US">
+                <a:solidFill>
+                  <a:schemeClr val="accent6"/>
+                </a:solidFill>
+              </a:rPr>
+              <a:t>概要描述</a:t>
+            </a:r>
+            <a:endParaRPr lang="zh-CN" altLang="en-US">
+              <a:solidFill>
+                <a:schemeClr val="accent6"/>
+              </a:solidFill>
+            </a:endParaRPr>
+          </a:p>
+          <a:p>
+            <a:pPr lvl="1"/>
+            <a:r>
+              <a:rPr lang="zh-CN" altLang="en-US">
+                <a:solidFill>
+                  <a:schemeClr val="accent6"/>
+                </a:solidFill>
+              </a:rPr>
+              <a:t>对应用</a:t>
+            </a:r>
+            <a:r>
+              <a:rPr lang="en-US" altLang="zh-CN">
+                <a:solidFill>
+                  <a:schemeClr val="accent6"/>
+                </a:solidFill>
+              </a:rPr>
+              <a:t>/</a:t>
+            </a:r>
+            <a:r>
+              <a:rPr lang="zh-CN" altLang="en-US">
+                <a:solidFill>
+                  <a:schemeClr val="accent6"/>
+                </a:solidFill>
+              </a:rPr>
+              <a:t>系统</a:t>
+            </a:r>
+            <a:r>
+              <a:rPr lang="en-US" altLang="zh-CN">
+                <a:solidFill>
+                  <a:schemeClr val="accent6"/>
+                </a:solidFill>
+              </a:rPr>
+              <a:t>/</a:t>
+            </a:r>
+            <a:r>
+              <a:rPr lang="zh-CN" altLang="en-US">
+                <a:solidFill>
+                  <a:schemeClr val="accent6"/>
+                </a:solidFill>
+              </a:rPr>
+              <a:t>硬件的运行机理进行了解和学习，理论</a:t>
+            </a:r>
+            <a:r>
+              <a:rPr lang="en-US" altLang="zh-CN">
+                <a:solidFill>
+                  <a:schemeClr val="accent6"/>
+                </a:solidFill>
+              </a:rPr>
+              <a:t>+</a:t>
+            </a:r>
+            <a:r>
+              <a:rPr lang="zh-CN" altLang="en-US">
+                <a:solidFill>
+                  <a:schemeClr val="accent6"/>
+                </a:solidFill>
+              </a:rPr>
+              <a:t>实践，动态</a:t>
+            </a:r>
+            <a:r>
+              <a:rPr lang="en-US" altLang="zh-CN">
+                <a:solidFill>
+                  <a:schemeClr val="accent6"/>
+                </a:solidFill>
+              </a:rPr>
+              <a:t>+</a:t>
+            </a:r>
+            <a:r>
+              <a:rPr lang="zh-CN" altLang="en-US">
+                <a:solidFill>
+                  <a:schemeClr val="accent6"/>
+                </a:solidFill>
+              </a:rPr>
+              <a:t>静态。</a:t>
+            </a:r>
+            <a:endParaRPr lang="zh-CN" altLang="en-US">
+              <a:solidFill>
+                <a:schemeClr val="accent6"/>
+              </a:solidFill>
+            </a:endParaRPr>
+          </a:p>
+          <a:p>
+            <a:pPr lvl="1"/>
+            <a:r>
+              <a:rPr lang="zh-CN" altLang="en-US">
+                <a:solidFill>
+                  <a:schemeClr val="accent6"/>
+                </a:solidFill>
+              </a:rPr>
+              <a:t>需求目的：定制</a:t>
+            </a:r>
+            <a:r>
+              <a:rPr lang="en-US" altLang="zh-CN">
+                <a:solidFill>
+                  <a:schemeClr val="accent6"/>
+                </a:solidFill>
+              </a:rPr>
+              <a:t>/</a:t>
+            </a:r>
+            <a:r>
+              <a:rPr lang="zh-CN" altLang="en-US">
+                <a:solidFill>
+                  <a:schemeClr val="accent6"/>
+                </a:solidFill>
+              </a:rPr>
+              <a:t>评估</a:t>
+            </a:r>
+            <a:r>
+              <a:rPr lang="en-US" altLang="zh-CN">
+                <a:solidFill>
+                  <a:schemeClr val="accent6"/>
+                </a:solidFill>
+              </a:rPr>
+              <a:t>/</a:t>
+            </a:r>
+            <a:r>
+              <a:rPr lang="zh-CN" altLang="en-US">
+                <a:solidFill>
+                  <a:schemeClr val="accent6"/>
+                </a:solidFill>
+              </a:rPr>
+              <a:t>破解，全面掌控</a:t>
+            </a:r>
+            <a:r>
+              <a:rPr lang="en-US" altLang="zh-CN">
+                <a:solidFill>
+                  <a:schemeClr val="accent6"/>
+                </a:solidFill>
+              </a:rPr>
+              <a:t>/</a:t>
+            </a:r>
+            <a:r>
+              <a:rPr lang="zh-CN" altLang="en-US">
+                <a:solidFill>
+                  <a:schemeClr val="accent6"/>
+                </a:solidFill>
+              </a:rPr>
+              <a:t>局部重点</a:t>
+            </a:r>
+            <a:r>
+              <a:rPr lang="en-US" altLang="zh-CN">
+                <a:solidFill>
+                  <a:schemeClr val="accent6"/>
+                </a:solidFill>
+              </a:rPr>
+              <a:t>/</a:t>
+            </a:r>
+            <a:r>
+              <a:rPr lang="zh-CN" altLang="en-US">
+                <a:solidFill>
+                  <a:schemeClr val="accent6"/>
+                </a:solidFill>
+              </a:rPr>
+              <a:t>简要比对。</a:t>
+            </a:r>
+            <a:endParaRPr lang="zh-CN" altLang="en-US">
+              <a:solidFill>
+                <a:schemeClr val="accent6"/>
+              </a:solidFill>
+            </a:endParaRPr>
+          </a:p>
+          <a:p>
+            <a:pPr lvl="1"/>
+            <a:r>
+              <a:rPr lang="zh-CN" altLang="en-US">
+                <a:solidFill>
+                  <a:schemeClr val="accent6"/>
+                </a:solidFill>
+              </a:rPr>
+              <a:t>基础资源：必备（被分析的目标和运行环境），可选（</a:t>
+            </a:r>
+            <a:r>
+              <a:rPr lang="zh-CN" altLang="en-US">
+                <a:solidFill>
+                  <a:schemeClr val="accent6"/>
+                </a:solidFill>
+                <a:sym typeface="+mn-ea"/>
+              </a:rPr>
+              <a:t>厂商或相关人员配合</a:t>
+            </a:r>
+            <a:r>
+              <a:rPr lang="en-US" altLang="zh-CN">
+                <a:solidFill>
+                  <a:schemeClr val="accent6"/>
+                </a:solidFill>
+                <a:sym typeface="+mn-ea"/>
+              </a:rPr>
+              <a:t>/</a:t>
+            </a:r>
+            <a:r>
+              <a:rPr lang="zh-CN" altLang="en-US">
+                <a:solidFill>
+                  <a:schemeClr val="accent6"/>
+                </a:solidFill>
+              </a:rPr>
+              <a:t>文档</a:t>
+            </a:r>
+            <a:r>
+              <a:rPr lang="en-US" altLang="zh-CN">
+                <a:solidFill>
+                  <a:schemeClr val="accent6"/>
+                </a:solidFill>
+              </a:rPr>
+              <a:t>/</a:t>
+            </a:r>
+            <a:r>
+              <a:rPr lang="zh-CN" altLang="en-US">
+                <a:solidFill>
+                  <a:schemeClr val="accent6"/>
+                </a:solidFill>
+              </a:rPr>
+              <a:t>源码</a:t>
+            </a:r>
+            <a:r>
+              <a:rPr lang="en-US" altLang="zh-CN">
+                <a:solidFill>
+                  <a:schemeClr val="accent6"/>
+                </a:solidFill>
+              </a:rPr>
+              <a:t>/</a:t>
+            </a:r>
+            <a:r>
+              <a:rPr lang="zh-CN" altLang="en-US">
+                <a:solidFill>
+                  <a:schemeClr val="accent6"/>
+                </a:solidFill>
+              </a:rPr>
+              <a:t>反汇编）</a:t>
+            </a:r>
+            <a:endParaRPr lang="zh-CN" altLang="en-US">
+              <a:solidFill>
+                <a:schemeClr val="accent6"/>
+              </a:solidFill>
+            </a:endParaRPr>
+          </a:p>
+          <a:p>
+            <a:r>
+              <a:rPr lang="zh-CN" altLang="en-US">
+                <a:solidFill>
+                  <a:schemeClr val="accent6"/>
+                </a:solidFill>
+              </a:rPr>
+              <a:t>处理方法</a:t>
+            </a:r>
+            <a:endParaRPr lang="zh-CN" altLang="en-US">
+              <a:solidFill>
+                <a:schemeClr val="accent6"/>
+              </a:solidFill>
+            </a:endParaRPr>
+          </a:p>
+          <a:p>
+            <a:pPr lvl="1"/>
+            <a:r>
+              <a:rPr lang="zh-CN" altLang="en-US" sz="1800">
+                <a:solidFill>
+                  <a:schemeClr val="accent6"/>
+                </a:solidFill>
+              </a:rPr>
+              <a:t>整体设计：看文档</a:t>
+            </a:r>
+            <a:r>
+              <a:rPr lang="en-US" altLang="zh-CN" sz="1800">
+                <a:solidFill>
+                  <a:schemeClr val="accent6"/>
+                </a:solidFill>
+              </a:rPr>
+              <a:t>/</a:t>
+            </a:r>
+            <a:r>
+              <a:rPr lang="zh-CN" altLang="en-US" sz="1800">
+                <a:solidFill>
+                  <a:schemeClr val="accent6"/>
+                </a:solidFill>
+              </a:rPr>
+              <a:t>总结整理</a:t>
+            </a:r>
+            <a:r>
+              <a:rPr lang="zh-CN" altLang="en-US">
+                <a:solidFill>
+                  <a:schemeClr val="accent6"/>
+                </a:solidFill>
+                <a:sym typeface="+mn-ea"/>
+              </a:rPr>
+              <a:t>，熟悉运行环境</a:t>
+            </a:r>
+            <a:r>
+              <a:rPr lang="en-US" altLang="zh-CN">
+                <a:solidFill>
+                  <a:schemeClr val="accent6"/>
+                </a:solidFill>
+                <a:sym typeface="+mn-ea"/>
+              </a:rPr>
+              <a:t>/</a:t>
+            </a:r>
+            <a:r>
+              <a:rPr lang="zh-CN" altLang="en-US">
+                <a:solidFill>
+                  <a:schemeClr val="accent6"/>
+                </a:solidFill>
+                <a:sym typeface="+mn-ea"/>
+              </a:rPr>
+              <a:t>模拟输入</a:t>
+            </a:r>
+            <a:r>
+              <a:rPr lang="en-US" altLang="zh-CN">
+                <a:solidFill>
+                  <a:schemeClr val="accent6"/>
+                </a:solidFill>
+                <a:sym typeface="+mn-ea"/>
+              </a:rPr>
+              <a:t>/</a:t>
+            </a:r>
+            <a:r>
+              <a:rPr lang="zh-CN" altLang="en-US">
+                <a:solidFill>
+                  <a:schemeClr val="accent6"/>
+                </a:solidFill>
+                <a:sym typeface="+mn-ea"/>
+              </a:rPr>
+              <a:t>监控输出</a:t>
+            </a:r>
+            <a:r>
+              <a:rPr lang="zh-CN" altLang="en-US" sz="1800">
+                <a:solidFill>
+                  <a:schemeClr val="accent6"/>
+                </a:solidFill>
+              </a:rPr>
+              <a:t>，逐步建立业务模型和组织结构</a:t>
+            </a:r>
+            <a:endParaRPr lang="zh-CN" altLang="en-US" sz="1800">
+              <a:solidFill>
+                <a:schemeClr val="accent6"/>
+              </a:solidFill>
+            </a:endParaRPr>
+          </a:p>
+          <a:p>
+            <a:pPr lvl="1"/>
+            <a:r>
+              <a:rPr lang="zh-CN" altLang="en-US" sz="1800">
+                <a:solidFill>
+                  <a:schemeClr val="accent6"/>
+                </a:solidFill>
+              </a:rPr>
+              <a:t>静态开发：阅读源码（软硬件）</a:t>
+            </a:r>
+            <a:r>
+              <a:rPr lang="en-US" altLang="zh-CN" sz="1800">
+                <a:solidFill>
+                  <a:schemeClr val="accent6"/>
+                </a:solidFill>
+              </a:rPr>
+              <a:t>/</a:t>
+            </a:r>
+            <a:r>
+              <a:rPr lang="zh-CN" altLang="en-US" sz="1800">
+                <a:solidFill>
+                  <a:schemeClr val="accent6"/>
+                </a:solidFill>
+              </a:rPr>
+              <a:t>反汇编（布线板），版本补丁</a:t>
+            </a:r>
+            <a:r>
+              <a:rPr lang="en-US" altLang="zh-CN" sz="1800">
+                <a:solidFill>
+                  <a:schemeClr val="accent6"/>
+                </a:solidFill>
+              </a:rPr>
+              <a:t>/</a:t>
+            </a:r>
+            <a:r>
+              <a:rPr lang="zh-CN" altLang="en-US" sz="1800">
+                <a:solidFill>
+                  <a:schemeClr val="accent6"/>
+                </a:solidFill>
+              </a:rPr>
+              <a:t>比对分析，</a:t>
+            </a:r>
+            <a:r>
+              <a:rPr lang="zh-CN" altLang="en-US">
+                <a:solidFill>
+                  <a:schemeClr val="accent6"/>
+                </a:solidFill>
+                <a:sym typeface="+mn-ea"/>
+              </a:rPr>
+              <a:t>支撑</a:t>
+            </a:r>
+            <a:r>
+              <a:rPr lang="zh-CN" altLang="en-US" sz="1800">
+                <a:solidFill>
+                  <a:schemeClr val="accent6"/>
+                </a:solidFill>
+              </a:rPr>
+              <a:t>整体设计和动态调试</a:t>
+            </a:r>
+            <a:endParaRPr lang="zh-CN" altLang="en-US" sz="1800">
+              <a:solidFill>
+                <a:schemeClr val="accent6"/>
+              </a:solidFill>
+            </a:endParaRPr>
+          </a:p>
+          <a:p>
+            <a:pPr lvl="1"/>
+            <a:r>
+              <a:rPr lang="zh-CN" altLang="en-US" sz="1800">
+                <a:solidFill>
+                  <a:schemeClr val="accent6"/>
+                </a:solidFill>
+              </a:rPr>
+              <a:t>动态调试：运行时调试</a:t>
+            </a:r>
+            <a:r>
+              <a:rPr lang="en-US" altLang="zh-CN" sz="1800">
+                <a:solidFill>
+                  <a:schemeClr val="accent6"/>
+                </a:solidFill>
+              </a:rPr>
+              <a:t>/</a:t>
+            </a:r>
+            <a:r>
+              <a:rPr lang="zh-CN" altLang="en-US" sz="1800">
+                <a:solidFill>
+                  <a:schemeClr val="accent6"/>
+                </a:solidFill>
+              </a:rPr>
+              <a:t>反调试，提供运行时详细流程数据，比对分析；配合静态开发，</a:t>
+            </a:r>
+            <a:r>
+              <a:rPr lang="zh-CN" altLang="en-US">
+                <a:solidFill>
+                  <a:schemeClr val="accent6"/>
+                </a:solidFill>
+                <a:sym typeface="+mn-ea"/>
+              </a:rPr>
+              <a:t>支撑</a:t>
+            </a:r>
+            <a:r>
+              <a:rPr lang="zh-CN" altLang="en-US" sz="1800">
+                <a:solidFill>
+                  <a:schemeClr val="accent6"/>
+                </a:solidFill>
+              </a:rPr>
+              <a:t>整体设计</a:t>
+            </a:r>
+            <a:endParaRPr lang="zh-CN" altLang="en-US" sz="1800">
+              <a:solidFill>
+                <a:schemeClr val="accent6"/>
+              </a:solidFill>
+            </a:endParaRPr>
+          </a:p>
+          <a:p>
+            <a:pPr lvl="1"/>
+            <a:r>
+              <a:rPr lang="en-US" altLang="zh-CN" sz="1800">
+                <a:solidFill>
+                  <a:schemeClr val="accent6"/>
+                </a:solidFill>
+              </a:rPr>
+              <a:t>AI</a:t>
+            </a:r>
+            <a:r>
+              <a:rPr lang="zh-CN" altLang="en-US" sz="1800">
+                <a:solidFill>
+                  <a:schemeClr val="accent6"/>
+                </a:solidFill>
+              </a:rPr>
+              <a:t>辅助：查资料，配合阅读源码，</a:t>
+            </a:r>
+            <a:r>
+              <a:rPr lang="zh-CN" altLang="en-US">
+                <a:solidFill>
+                  <a:schemeClr val="accent6"/>
+                </a:solidFill>
+                <a:sym typeface="+mn-ea"/>
+              </a:rPr>
+              <a:t>配合分析问题</a:t>
+            </a:r>
+            <a:endParaRPr lang="zh-CN" altLang="en-US">
+              <a:solidFill>
+                <a:schemeClr val="accent6"/>
+              </a:solidFill>
+            </a:endParaRPr>
+          </a:p>
+          <a:p>
+            <a:r>
+              <a:rPr lang="zh-CN" altLang="en-US">
+                <a:solidFill>
+                  <a:schemeClr val="accent6"/>
+                </a:solidFill>
+              </a:rPr>
+              <a:t>主要难点</a:t>
+            </a:r>
+            <a:endParaRPr lang="zh-CN" altLang="en-US">
+              <a:solidFill>
+                <a:schemeClr val="accent6"/>
+              </a:solidFill>
+            </a:endParaRPr>
+          </a:p>
+          <a:p>
+            <a:pPr lvl="1"/>
+            <a:r>
+              <a:rPr lang="zh-CN" altLang="en-US" sz="1800">
+                <a:solidFill>
+                  <a:schemeClr val="accent6"/>
+                </a:solidFill>
+              </a:rPr>
+              <a:t>通用：没有厂商或相关人员配合，缺少文档，源代码量大。</a:t>
+            </a:r>
+            <a:endParaRPr lang="zh-CN" altLang="en-US" sz="1800">
+              <a:solidFill>
+                <a:schemeClr val="accent6"/>
+              </a:solidFill>
+            </a:endParaRPr>
+          </a:p>
+          <a:p>
+            <a:pPr lvl="1"/>
+            <a:r>
+              <a:rPr lang="zh-CN" altLang="en-US">
+                <a:solidFill>
+                  <a:schemeClr val="accent6"/>
+                </a:solidFill>
+              </a:rPr>
+              <a:t>专业：业务专业度高，业务模型非常复杂，运行环境不够理想（只能算是凑合着能用）。</a:t>
+            </a:r>
+            <a:endParaRPr lang="zh-CN" altLang="en-US">
+              <a:solidFill>
+                <a:schemeClr val="accent6"/>
+              </a:solidFill>
+            </a:endParaRPr>
+          </a:p>
+          <a:p>
+            <a:pPr lvl="1"/>
+            <a:r>
+              <a:rPr lang="zh-CN" altLang="en-US">
+                <a:solidFill>
+                  <a:schemeClr val="accent6"/>
+                </a:solidFill>
+              </a:rPr>
+              <a:t>艰苦：没有源码，需要反汇编分析，处理反调试。</a:t>
+            </a:r>
+            <a:endParaRPr lang="zh-CN" altLang="en-US">
+              <a:solidFill>
+                <a:schemeClr val="accent6"/>
+              </a:solidFill>
+            </a:endParaRPr>
+          </a:p>
+          <a:p>
+            <a:pPr lvl="1"/>
+            <a:endParaRPr lang="zh-CN" altLang="en-US" sz="1620">
+              <a:solidFill>
+                <a:schemeClr val="accent6"/>
+              </a:solidFill>
+            </a:endParaRPr>
+          </a:p>
+        </p:txBody>
+      </p:sp>
+    </p:spTree>
+  </p:cSld>
+  <p:clrMapOvr>
+    <a:masterClrMapping/>
+  </p:clrMapOvr>
+</p:sld>
+</file>
+
+<file path=ppt/slides/slide18.xml><?xml version="1.0" encoding="utf-8"?>
+<p:sld xmlns:a="http://schemas.openxmlformats.org/drawingml/2006/main" xmlns:r="http://schemas.openxmlformats.org/officeDocument/2006/relationships" xmlns:p="http://schemas.openxmlformats.org/presentationml/2006/main">
+  <p:cSld>
+    <p:bg>
+      <p:bgPr>
+        <a:solidFill>
+          <a:schemeClr val="tx1"/>
+        </a:solidFill>
+        <a:effectLst/>
+      </p:bgPr>
+    </p:bg>
+    <p:spTree>
+      <p:nvGrpSpPr>
+        <p:cNvPr id="1" name=""/>
+        <p:cNvGrpSpPr/>
+        <p:nvPr/>
+      </p:nvGrpSpPr>
+      <p:grpSpPr/>
+      <p:sp>
+        <p:nvSpPr>
+          <p:cNvPr id="2" name="Title 1"/>
+          <p:cNvSpPr>
+            <a:spLocks noGrp="1"/>
+          </p:cNvSpPr>
+          <p:nvPr>
+            <p:ph type="title"/>
+          </p:nvPr>
+        </p:nvSpPr>
+        <p:spPr>
+          <a:xfrm>
+            <a:off x="647700" y="146685"/>
+            <a:ext cx="10515600" cy="604520"/>
+          </a:xfrm>
+        </p:spPr>
+        <p:txBody>
+          <a:bodyPr/>
+          <a:p>
+            <a:pPr algn="ctr"/>
+            <a:r>
+              <a:rPr lang="zh-CN" altLang="en-US">
+                <a:solidFill>
+                  <a:schemeClr val="accent6"/>
+                </a:solidFill>
+                <a:sym typeface="+mn-ea"/>
+              </a:rPr>
+              <a:t>运行时分析：</a:t>
+            </a:r>
+            <a:r>
+              <a:rPr lang="zh-CN" altLang="en-US">
+                <a:solidFill>
+                  <a:schemeClr val="accent6"/>
+                </a:solidFill>
+              </a:rPr>
+              <a:t>辅助示例</a:t>
+            </a:r>
+            <a:endParaRPr lang="zh-CN" altLang="en-US">
+              <a:solidFill>
+                <a:schemeClr val="accent6"/>
+              </a:solidFill>
+            </a:endParaRPr>
+          </a:p>
+        </p:txBody>
+      </p:sp>
+      <p:sp>
+        <p:nvSpPr>
+          <p:cNvPr id="3" name="Content Placeholder 2"/>
+          <p:cNvSpPr>
+            <a:spLocks noGrp="1"/>
+          </p:cNvSpPr>
+          <p:nvPr>
+            <p:ph idx="1"/>
+          </p:nvPr>
+        </p:nvSpPr>
+        <p:spPr>
+          <a:xfrm>
+            <a:off x="647700" y="952500"/>
+            <a:ext cx="10515600" cy="5859780"/>
+          </a:xfrm>
+        </p:spPr>
+        <p:txBody>
+          <a:bodyPr/>
+          <a:p>
+            <a:r>
+              <a:rPr lang="zh-CN" altLang="en-US">
+                <a:solidFill>
+                  <a:schemeClr val="accent6"/>
+                </a:solidFill>
+              </a:rPr>
+              <a:t>处理版本</a:t>
+            </a:r>
+            <a:endParaRPr lang="zh-CN" altLang="en-US">
+              <a:solidFill>
+                <a:schemeClr val="accent6"/>
+              </a:solidFill>
+            </a:endParaRPr>
+          </a:p>
+          <a:p>
+            <a:pPr marL="457200" lvl="1" indent="0">
+              <a:buNone/>
+            </a:pPr>
+            <a:endParaRPr lang="zh-CN" altLang="en-US" sz="1800">
+              <a:solidFill>
+                <a:schemeClr val="accent6"/>
+              </a:solidFill>
+            </a:endParaRPr>
+          </a:p>
+          <a:p>
+            <a:pPr marL="457200" lvl="1" indent="0">
+              <a:buNone/>
+            </a:pPr>
+            <a:endParaRPr lang="zh-CN" altLang="en-US" sz="1800">
+              <a:solidFill>
+                <a:schemeClr val="accent6"/>
+              </a:solidFill>
+            </a:endParaRPr>
+          </a:p>
+          <a:p>
+            <a:pPr marL="457200" lvl="1" indent="0">
+              <a:buNone/>
+            </a:pPr>
+            <a:endParaRPr lang="zh-CN" altLang="en-US">
+              <a:solidFill>
+                <a:schemeClr val="accent6"/>
+              </a:solidFill>
+            </a:endParaRPr>
+          </a:p>
+          <a:p>
+            <a:r>
+              <a:rPr lang="zh-CN" altLang="en-US">
+                <a:solidFill>
+                  <a:schemeClr val="accent6"/>
+                </a:solidFill>
+              </a:rPr>
+              <a:t>细化调试</a:t>
+            </a:r>
+            <a:endParaRPr lang="zh-CN" altLang="en-US">
+              <a:solidFill>
+                <a:schemeClr val="accent6"/>
+              </a:solidFill>
+            </a:endParaRPr>
+          </a:p>
+          <a:p>
+            <a:pPr marL="457200" lvl="1" indent="0">
+              <a:buNone/>
+            </a:pPr>
+            <a:endParaRPr lang="zh-CN" altLang="en-US" sz="1800">
+              <a:solidFill>
+                <a:schemeClr val="accent6"/>
+              </a:solidFill>
+            </a:endParaRPr>
+          </a:p>
+          <a:p>
+            <a:pPr marL="457200" lvl="1" indent="0">
+              <a:buNone/>
+            </a:pPr>
+            <a:endParaRPr lang="zh-CN" altLang="en-US" sz="1800">
+              <a:solidFill>
+                <a:schemeClr val="accent6"/>
+              </a:solidFill>
+            </a:endParaRPr>
+          </a:p>
+          <a:p>
+            <a:pPr marL="457200" lvl="1" indent="0">
+              <a:buNone/>
+            </a:pPr>
+            <a:endParaRPr lang="zh-CN" altLang="en-US">
+              <a:solidFill>
+                <a:schemeClr val="accent6"/>
+              </a:solidFill>
+            </a:endParaRPr>
+          </a:p>
+          <a:p>
+            <a:r>
+              <a:rPr lang="zh-CN" altLang="en-US">
+                <a:solidFill>
+                  <a:schemeClr val="accent6"/>
+                </a:solidFill>
+              </a:rPr>
+              <a:t>阅读代码</a:t>
+            </a:r>
+            <a:endParaRPr lang="zh-CN" altLang="en-US">
+              <a:solidFill>
+                <a:schemeClr val="accent6"/>
+              </a:solidFill>
+            </a:endParaRPr>
+          </a:p>
+          <a:p>
+            <a:pPr marL="457200" lvl="1" indent="0">
+              <a:buNone/>
+            </a:pPr>
+            <a:endParaRPr lang="zh-CN" altLang="en-US" sz="1800">
+              <a:solidFill>
+                <a:schemeClr val="accent6"/>
+              </a:solidFill>
+            </a:endParaRPr>
+          </a:p>
+        </p:txBody>
+      </p:sp>
+    </p:spTree>
+  </p:cSld>
+  <p:clrMapOvr>
+    <a:masterClrMapping/>
+  </p:clrMapOvr>
+</p:sld>
+</file>
+
+<file path=ppt/slides/slide19.xml><?xml version="1.0" encoding="utf-8"?>
+<p:sld xmlns:a="http://schemas.openxmlformats.org/drawingml/2006/main" xmlns:r="http://schemas.openxmlformats.org/officeDocument/2006/relationships" xmlns:p="http://schemas.openxmlformats.org/presentationml/2006/main">
+  <p:cSld>
+    <p:bg>
+      <p:bgPr>
+        <a:solidFill>
+          <a:schemeClr val="tx1"/>
+        </a:solidFill>
+        <a:effectLst/>
+      </p:bgPr>
+    </p:bg>
+    <p:spTree>
+      <p:nvGrpSpPr>
+        <p:cNvPr id="1" name=""/>
+        <p:cNvGrpSpPr/>
+        <p:nvPr/>
+      </p:nvGrpSpPr>
+      <p:grpSpPr/>
+      <p:sp>
+        <p:nvSpPr>
+          <p:cNvPr id="2" name="Title 1"/>
+          <p:cNvSpPr>
+            <a:spLocks noGrp="1"/>
+          </p:cNvSpPr>
+          <p:nvPr>
+            <p:ph type="title"/>
+          </p:nvPr>
+        </p:nvSpPr>
+        <p:spPr>
+          <a:xfrm>
+            <a:off x="647700" y="146685"/>
+            <a:ext cx="10515600" cy="604520"/>
+          </a:xfrm>
+        </p:spPr>
+        <p:txBody>
+          <a:bodyPr/>
+          <a:p>
+            <a:pPr algn="ctr"/>
+            <a:r>
+              <a:rPr lang="zh-CN" altLang="en-US">
+                <a:solidFill>
+                  <a:schemeClr val="accent6"/>
+                </a:solidFill>
+                <a:sym typeface="+mn-ea"/>
+              </a:rPr>
+              <a:t>运行时分析：</a:t>
+            </a:r>
+            <a:r>
+              <a:rPr lang="zh-CN" altLang="en-US">
+                <a:solidFill>
+                  <a:schemeClr val="accent6"/>
+                </a:solidFill>
+              </a:rPr>
+              <a:t>辅助示例</a:t>
+            </a:r>
+            <a:endParaRPr lang="zh-CN" altLang="en-US">
+              <a:solidFill>
+                <a:schemeClr val="accent6"/>
+              </a:solidFill>
+            </a:endParaRPr>
+          </a:p>
+        </p:txBody>
+      </p:sp>
+      <p:sp>
+        <p:nvSpPr>
+          <p:cNvPr id="3" name="Content Placeholder 2"/>
+          <p:cNvSpPr>
+            <a:spLocks noGrp="1"/>
+          </p:cNvSpPr>
+          <p:nvPr>
+            <p:ph idx="1"/>
+          </p:nvPr>
+        </p:nvSpPr>
+        <p:spPr>
+          <a:xfrm>
+            <a:off x="647700" y="952500"/>
+            <a:ext cx="10515600" cy="5859780"/>
+          </a:xfrm>
+        </p:spPr>
+        <p:txBody>
+          <a:bodyPr/>
+          <a:p>
+            <a:r>
+              <a:rPr lang="zh-CN" altLang="en-US">
+                <a:solidFill>
+                  <a:schemeClr val="accent6"/>
+                </a:solidFill>
+              </a:rPr>
+              <a:t>处理版本</a:t>
+            </a:r>
+            <a:endParaRPr lang="zh-CN" altLang="en-US">
+              <a:solidFill>
+                <a:schemeClr val="accent6"/>
+              </a:solidFill>
+            </a:endParaRPr>
+          </a:p>
+          <a:p>
+            <a:pPr lvl="1"/>
+            <a:r>
+              <a:rPr lang="zh-CN" altLang="en-US">
+                <a:solidFill>
+                  <a:schemeClr val="accent6"/>
+                </a:solidFill>
+              </a:rPr>
+              <a:t>切换分支比对(分布式软总线为例)</a:t>
+            </a:r>
+            <a:endParaRPr lang="zh-CN" altLang="en-US" sz="1800">
+              <a:solidFill>
+                <a:schemeClr val="accent6"/>
+              </a:solidFill>
+            </a:endParaRPr>
+          </a:p>
+          <a:p>
+            <a:pPr lvl="1"/>
+            <a:r>
+              <a:rPr lang="zh-CN" altLang="en-US">
+                <a:solidFill>
+                  <a:schemeClr val="accent6"/>
+                </a:solidFill>
+              </a:rPr>
+              <a:t>整体信息统计</a:t>
+            </a:r>
+            <a:endParaRPr lang="zh-CN" altLang="en-US" sz="1800">
+              <a:solidFill>
+                <a:schemeClr val="accent6"/>
+              </a:solidFill>
+            </a:endParaRPr>
+          </a:p>
+          <a:p>
+            <a:pPr lvl="1"/>
+            <a:r>
+              <a:rPr lang="zh-CN" altLang="en-US">
+                <a:solidFill>
+                  <a:schemeClr val="accent6"/>
+                </a:solidFill>
+              </a:rPr>
+              <a:t>切分补丁/阅读补丁/内容查找(更改确认)</a:t>
+            </a:r>
+            <a:endParaRPr lang="zh-CN" altLang="en-US">
+              <a:solidFill>
+                <a:schemeClr val="accent6"/>
+              </a:solidFill>
+            </a:endParaRPr>
+          </a:p>
+          <a:p>
+            <a:r>
+              <a:rPr lang="zh-CN" altLang="en-US">
+                <a:solidFill>
+                  <a:schemeClr val="accent6"/>
+                </a:solidFill>
+              </a:rPr>
+              <a:t>细化调试</a:t>
+            </a:r>
+            <a:endParaRPr lang="zh-CN" altLang="en-US">
+              <a:solidFill>
+                <a:schemeClr val="accent6"/>
+              </a:solidFill>
+            </a:endParaRPr>
+          </a:p>
+          <a:p>
+            <a:pPr marL="457200" lvl="1" indent="0">
+              <a:buNone/>
+            </a:pPr>
+            <a:endParaRPr lang="zh-CN" altLang="en-US" sz="1800">
+              <a:solidFill>
+                <a:schemeClr val="accent6"/>
+              </a:solidFill>
+            </a:endParaRPr>
+          </a:p>
+          <a:p>
+            <a:pPr marL="457200" lvl="1" indent="0">
+              <a:buNone/>
+            </a:pPr>
+            <a:endParaRPr lang="zh-CN" altLang="en-US" sz="1800">
+              <a:solidFill>
+                <a:schemeClr val="accent6"/>
+              </a:solidFill>
+            </a:endParaRPr>
+          </a:p>
+          <a:p>
+            <a:pPr marL="457200" lvl="1" indent="0">
+              <a:buNone/>
+            </a:pPr>
+            <a:endParaRPr lang="zh-CN" altLang="en-US">
+              <a:solidFill>
+                <a:schemeClr val="accent6"/>
+              </a:solidFill>
+            </a:endParaRPr>
+          </a:p>
+          <a:p>
+            <a:r>
+              <a:rPr lang="zh-CN" altLang="en-US">
+                <a:solidFill>
+                  <a:schemeClr val="accent6"/>
+                </a:solidFill>
+              </a:rPr>
+              <a:t>阅读代码</a:t>
+            </a:r>
+            <a:endParaRPr lang="zh-CN" altLang="en-US">
+              <a:solidFill>
+                <a:schemeClr val="accent6"/>
+              </a:solidFill>
+            </a:endParaRPr>
+          </a:p>
+          <a:p>
+            <a:pPr marL="457200" lvl="1" indent="0">
+              <a:buNone/>
+            </a:pPr>
+            <a:endParaRPr lang="zh-CN" altLang="en-US" sz="1800">
+              <a:solidFill>
+                <a:schemeClr val="accent6"/>
+              </a:solidFill>
+            </a:endParaRPr>
+          </a:p>
+        </p:txBody>
+      </p:sp>
+    </p:spTree>
+  </p:cSld>
+  <p:clrMapOvr>
+    <a:masterClrMapping/>
+  </p:clrMapOvr>
+</p:sld>
+</file>
+
 <file path=ppt/slides/slide2.xml><?xml version="1.0" encoding="utf-8"?>
 <p:sld xmlns:a="http://schemas.openxmlformats.org/drawingml/2006/main" xmlns:r="http://schemas.openxmlformats.org/officeDocument/2006/relationships" xmlns:p="http://schemas.openxmlformats.org/presentationml/2006/main">
   <p:cSld>
@@ -3769,6 +8381,231 @@
         <p:spPr>
           <a:xfrm>
             <a:off x="647700" y="952500"/>
+            <a:ext cx="11066145" cy="5859780"/>
+          </a:xfrm>
+        </p:spPr>
+        <p:txBody>
+          <a:bodyPr/>
+          <a:p>
+            <a:r>
+              <a:rPr lang="zh-CN" altLang="en-US">
+                <a:solidFill>
+                  <a:schemeClr val="accent6"/>
+                </a:solidFill>
+              </a:rPr>
+              <a:t>定位</a:t>
+            </a:r>
+            <a:endParaRPr lang="zh-CN" altLang="en-US">
+              <a:solidFill>
+                <a:schemeClr val="accent6"/>
+              </a:solidFill>
+            </a:endParaRPr>
+          </a:p>
+          <a:p>
+            <a:pPr lvl="1"/>
+            <a:endParaRPr lang="zh-CN" altLang="en-US">
+              <a:solidFill>
+                <a:schemeClr val="accent6"/>
+              </a:solidFill>
+            </a:endParaRPr>
+          </a:p>
+          <a:p>
+            <a:pPr lvl="1"/>
+            <a:endParaRPr lang="zh-CN" altLang="en-US">
+              <a:solidFill>
+                <a:schemeClr val="accent6"/>
+              </a:solidFill>
+            </a:endParaRPr>
+          </a:p>
+          <a:p>
+            <a:pPr lvl="1"/>
+            <a:endParaRPr lang="zh-CN" altLang="en-US">
+              <a:solidFill>
+                <a:schemeClr val="accent6"/>
+              </a:solidFill>
+            </a:endParaRPr>
+          </a:p>
+          <a:p>
+            <a:r>
+              <a:rPr lang="zh-CN" altLang="en-US">
+                <a:solidFill>
+                  <a:schemeClr val="accent6"/>
+                </a:solidFill>
+              </a:rPr>
+              <a:t>类别</a:t>
+            </a:r>
+            <a:endParaRPr lang="zh-CN" altLang="en-US">
+              <a:solidFill>
+                <a:schemeClr val="accent6"/>
+              </a:solidFill>
+            </a:endParaRPr>
+          </a:p>
+          <a:p>
+            <a:pPr lvl="1"/>
+            <a:endParaRPr lang="zh-CN" altLang="en-US">
+              <a:solidFill>
+                <a:schemeClr val="accent6"/>
+              </a:solidFill>
+            </a:endParaRPr>
+          </a:p>
+          <a:p>
+            <a:pPr lvl="1"/>
+            <a:endParaRPr lang="zh-CN" altLang="en-US">
+              <a:solidFill>
+                <a:schemeClr val="accent6"/>
+              </a:solidFill>
+            </a:endParaRPr>
+          </a:p>
+          <a:p>
+            <a:pPr lvl="1"/>
+            <a:endParaRPr lang="zh-CN" altLang="en-US">
+              <a:solidFill>
+                <a:schemeClr val="accent6"/>
+              </a:solidFill>
+            </a:endParaRPr>
+          </a:p>
+          <a:p>
+            <a:pPr lvl="1"/>
+            <a:endParaRPr lang="zh-CN" altLang="en-US">
+              <a:solidFill>
+                <a:schemeClr val="accent6"/>
+              </a:solidFill>
+            </a:endParaRPr>
+          </a:p>
+          <a:p>
+            <a:r>
+              <a:rPr lang="zh-CN" altLang="en-US">
+                <a:solidFill>
+                  <a:schemeClr val="accent6"/>
+                </a:solidFill>
+              </a:rPr>
+              <a:t>学习</a:t>
+            </a:r>
+            <a:endParaRPr lang="zh-CN" altLang="en-US">
+              <a:solidFill>
+                <a:schemeClr val="accent6"/>
+              </a:solidFill>
+            </a:endParaRPr>
+          </a:p>
+          <a:p>
+            <a:pPr lvl="1"/>
+            <a:endParaRPr lang="zh-CN" altLang="en-US" sz="1620">
+              <a:solidFill>
+                <a:schemeClr val="accent6"/>
+              </a:solidFill>
+            </a:endParaRPr>
+          </a:p>
+        </p:txBody>
+      </p:sp>
+      <p:sp>
+        <p:nvSpPr>
+          <p:cNvPr id="4" name="Text Box 3"/>
+          <p:cNvSpPr txBox="1"/>
+          <p:nvPr/>
+        </p:nvSpPr>
+        <p:spPr>
+          <a:xfrm>
+            <a:off x="12666980" y="2277745"/>
+            <a:ext cx="309880" cy="368300"/>
+          </a:xfrm>
+          <a:prstGeom prst="rect">
+            <a:avLst/>
+          </a:prstGeom>
+          <a:noFill/>
+        </p:spPr>
+        <p:txBody>
+          <a:bodyPr wrap="none" rtlCol="0">
+            <a:spAutoFit/>
+          </a:bodyPr>
+          <a:p>
+            <a:endParaRPr lang="en-US"/>
+          </a:p>
+        </p:txBody>
+      </p:sp>
+    </p:spTree>
+  </p:cSld>
+  <p:clrMapOvr>
+    <a:masterClrMapping/>
+  </p:clrMapOvr>
+</p:sld>
+</file>
+
+<file path=ppt/slides/slide20.xml><?xml version="1.0" encoding="utf-8"?>
+<p:sld xmlns:a="http://schemas.openxmlformats.org/drawingml/2006/main" xmlns:r="http://schemas.openxmlformats.org/officeDocument/2006/relationships" xmlns:p="http://schemas.openxmlformats.org/presentationml/2006/main">
+  <p:cSld>
+    <p:bg>
+      <p:bgPr>
+        <a:solidFill>
+          <a:schemeClr val="tx1"/>
+        </a:solidFill>
+        <a:effectLst/>
+      </p:bgPr>
+    </p:bg>
+    <p:spTree>
+      <p:nvGrpSpPr>
+        <p:cNvPr id="1" name=""/>
+        <p:cNvGrpSpPr/>
+        <p:nvPr/>
+      </p:nvGrpSpPr>
+      <p:grpSpPr/>
+      <p:sp>
+        <p:nvSpPr>
+          <p:cNvPr id="2" name="Title 1"/>
+          <p:cNvSpPr>
+            <a:spLocks noGrp="1"/>
+          </p:cNvSpPr>
+          <p:nvPr>
+            <p:ph type="title"/>
+          </p:nvPr>
+        </p:nvSpPr>
+        <p:spPr>
+          <a:xfrm>
+            <a:off x="647700" y="146685"/>
+            <a:ext cx="10515600" cy="604520"/>
+          </a:xfrm>
+        </p:spPr>
+        <p:txBody>
+          <a:bodyPr/>
+          <a:p>
+            <a:pPr algn="ctr"/>
+            <a:r>
+              <a:rPr lang="zh-CN" altLang="en-US">
+                <a:solidFill>
+                  <a:schemeClr val="accent6"/>
+                </a:solidFill>
+                <a:sym typeface="+mn-ea"/>
+              </a:rPr>
+              <a:t>运行时分析：</a:t>
+            </a:r>
+            <a:r>
+              <a:rPr lang="zh-CN" altLang="en-US">
+                <a:solidFill>
+                  <a:schemeClr val="accent6"/>
+                </a:solidFill>
+              </a:rPr>
+              <a:t>辅助示例</a:t>
+            </a:r>
+            <a:endParaRPr lang="zh-CN" altLang="en-US">
+              <a:solidFill>
+                <a:schemeClr val="accent6"/>
+              </a:solidFill>
+            </a:endParaRPr>
+          </a:p>
+        </p:txBody>
+      </p:sp>
+      <p:sp>
+        <p:nvSpPr>
+          <p:cNvPr id="3" name="Content Placeholder 2"/>
+          <p:cNvSpPr>
+            <a:spLocks noGrp="1"/>
+          </p:cNvSpPr>
+          <p:nvPr>
+            <p:ph idx="1"/>
+          </p:nvPr>
+        </p:nvSpPr>
+        <p:spPr>
+          <a:xfrm>
+            <a:off x="647700" y="952500"/>
             <a:ext cx="10515600" cy="5859780"/>
           </a:xfrm>
         </p:spPr>
@@ -3781,37 +8618,423 @@
                   <a:schemeClr val="accent6"/>
                 </a:solidFill>
               </a:rPr>
-              <a:t>定位</a:t>
-            </a:r>
-            <a:endParaRPr lang="zh-CN" altLang="en-US">
-              <a:solidFill>
-                <a:schemeClr val="accent6"/>
-              </a:solidFill>
-            </a:endParaRPr>
-          </a:p>
-          <a:p>
-            <a:r>
-              <a:rPr lang="zh-CN" altLang="en-US">
-                <a:solidFill>
-                  <a:schemeClr val="accent6"/>
-                </a:solidFill>
-              </a:rPr>
-              <a:t>类别</a:t>
-            </a:r>
-            <a:endParaRPr lang="zh-CN" altLang="en-US">
-              <a:solidFill>
-                <a:schemeClr val="accent6"/>
-              </a:solidFill>
-            </a:endParaRPr>
-          </a:p>
-          <a:p>
-            <a:r>
-              <a:rPr lang="zh-CN" altLang="en-US">
-                <a:solidFill>
-                  <a:schemeClr val="accent6"/>
-                </a:solidFill>
-              </a:rPr>
-              <a:t>学习</a:t>
+              <a:t>处理版本</a:t>
+            </a:r>
+            <a:endParaRPr lang="zh-CN" altLang="en-US">
+              <a:solidFill>
+                <a:schemeClr val="accent6"/>
+              </a:solidFill>
+            </a:endParaRPr>
+          </a:p>
+          <a:p>
+            <a:pPr lvl="1"/>
+            <a:r>
+              <a:rPr lang="zh-CN" altLang="en-US">
+                <a:solidFill>
+                  <a:schemeClr val="accent6"/>
+                </a:solidFill>
+              </a:rPr>
+              <a:t>切换分支比对(分布式软总线为例)</a:t>
+            </a:r>
+            <a:endParaRPr lang="zh-CN" altLang="en-US" sz="1800">
+              <a:solidFill>
+                <a:schemeClr val="accent6"/>
+              </a:solidFill>
+            </a:endParaRPr>
+          </a:p>
+          <a:p>
+            <a:pPr lvl="1"/>
+            <a:r>
+              <a:rPr lang="zh-CN" altLang="en-US">
+                <a:solidFill>
+                  <a:schemeClr val="accent6"/>
+                </a:solidFill>
+              </a:rPr>
+              <a:t>整体信息统计</a:t>
+            </a:r>
+            <a:endParaRPr lang="zh-CN" altLang="en-US" sz="1800">
+              <a:solidFill>
+                <a:schemeClr val="accent6"/>
+              </a:solidFill>
+            </a:endParaRPr>
+          </a:p>
+          <a:p>
+            <a:pPr lvl="1"/>
+            <a:r>
+              <a:rPr lang="zh-CN" altLang="en-US">
+                <a:solidFill>
+                  <a:schemeClr val="accent6"/>
+                </a:solidFill>
+              </a:rPr>
+              <a:t>切分补丁/阅读补丁/内容查找(更改确认)</a:t>
+            </a:r>
+            <a:endParaRPr lang="zh-CN" altLang="en-US">
+              <a:solidFill>
+                <a:schemeClr val="accent6"/>
+              </a:solidFill>
+            </a:endParaRPr>
+          </a:p>
+          <a:p>
+            <a:r>
+              <a:rPr lang="zh-CN" altLang="en-US">
+                <a:solidFill>
+                  <a:schemeClr val="accent6"/>
+                </a:solidFill>
+              </a:rPr>
+              <a:t>细化调试</a:t>
+            </a:r>
+            <a:endParaRPr lang="zh-CN" altLang="en-US">
+              <a:solidFill>
+                <a:schemeClr val="accent6"/>
+              </a:solidFill>
+            </a:endParaRPr>
+          </a:p>
+          <a:p>
+            <a:pPr lvl="1"/>
+            <a:r>
+              <a:rPr lang="zh-CN" altLang="en-US">
+                <a:solidFill>
+                  <a:schemeClr val="accent6"/>
+                </a:solidFill>
+              </a:rPr>
+              <a:t>汇编和源码对应</a:t>
+            </a:r>
+            <a:endParaRPr lang="zh-CN" altLang="en-US" sz="1800">
+              <a:solidFill>
+                <a:schemeClr val="accent6"/>
+              </a:solidFill>
+            </a:endParaRPr>
+          </a:p>
+          <a:p>
+            <a:pPr lvl="1"/>
+            <a:r>
+              <a:rPr lang="zh-CN" altLang="en-US">
+                <a:solidFill>
+                  <a:schemeClr val="accent6"/>
+                </a:solidFill>
+              </a:rPr>
+              <a:t>配合设计和实现的运行时数据流程确认</a:t>
+            </a:r>
+            <a:endParaRPr lang="zh-CN" altLang="en-US" sz="1800">
+              <a:solidFill>
+                <a:schemeClr val="accent6"/>
+              </a:solidFill>
+            </a:endParaRPr>
+          </a:p>
+          <a:p>
+            <a:pPr lvl="1"/>
+            <a:r>
+              <a:rPr lang="zh-CN" altLang="en-US">
+                <a:solidFill>
+                  <a:schemeClr val="accent6"/>
+                </a:solidFill>
+              </a:rPr>
+              <a:t>运行时实际加载(尤其是瞬间处理并释放资源/firefox)</a:t>
+            </a:r>
+            <a:endParaRPr lang="zh-CN" altLang="en-US">
+              <a:solidFill>
+                <a:schemeClr val="accent6"/>
+              </a:solidFill>
+            </a:endParaRPr>
+          </a:p>
+          <a:p>
+            <a:r>
+              <a:rPr lang="zh-CN" altLang="en-US">
+                <a:solidFill>
+                  <a:schemeClr val="accent6"/>
+                </a:solidFill>
+              </a:rPr>
+              <a:t>阅读代码</a:t>
+            </a:r>
+            <a:endParaRPr lang="zh-CN" altLang="en-US">
+              <a:solidFill>
+                <a:schemeClr val="accent6"/>
+              </a:solidFill>
+            </a:endParaRPr>
+          </a:p>
+          <a:p>
+            <a:pPr marL="457200" lvl="1" indent="0">
+              <a:buNone/>
+            </a:pPr>
+            <a:endParaRPr lang="zh-CN" altLang="en-US" sz="1800">
+              <a:solidFill>
+                <a:schemeClr val="accent6"/>
+              </a:solidFill>
+            </a:endParaRPr>
+          </a:p>
+        </p:txBody>
+      </p:sp>
+    </p:spTree>
+  </p:cSld>
+  <p:clrMapOvr>
+    <a:masterClrMapping/>
+  </p:clrMapOvr>
+</p:sld>
+</file>
+
+<file path=ppt/slides/slide21.xml><?xml version="1.0" encoding="utf-8"?>
+<p:sld xmlns:a="http://schemas.openxmlformats.org/drawingml/2006/main" xmlns:r="http://schemas.openxmlformats.org/officeDocument/2006/relationships" xmlns:p="http://schemas.openxmlformats.org/presentationml/2006/main">
+  <p:cSld>
+    <p:bg>
+      <p:bgPr>
+        <a:solidFill>
+          <a:schemeClr val="tx1"/>
+        </a:solidFill>
+        <a:effectLst/>
+      </p:bgPr>
+    </p:bg>
+    <p:spTree>
+      <p:nvGrpSpPr>
+        <p:cNvPr id="1" name=""/>
+        <p:cNvGrpSpPr/>
+        <p:nvPr/>
+      </p:nvGrpSpPr>
+      <p:grpSpPr/>
+      <p:sp>
+        <p:nvSpPr>
+          <p:cNvPr id="2" name="Title 1"/>
+          <p:cNvSpPr>
+            <a:spLocks noGrp="1"/>
+          </p:cNvSpPr>
+          <p:nvPr>
+            <p:ph type="title"/>
+          </p:nvPr>
+        </p:nvSpPr>
+        <p:spPr>
+          <a:xfrm>
+            <a:off x="647700" y="146685"/>
+            <a:ext cx="10515600" cy="604520"/>
+          </a:xfrm>
+        </p:spPr>
+        <p:txBody>
+          <a:bodyPr/>
+          <a:p>
+            <a:pPr algn="ctr"/>
+            <a:r>
+              <a:rPr lang="zh-CN" altLang="en-US">
+                <a:solidFill>
+                  <a:schemeClr val="accent6"/>
+                </a:solidFill>
+                <a:sym typeface="+mn-ea"/>
+              </a:rPr>
+              <a:t>运行时分析：</a:t>
+            </a:r>
+            <a:r>
+              <a:rPr lang="zh-CN" altLang="en-US">
+                <a:solidFill>
+                  <a:schemeClr val="accent6"/>
+                </a:solidFill>
+              </a:rPr>
+              <a:t>辅助示例</a:t>
+            </a:r>
+            <a:endParaRPr lang="zh-CN" altLang="en-US">
+              <a:solidFill>
+                <a:schemeClr val="accent6"/>
+              </a:solidFill>
+            </a:endParaRPr>
+          </a:p>
+        </p:txBody>
+      </p:sp>
+      <p:sp>
+        <p:nvSpPr>
+          <p:cNvPr id="3" name="Content Placeholder 2"/>
+          <p:cNvSpPr>
+            <a:spLocks noGrp="1"/>
+          </p:cNvSpPr>
+          <p:nvPr>
+            <p:ph idx="1"/>
+          </p:nvPr>
+        </p:nvSpPr>
+        <p:spPr>
+          <a:xfrm>
+            <a:off x="647700" y="952500"/>
+            <a:ext cx="10515600" cy="5859780"/>
+          </a:xfrm>
+        </p:spPr>
+        <p:txBody>
+          <a:bodyPr/>
+          <a:p>
+            <a:r>
+              <a:rPr lang="zh-CN" altLang="en-US">
+                <a:solidFill>
+                  <a:schemeClr val="accent6"/>
+                </a:solidFill>
+              </a:rPr>
+              <a:t>处理版本</a:t>
+            </a:r>
+            <a:endParaRPr lang="zh-CN" altLang="en-US">
+              <a:solidFill>
+                <a:schemeClr val="accent6"/>
+              </a:solidFill>
+            </a:endParaRPr>
+          </a:p>
+          <a:p>
+            <a:pPr lvl="1"/>
+            <a:r>
+              <a:rPr lang="zh-CN" altLang="en-US">
+                <a:solidFill>
+                  <a:schemeClr val="accent6"/>
+                </a:solidFill>
+              </a:rPr>
+              <a:t>切换分支比对(分布式软总线为例)</a:t>
+            </a:r>
+            <a:endParaRPr lang="zh-CN" altLang="en-US" sz="1800">
+              <a:solidFill>
+                <a:schemeClr val="accent6"/>
+              </a:solidFill>
+            </a:endParaRPr>
+          </a:p>
+          <a:p>
+            <a:pPr lvl="1"/>
+            <a:r>
+              <a:rPr lang="zh-CN" altLang="en-US">
+                <a:solidFill>
+                  <a:schemeClr val="accent6"/>
+                </a:solidFill>
+              </a:rPr>
+              <a:t>整体信息统计</a:t>
+            </a:r>
+            <a:endParaRPr lang="zh-CN" altLang="en-US" sz="1800">
+              <a:solidFill>
+                <a:schemeClr val="accent6"/>
+              </a:solidFill>
+            </a:endParaRPr>
+          </a:p>
+          <a:p>
+            <a:pPr lvl="1"/>
+            <a:r>
+              <a:rPr lang="zh-CN" altLang="en-US">
+                <a:solidFill>
+                  <a:schemeClr val="accent6"/>
+                </a:solidFill>
+              </a:rPr>
+              <a:t>切分补丁/阅读补丁/内容查找(更改确认)</a:t>
+            </a:r>
+            <a:endParaRPr lang="zh-CN" altLang="en-US">
+              <a:solidFill>
+                <a:schemeClr val="accent6"/>
+              </a:solidFill>
+            </a:endParaRPr>
+          </a:p>
+          <a:p>
+            <a:r>
+              <a:rPr lang="zh-CN" altLang="en-US">
+                <a:solidFill>
+                  <a:schemeClr val="accent6"/>
+                </a:solidFill>
+              </a:rPr>
+              <a:t>细化调试</a:t>
+            </a:r>
+            <a:endParaRPr lang="zh-CN" altLang="en-US">
+              <a:solidFill>
+                <a:schemeClr val="accent6"/>
+              </a:solidFill>
+            </a:endParaRPr>
+          </a:p>
+          <a:p>
+            <a:pPr lvl="1"/>
+            <a:r>
+              <a:rPr lang="zh-CN" altLang="en-US">
+                <a:solidFill>
+                  <a:schemeClr val="accent6"/>
+                </a:solidFill>
+              </a:rPr>
+              <a:t>汇编和源码对应</a:t>
+            </a:r>
+            <a:endParaRPr lang="zh-CN" altLang="en-US" sz="1800">
+              <a:solidFill>
+                <a:schemeClr val="accent6"/>
+              </a:solidFill>
+            </a:endParaRPr>
+          </a:p>
+          <a:p>
+            <a:pPr lvl="1"/>
+            <a:r>
+              <a:rPr lang="zh-CN" altLang="en-US">
+                <a:solidFill>
+                  <a:schemeClr val="accent6"/>
+                </a:solidFill>
+              </a:rPr>
+              <a:t>配合设计和实现的运行时数据流程确认</a:t>
+            </a:r>
+            <a:endParaRPr lang="zh-CN" altLang="en-US" sz="1800">
+              <a:solidFill>
+                <a:schemeClr val="accent6"/>
+              </a:solidFill>
+            </a:endParaRPr>
+          </a:p>
+          <a:p>
+            <a:pPr lvl="1"/>
+            <a:r>
+              <a:rPr lang="zh-CN" altLang="en-US">
+                <a:solidFill>
+                  <a:schemeClr val="accent6"/>
+                </a:solidFill>
+              </a:rPr>
+              <a:t>运行时实际加载(尤其是瞬间处理并释放资源/firefox)</a:t>
+            </a:r>
+            <a:endParaRPr lang="zh-CN" altLang="en-US">
+              <a:solidFill>
+                <a:schemeClr val="accent6"/>
+              </a:solidFill>
+            </a:endParaRPr>
+          </a:p>
+          <a:p>
+            <a:r>
+              <a:rPr lang="zh-CN" altLang="en-US">
+                <a:solidFill>
+                  <a:schemeClr val="accent6"/>
+                </a:solidFill>
+              </a:rPr>
+              <a:t>阅读代码</a:t>
+            </a:r>
+            <a:endParaRPr lang="zh-CN" altLang="en-US">
+              <a:solidFill>
+                <a:schemeClr val="accent6"/>
+              </a:solidFill>
+            </a:endParaRPr>
+          </a:p>
+          <a:p>
+            <a:pPr lvl="1"/>
+            <a:r>
+              <a:rPr lang="zh-CN" altLang="en-US">
+                <a:solidFill>
+                  <a:schemeClr val="accent6"/>
+                </a:solidFill>
+              </a:rPr>
+              <a:t>整体源码阅读(flatpak为例)</a:t>
+            </a:r>
+            <a:endParaRPr lang="zh-CN" altLang="en-US" sz="1800">
+              <a:solidFill>
+                <a:schemeClr val="accent6"/>
+              </a:solidFill>
+            </a:endParaRPr>
+          </a:p>
+          <a:p>
+            <a:pPr lvl="1"/>
+            <a:r>
+              <a:rPr lang="zh-CN" altLang="en-US">
+                <a:solidFill>
+                  <a:schemeClr val="accent6"/>
+                </a:solidFill>
+              </a:rPr>
+              <a:t>辅助工具/作者思路/整体整理</a:t>
+            </a:r>
+            <a:endParaRPr lang="zh-CN" altLang="en-US" sz="1800">
+              <a:solidFill>
+                <a:schemeClr val="accent6"/>
+              </a:solidFill>
+            </a:endParaRPr>
+          </a:p>
+          <a:p>
+            <a:pPr lvl="1"/>
+            <a:r>
+              <a:rPr lang="zh-CN" altLang="en-US">
+                <a:solidFill>
+                  <a:schemeClr val="accent6"/>
+                </a:solidFill>
+              </a:rPr>
+              <a:t>多窗口操作/针对性阅读(具体接口/数据结构/处理流程)</a:t>
             </a:r>
             <a:endParaRPr lang="zh-CN" altLang="en-US" sz="1800">
               <a:solidFill>
@@ -3872,17 +9095,8 @@
                 <a:solidFill>
                   <a:schemeClr val="accent6"/>
                 </a:solidFill>
-                <a:sym typeface="+mn-ea"/>
-              </a:rPr>
-              <a:t>运行时分析：具体内容：</a:t>
-            </a:r>
-            <a:r>
-              <a:rPr lang="zh-CN" altLang="en-US">
-                <a:solidFill>
-                  <a:schemeClr val="accent6"/>
-                </a:solidFill>
-              </a:rPr>
-              <a:t>组件联调</a:t>
+              </a:rPr>
+              <a:t>运行时分析：整体概述</a:t>
             </a:r>
             <a:endParaRPr lang="zh-CN" altLang="en-US">
               <a:solidFill>
@@ -3905,7 +9119,7 @@
         <p:spPr>
           <a:xfrm>
             <a:off x="647700" y="952500"/>
-            <a:ext cx="10515600" cy="5859780"/>
+            <a:ext cx="11066145" cy="5859780"/>
           </a:xfrm>
         </p:spPr>
         <p:txBody>
@@ -3917,43 +9131,190 @@
                   <a:schemeClr val="accent6"/>
                 </a:solidFill>
               </a:rPr>
-              <a:t>概要描述</a:t>
-            </a:r>
-            <a:endParaRPr lang="zh-CN" altLang="en-US">
-              <a:solidFill>
-                <a:schemeClr val="accent6"/>
-              </a:solidFill>
-            </a:endParaRPr>
-          </a:p>
-          <a:p>
-            <a:r>
-              <a:rPr lang="zh-CN" altLang="en-US">
-                <a:solidFill>
-                  <a:schemeClr val="accent6"/>
-                </a:solidFill>
-              </a:rPr>
-              <a:t>处理方法</a:t>
-            </a:r>
-            <a:endParaRPr lang="zh-CN" altLang="en-US">
-              <a:solidFill>
-                <a:schemeClr val="accent6"/>
-              </a:solidFill>
-            </a:endParaRPr>
-          </a:p>
-          <a:p>
-            <a:r>
-              <a:rPr lang="zh-CN" altLang="en-US">
-                <a:solidFill>
-                  <a:schemeClr val="accent6"/>
-                </a:solidFill>
-              </a:rPr>
-              <a:t>主要难点</a:t>
-            </a:r>
-            <a:endParaRPr lang="zh-CN" altLang="en-US" sz="1800">
-              <a:solidFill>
-                <a:schemeClr val="accent6"/>
-              </a:solidFill>
-            </a:endParaRPr>
+              <a:t>定位</a:t>
+            </a:r>
+            <a:endParaRPr lang="zh-CN" altLang="en-US">
+              <a:solidFill>
+                <a:schemeClr val="accent6"/>
+              </a:solidFill>
+            </a:endParaRPr>
+          </a:p>
+          <a:p>
+            <a:pPr lvl="1"/>
+            <a:r>
+              <a:rPr lang="zh-CN" altLang="en-US">
+                <a:solidFill>
+                  <a:schemeClr val="accent6"/>
+                </a:solidFill>
+              </a:rPr>
+              <a:t>是对计算机</a:t>
+            </a:r>
+            <a:r>
+              <a:rPr lang="zh-CN" altLang="en-US">
+                <a:solidFill>
+                  <a:schemeClr val="accent6"/>
+                </a:solidFill>
+                <a:sym typeface="+mn-ea"/>
+              </a:rPr>
+              <a:t>整体</a:t>
+            </a:r>
+            <a:r>
+              <a:rPr lang="zh-CN" altLang="en-US">
+                <a:solidFill>
+                  <a:schemeClr val="accent6"/>
+                </a:solidFill>
+              </a:rPr>
+              <a:t>运行环境的分析。需要动态内容与静态内容相互结合。</a:t>
+            </a:r>
+            <a:endParaRPr lang="zh-CN" altLang="en-US">
+              <a:solidFill>
+                <a:schemeClr val="accent6"/>
+              </a:solidFill>
+            </a:endParaRPr>
+          </a:p>
+          <a:p>
+            <a:pPr lvl="1"/>
+            <a:r>
+              <a:rPr lang="zh-CN" altLang="en-US">
+                <a:solidFill>
+                  <a:schemeClr val="accent6"/>
+                </a:solidFill>
+              </a:rPr>
+              <a:t>动态：运行时监控是主要数据来源，运行时调试是主要处理方法。</a:t>
+            </a:r>
+            <a:endParaRPr lang="zh-CN" altLang="en-US">
+              <a:solidFill>
+                <a:schemeClr val="accent6"/>
+              </a:solidFill>
+            </a:endParaRPr>
+          </a:p>
+          <a:p>
+            <a:pPr lvl="1"/>
+            <a:r>
+              <a:rPr lang="zh-CN" altLang="en-US">
+                <a:solidFill>
+                  <a:schemeClr val="accent6"/>
+                </a:solidFill>
+              </a:rPr>
+              <a:t>静态：体系结构（理论），</a:t>
+            </a:r>
+            <a:r>
+              <a:rPr lang="zh-CN" altLang="en-US">
+                <a:solidFill>
+                  <a:schemeClr val="accent6"/>
+                </a:solidFill>
+                <a:sym typeface="+mn-ea"/>
+              </a:rPr>
+              <a:t>源码补丁（实践）</a:t>
+            </a:r>
+            <a:r>
+              <a:rPr lang="zh-CN" altLang="en-US">
+                <a:solidFill>
+                  <a:schemeClr val="accent6"/>
+                </a:solidFill>
+              </a:rPr>
+              <a:t>。</a:t>
+            </a:r>
+            <a:endParaRPr lang="zh-CN" altLang="en-US">
+              <a:solidFill>
+                <a:schemeClr val="accent6"/>
+              </a:solidFill>
+            </a:endParaRPr>
+          </a:p>
+          <a:p>
+            <a:r>
+              <a:rPr lang="zh-CN" altLang="en-US">
+                <a:solidFill>
+                  <a:schemeClr val="accent6"/>
+                </a:solidFill>
+              </a:rPr>
+              <a:t>类别</a:t>
+            </a:r>
+            <a:endParaRPr lang="zh-CN" altLang="en-US">
+              <a:solidFill>
+                <a:schemeClr val="accent6"/>
+              </a:solidFill>
+            </a:endParaRPr>
+          </a:p>
+          <a:p>
+            <a:pPr lvl="1"/>
+            <a:endParaRPr lang="zh-CN" altLang="en-US">
+              <a:solidFill>
+                <a:schemeClr val="accent6"/>
+              </a:solidFill>
+            </a:endParaRPr>
+          </a:p>
+          <a:p>
+            <a:pPr lvl="1"/>
+            <a:endParaRPr lang="zh-CN" altLang="en-US">
+              <a:solidFill>
+                <a:schemeClr val="accent6"/>
+              </a:solidFill>
+            </a:endParaRPr>
+          </a:p>
+          <a:p>
+            <a:pPr lvl="1"/>
+            <a:endParaRPr lang="zh-CN" altLang="en-US">
+              <a:solidFill>
+                <a:schemeClr val="accent6"/>
+              </a:solidFill>
+            </a:endParaRPr>
+          </a:p>
+          <a:p>
+            <a:pPr lvl="1"/>
+            <a:endParaRPr lang="zh-CN" altLang="en-US">
+              <a:solidFill>
+                <a:schemeClr val="accent6"/>
+              </a:solidFill>
+            </a:endParaRPr>
+          </a:p>
+          <a:p>
+            <a:r>
+              <a:rPr lang="zh-CN" altLang="en-US">
+                <a:solidFill>
+                  <a:schemeClr val="accent6"/>
+                </a:solidFill>
+              </a:rPr>
+              <a:t>学习</a:t>
+            </a:r>
+            <a:endParaRPr lang="zh-CN" altLang="en-US">
+              <a:solidFill>
+                <a:schemeClr val="accent6"/>
+              </a:solidFill>
+            </a:endParaRPr>
+          </a:p>
+          <a:p>
+            <a:pPr lvl="1"/>
+            <a:endParaRPr lang="zh-CN" altLang="en-US" sz="1620">
+              <a:solidFill>
+                <a:schemeClr val="accent6"/>
+              </a:solidFill>
+            </a:endParaRPr>
+          </a:p>
+        </p:txBody>
+      </p:sp>
+      <p:sp>
+        <p:nvSpPr>
+          <p:cNvPr id="4" name="Text Box 3"/>
+          <p:cNvSpPr txBox="1"/>
+          <p:nvPr/>
+        </p:nvSpPr>
+        <p:spPr>
+          <a:xfrm>
+            <a:off x="12666980" y="2277745"/>
+            <a:ext cx="309880" cy="368300"/>
+          </a:xfrm>
+          <a:prstGeom prst="rect">
+            <a:avLst/>
+          </a:prstGeom>
+          <a:noFill/>
+        </p:spPr>
+        <p:txBody>
+          <a:bodyPr wrap="none" rtlCol="0">
+            <a:spAutoFit/>
+          </a:bodyPr>
+          <a:p>
+            <a:endParaRPr lang="en-US"/>
           </a:p>
         </p:txBody>
       </p:sp>
@@ -4008,35 +9369,8 @@
                 <a:solidFill>
                   <a:schemeClr val="accent6"/>
                 </a:solidFill>
-                <a:sym typeface="+mn-ea"/>
-              </a:rPr>
-              <a:t>运行时分析：</a:t>
-            </a:r>
-            <a:r>
-              <a:rPr lang="zh-CN" altLang="en-US">
-                <a:solidFill>
-                  <a:schemeClr val="accent6"/>
-                </a:solidFill>
-                <a:sym typeface="+mn-ea"/>
-              </a:rPr>
-              <a:t>具体内容：</a:t>
-            </a:r>
-            <a:r>
-              <a:rPr lang="zh-CN" altLang="en-US">
-                <a:solidFill>
-                  <a:schemeClr val="accent6"/>
-                </a:solidFill>
-                <a:sym typeface="+mn-ea"/>
-              </a:rPr>
-              <a:t>问题</a:t>
-            </a:r>
-            <a:r>
-              <a:rPr lang="zh-CN" altLang="en-US">
-                <a:solidFill>
-                  <a:schemeClr val="accent6"/>
-                </a:solidFill>
-              </a:rPr>
-              <a:t>处理</a:t>
+              </a:rPr>
+              <a:t>运行时分析：整体概述</a:t>
             </a:r>
             <a:endParaRPr lang="zh-CN" altLang="en-US">
               <a:solidFill>
@@ -4048,7 +9382,7 @@
       </p:sp>
       <p:sp>
         <p:nvSpPr>
-          <p:cNvPr id="5" name="Content Placeholder 4"/>
+          <p:cNvPr id="3" name="Content Placeholder 2"/>
           <p:cNvSpPr>
             <a:spLocks noGrp="1"/>
           </p:cNvSpPr>
@@ -4059,7 +9393,7 @@
         <p:spPr>
           <a:xfrm>
             <a:off x="647700" y="952500"/>
-            <a:ext cx="10515600" cy="5859780"/>
+            <a:ext cx="11066145" cy="5859780"/>
           </a:xfrm>
         </p:spPr>
         <p:txBody>
@@ -4071,43 +9405,331 @@
                   <a:schemeClr val="accent6"/>
                 </a:solidFill>
               </a:rPr>
-              <a:t>概要描述</a:t>
-            </a:r>
-            <a:endParaRPr lang="zh-CN" altLang="en-US">
-              <a:solidFill>
-                <a:schemeClr val="accent6"/>
-              </a:solidFill>
-            </a:endParaRPr>
-          </a:p>
-          <a:p>
-            <a:r>
-              <a:rPr lang="zh-CN" altLang="en-US">
-                <a:solidFill>
-                  <a:schemeClr val="accent6"/>
-                </a:solidFill>
-              </a:rPr>
-              <a:t>处理方法</a:t>
-            </a:r>
-            <a:endParaRPr lang="zh-CN" altLang="en-US">
-              <a:solidFill>
-                <a:schemeClr val="accent6"/>
-              </a:solidFill>
-            </a:endParaRPr>
-          </a:p>
-          <a:p>
-            <a:r>
-              <a:rPr lang="zh-CN" altLang="en-US">
-                <a:solidFill>
-                  <a:schemeClr val="accent6"/>
-                </a:solidFill>
-              </a:rPr>
-              <a:t>主要难点</a:t>
-            </a:r>
-            <a:endParaRPr lang="zh-CN" altLang="en-US" sz="1800">
-              <a:solidFill>
-                <a:schemeClr val="accent6"/>
-              </a:solidFill>
-            </a:endParaRPr>
+              <a:t>定位</a:t>
+            </a:r>
+            <a:endParaRPr lang="zh-CN" altLang="en-US">
+              <a:solidFill>
+                <a:schemeClr val="accent6"/>
+              </a:solidFill>
+            </a:endParaRPr>
+          </a:p>
+          <a:p>
+            <a:pPr lvl="1"/>
+            <a:r>
+              <a:rPr lang="zh-CN" altLang="en-US">
+                <a:solidFill>
+                  <a:schemeClr val="accent6"/>
+                </a:solidFill>
+              </a:rPr>
+              <a:t>是对计算机</a:t>
+            </a:r>
+            <a:r>
+              <a:rPr lang="zh-CN" altLang="en-US">
+                <a:solidFill>
+                  <a:schemeClr val="accent6"/>
+                </a:solidFill>
+                <a:sym typeface="+mn-ea"/>
+              </a:rPr>
+              <a:t>整体</a:t>
+            </a:r>
+            <a:r>
+              <a:rPr lang="zh-CN" altLang="en-US">
+                <a:solidFill>
+                  <a:schemeClr val="accent6"/>
+                </a:solidFill>
+              </a:rPr>
+              <a:t>运行环境的分析。需要动态内容与静态内容相互结合。</a:t>
+            </a:r>
+            <a:endParaRPr lang="zh-CN" altLang="en-US">
+              <a:solidFill>
+                <a:schemeClr val="accent6"/>
+              </a:solidFill>
+            </a:endParaRPr>
+          </a:p>
+          <a:p>
+            <a:pPr lvl="1"/>
+            <a:r>
+              <a:rPr lang="zh-CN" altLang="en-US">
+                <a:solidFill>
+                  <a:schemeClr val="accent6"/>
+                </a:solidFill>
+              </a:rPr>
+              <a:t>动态：运行时监控是主要数据来源，运行时调试是主要处理方法。</a:t>
+            </a:r>
+            <a:endParaRPr lang="zh-CN" altLang="en-US">
+              <a:solidFill>
+                <a:schemeClr val="accent6"/>
+              </a:solidFill>
+            </a:endParaRPr>
+          </a:p>
+          <a:p>
+            <a:pPr lvl="1"/>
+            <a:r>
+              <a:rPr lang="zh-CN" altLang="en-US">
+                <a:solidFill>
+                  <a:schemeClr val="accent6"/>
+                </a:solidFill>
+              </a:rPr>
+              <a:t>静态：体系结构（理论），</a:t>
+            </a:r>
+            <a:r>
+              <a:rPr lang="zh-CN" altLang="en-US">
+                <a:solidFill>
+                  <a:schemeClr val="accent6"/>
+                </a:solidFill>
+                <a:sym typeface="+mn-ea"/>
+              </a:rPr>
+              <a:t>源码补丁（实践）</a:t>
+            </a:r>
+            <a:r>
+              <a:rPr lang="zh-CN" altLang="en-US">
+                <a:solidFill>
+                  <a:schemeClr val="accent6"/>
+                </a:solidFill>
+              </a:rPr>
+              <a:t>。</a:t>
+            </a:r>
+            <a:endParaRPr lang="zh-CN" altLang="en-US">
+              <a:solidFill>
+                <a:schemeClr val="accent6"/>
+              </a:solidFill>
+            </a:endParaRPr>
+          </a:p>
+          <a:p>
+            <a:r>
+              <a:rPr lang="zh-CN" altLang="en-US">
+                <a:solidFill>
+                  <a:schemeClr val="accent6"/>
+                </a:solidFill>
+              </a:rPr>
+              <a:t>类别</a:t>
+            </a:r>
+            <a:endParaRPr lang="zh-CN" altLang="en-US">
+              <a:solidFill>
+                <a:schemeClr val="accent6"/>
+              </a:solidFill>
+            </a:endParaRPr>
+          </a:p>
+          <a:p>
+            <a:pPr lvl="1"/>
+            <a:r>
+              <a:rPr lang="zh-CN" altLang="en-US">
+                <a:solidFill>
+                  <a:schemeClr val="accent6"/>
+                </a:solidFill>
+              </a:rPr>
+              <a:t>需求视角：组件联调</a:t>
+            </a:r>
+            <a:r>
+              <a:rPr lang="en-US" altLang="zh-CN">
+                <a:solidFill>
+                  <a:schemeClr val="accent6"/>
+                </a:solidFill>
+              </a:rPr>
+              <a:t>/</a:t>
+            </a:r>
+            <a:r>
+              <a:rPr lang="zh-CN" altLang="en-US">
+                <a:solidFill>
+                  <a:schemeClr val="accent6"/>
+                </a:solidFill>
+              </a:rPr>
+              <a:t>问题处理</a:t>
+            </a:r>
+            <a:r>
+              <a:rPr lang="en-US" altLang="zh-CN">
+                <a:solidFill>
+                  <a:schemeClr val="accent6"/>
+                </a:solidFill>
+              </a:rPr>
+              <a:t>/</a:t>
+            </a:r>
+            <a:r>
+              <a:rPr lang="zh-CN" altLang="en-US">
+                <a:solidFill>
+                  <a:schemeClr val="accent6"/>
+                </a:solidFill>
+              </a:rPr>
+              <a:t>原理分析。</a:t>
+            </a:r>
+            <a:endParaRPr lang="zh-CN" altLang="en-US">
+              <a:solidFill>
+                <a:schemeClr val="accent6"/>
+              </a:solidFill>
+            </a:endParaRPr>
+          </a:p>
+          <a:p>
+            <a:pPr lvl="1"/>
+            <a:r>
+              <a:rPr lang="zh-CN" altLang="en-US">
+                <a:solidFill>
+                  <a:schemeClr val="accent6"/>
+                </a:solidFill>
+              </a:rPr>
+              <a:t>使用视角：</a:t>
+            </a:r>
+            <a:r>
+              <a:rPr lang="zh-CN" altLang="en-US">
+                <a:solidFill>
+                  <a:schemeClr val="accent6"/>
+                </a:solidFill>
+                <a:sym typeface="+mn-ea"/>
+              </a:rPr>
+              <a:t>系统（含通用服务）</a:t>
+            </a:r>
+            <a:r>
+              <a:rPr lang="en-US" altLang="zh-CN">
+                <a:solidFill>
+                  <a:schemeClr val="accent6"/>
+                </a:solidFill>
+                <a:sym typeface="+mn-ea"/>
+              </a:rPr>
+              <a:t>/</a:t>
+            </a:r>
+            <a:r>
+              <a:rPr lang="zh-CN" altLang="en-US">
+                <a:solidFill>
+                  <a:schemeClr val="accent6"/>
+                </a:solidFill>
+                <a:sym typeface="+mn-ea"/>
+              </a:rPr>
+              <a:t>应用（含业务服务）</a:t>
+            </a:r>
+            <a:r>
+              <a:rPr lang="en-US" altLang="zh-CN">
+                <a:solidFill>
+                  <a:schemeClr val="accent6"/>
+                </a:solidFill>
+                <a:sym typeface="+mn-ea"/>
+              </a:rPr>
+              <a:t>/</a:t>
+            </a:r>
+            <a:r>
+              <a:rPr lang="zh-CN" altLang="en-US">
+                <a:solidFill>
+                  <a:schemeClr val="accent6"/>
+                </a:solidFill>
+                <a:sym typeface="+mn-ea"/>
+              </a:rPr>
+              <a:t>硬件（含设备）。</a:t>
+            </a:r>
+            <a:endParaRPr lang="zh-CN" altLang="en-US">
+              <a:solidFill>
+                <a:schemeClr val="accent6"/>
+              </a:solidFill>
+            </a:endParaRPr>
+          </a:p>
+          <a:p>
+            <a:pPr lvl="1"/>
+            <a:r>
+              <a:rPr lang="zh-CN" altLang="en-US">
+                <a:solidFill>
+                  <a:schemeClr val="accent6"/>
+                </a:solidFill>
+              </a:rPr>
+              <a:t>开发视角：设计层面</a:t>
+            </a:r>
+            <a:r>
+              <a:rPr lang="en-US" altLang="zh-CN">
+                <a:solidFill>
+                  <a:schemeClr val="accent6"/>
+                </a:solidFill>
+              </a:rPr>
+              <a:t>/</a:t>
+            </a:r>
+            <a:r>
+              <a:rPr lang="zh-CN" altLang="en-US">
+                <a:solidFill>
+                  <a:schemeClr val="accent6"/>
+                </a:solidFill>
+              </a:rPr>
+              <a:t>实现层面</a:t>
+            </a:r>
+            <a:r>
+              <a:rPr lang="en-US" altLang="zh-CN">
+                <a:solidFill>
+                  <a:schemeClr val="accent6"/>
+                </a:solidFill>
+              </a:rPr>
+              <a:t>/</a:t>
+            </a:r>
+            <a:r>
+              <a:rPr lang="zh-CN" altLang="en-US">
+                <a:solidFill>
+                  <a:schemeClr val="accent6"/>
+                </a:solidFill>
+              </a:rPr>
+              <a:t>调试层面。</a:t>
+            </a:r>
+            <a:endParaRPr lang="zh-CN" altLang="en-US">
+              <a:solidFill>
+                <a:schemeClr val="accent6"/>
+              </a:solidFill>
+            </a:endParaRPr>
+          </a:p>
+          <a:p>
+            <a:pPr lvl="1"/>
+            <a:r>
+              <a:rPr lang="zh-CN" altLang="en-US">
+                <a:solidFill>
+                  <a:schemeClr val="accent6"/>
+                </a:solidFill>
+              </a:rPr>
+              <a:t>融为一体，知行合一。</a:t>
+            </a:r>
+            <a:endParaRPr lang="zh-CN" altLang="en-US">
+              <a:solidFill>
+                <a:schemeClr val="accent6"/>
+              </a:solidFill>
+            </a:endParaRPr>
+          </a:p>
+          <a:p>
+            <a:r>
+              <a:rPr lang="zh-CN" altLang="en-US">
+                <a:solidFill>
+                  <a:schemeClr val="accent6"/>
+                </a:solidFill>
+              </a:rPr>
+              <a:t>学习</a:t>
+            </a:r>
+            <a:endParaRPr lang="zh-CN" altLang="en-US">
+              <a:solidFill>
+                <a:schemeClr val="accent6"/>
+              </a:solidFill>
+            </a:endParaRPr>
+          </a:p>
+          <a:p>
+            <a:pPr lvl="1"/>
+            <a:endParaRPr lang="zh-CN" altLang="en-US" sz="1620">
+              <a:solidFill>
+                <a:schemeClr val="accent6"/>
+              </a:solidFill>
+            </a:endParaRPr>
+          </a:p>
+        </p:txBody>
+      </p:sp>
+      <p:sp>
+        <p:nvSpPr>
+          <p:cNvPr id="4" name="Text Box 3"/>
+          <p:cNvSpPr txBox="1"/>
+          <p:nvPr/>
+        </p:nvSpPr>
+        <p:spPr>
+          <a:xfrm>
+            <a:off x="12666980" y="2277745"/>
+            <a:ext cx="309880" cy="368300"/>
+          </a:xfrm>
+          <a:prstGeom prst="rect">
+            <a:avLst/>
+          </a:prstGeom>
+          <a:noFill/>
+        </p:spPr>
+        <p:txBody>
+          <a:bodyPr wrap="none" rtlCol="0">
+            <a:spAutoFit/>
+          </a:bodyPr>
+          <a:p>
+            <a:endParaRPr lang="en-US"/>
           </a:p>
         </p:txBody>
       </p:sp>
@@ -4162,26 +9784,8 @@
                 <a:solidFill>
                   <a:schemeClr val="accent6"/>
                 </a:solidFill>
-                <a:sym typeface="+mn-ea"/>
-              </a:rPr>
-              <a:t>运行时分析：</a:t>
-            </a:r>
-            <a:r>
-              <a:rPr lang="zh-CN" altLang="en-US">
-                <a:solidFill>
-                  <a:schemeClr val="accent6"/>
-                </a:solidFill>
-                <a:sym typeface="+mn-ea"/>
-              </a:rPr>
-              <a:t>具体内容：</a:t>
-            </a:r>
-            <a:r>
-              <a:rPr lang="zh-CN" altLang="en-US">
-                <a:solidFill>
-                  <a:schemeClr val="accent6"/>
-                </a:solidFill>
-              </a:rPr>
-              <a:t>原理分析</a:t>
+              </a:rPr>
+              <a:t>运行时分析：整体概述</a:t>
             </a:r>
             <a:endParaRPr lang="zh-CN" altLang="en-US">
               <a:solidFill>
@@ -4193,7 +9797,7 @@
       </p:sp>
       <p:sp>
         <p:nvSpPr>
-          <p:cNvPr id="5" name="Content Placeholder 4"/>
+          <p:cNvPr id="3" name="Content Placeholder 2"/>
           <p:cNvSpPr>
             <a:spLocks noGrp="1"/>
           </p:cNvSpPr>
@@ -4204,7 +9808,7 @@
         <p:spPr>
           <a:xfrm>
             <a:off x="647700" y="952500"/>
-            <a:ext cx="10515600" cy="5859780"/>
+            <a:ext cx="11066145" cy="5859780"/>
           </a:xfrm>
         </p:spPr>
         <p:txBody>
@@ -4216,43 +9820,625 @@
                   <a:schemeClr val="accent6"/>
                 </a:solidFill>
               </a:rPr>
-              <a:t>概要描述</a:t>
-            </a:r>
-            <a:endParaRPr lang="zh-CN" altLang="en-US">
-              <a:solidFill>
-                <a:schemeClr val="accent6"/>
-              </a:solidFill>
-            </a:endParaRPr>
-          </a:p>
-          <a:p>
-            <a:r>
-              <a:rPr lang="zh-CN" altLang="en-US">
-                <a:solidFill>
-                  <a:schemeClr val="accent6"/>
-                </a:solidFill>
-              </a:rPr>
-              <a:t>处理方法</a:t>
-            </a:r>
-            <a:endParaRPr lang="zh-CN" altLang="en-US">
-              <a:solidFill>
-                <a:schemeClr val="accent6"/>
-              </a:solidFill>
-            </a:endParaRPr>
-          </a:p>
-          <a:p>
-            <a:r>
-              <a:rPr lang="zh-CN" altLang="en-US">
-                <a:solidFill>
-                  <a:schemeClr val="accent6"/>
-                </a:solidFill>
-              </a:rPr>
-              <a:t>主要难点</a:t>
+              <a:t>定位</a:t>
+            </a:r>
+            <a:endParaRPr lang="zh-CN" altLang="en-US">
+              <a:solidFill>
+                <a:schemeClr val="accent6"/>
+              </a:solidFill>
+            </a:endParaRPr>
+          </a:p>
+          <a:p>
+            <a:pPr lvl="1"/>
+            <a:r>
+              <a:rPr lang="zh-CN" altLang="en-US">
+                <a:solidFill>
+                  <a:schemeClr val="accent6"/>
+                </a:solidFill>
+              </a:rPr>
+              <a:t>是对计算机</a:t>
+            </a:r>
+            <a:r>
+              <a:rPr lang="zh-CN" altLang="en-US">
+                <a:solidFill>
+                  <a:schemeClr val="accent6"/>
+                </a:solidFill>
+                <a:sym typeface="+mn-ea"/>
+              </a:rPr>
+              <a:t>整体</a:t>
+            </a:r>
+            <a:r>
+              <a:rPr lang="zh-CN" altLang="en-US">
+                <a:solidFill>
+                  <a:schemeClr val="accent6"/>
+                </a:solidFill>
+              </a:rPr>
+              <a:t>运行环境的分析。需要动态内容与静态内容相互结合。</a:t>
+            </a:r>
+            <a:endParaRPr lang="zh-CN" altLang="en-US">
+              <a:solidFill>
+                <a:schemeClr val="accent6"/>
+              </a:solidFill>
+            </a:endParaRPr>
+          </a:p>
+          <a:p>
+            <a:pPr lvl="1"/>
+            <a:r>
+              <a:rPr lang="zh-CN" altLang="en-US">
+                <a:solidFill>
+                  <a:schemeClr val="accent6"/>
+                </a:solidFill>
+              </a:rPr>
+              <a:t>动态：运行时监控是主要数据来源，运行时调试是主要处理方法。</a:t>
+            </a:r>
+            <a:endParaRPr lang="zh-CN" altLang="en-US">
+              <a:solidFill>
+                <a:schemeClr val="accent6"/>
+              </a:solidFill>
+            </a:endParaRPr>
+          </a:p>
+          <a:p>
+            <a:pPr lvl="1"/>
+            <a:r>
+              <a:rPr lang="zh-CN" altLang="en-US">
+                <a:solidFill>
+                  <a:schemeClr val="accent6"/>
+                </a:solidFill>
+              </a:rPr>
+              <a:t>静态：体系结构（理论），</a:t>
+            </a:r>
+            <a:r>
+              <a:rPr lang="zh-CN" altLang="en-US">
+                <a:solidFill>
+                  <a:schemeClr val="accent6"/>
+                </a:solidFill>
+                <a:sym typeface="+mn-ea"/>
+              </a:rPr>
+              <a:t>源码补丁（实践）</a:t>
+            </a:r>
+            <a:r>
+              <a:rPr lang="zh-CN" altLang="en-US">
+                <a:solidFill>
+                  <a:schemeClr val="accent6"/>
+                </a:solidFill>
+              </a:rPr>
+              <a:t>。</a:t>
+            </a:r>
+            <a:endParaRPr lang="zh-CN" altLang="en-US">
+              <a:solidFill>
+                <a:schemeClr val="accent6"/>
+              </a:solidFill>
+            </a:endParaRPr>
+          </a:p>
+          <a:p>
+            <a:r>
+              <a:rPr lang="zh-CN" altLang="en-US">
+                <a:solidFill>
+                  <a:schemeClr val="accent6"/>
+                </a:solidFill>
+              </a:rPr>
+              <a:t>类别</a:t>
+            </a:r>
+            <a:endParaRPr lang="zh-CN" altLang="en-US">
+              <a:solidFill>
+                <a:schemeClr val="accent6"/>
+              </a:solidFill>
+            </a:endParaRPr>
+          </a:p>
+          <a:p>
+            <a:pPr lvl="1"/>
+            <a:r>
+              <a:rPr lang="zh-CN" altLang="en-US">
+                <a:solidFill>
+                  <a:schemeClr val="accent6"/>
+                </a:solidFill>
+              </a:rPr>
+              <a:t>需求视角：组件联调</a:t>
+            </a:r>
+            <a:r>
+              <a:rPr lang="en-US" altLang="zh-CN">
+                <a:solidFill>
+                  <a:schemeClr val="accent6"/>
+                </a:solidFill>
+              </a:rPr>
+              <a:t>/</a:t>
+            </a:r>
+            <a:r>
+              <a:rPr lang="zh-CN" altLang="en-US">
+                <a:solidFill>
+                  <a:schemeClr val="accent6"/>
+                </a:solidFill>
+              </a:rPr>
+              <a:t>问题处理</a:t>
+            </a:r>
+            <a:r>
+              <a:rPr lang="en-US" altLang="zh-CN">
+                <a:solidFill>
+                  <a:schemeClr val="accent6"/>
+                </a:solidFill>
+              </a:rPr>
+              <a:t>/</a:t>
+            </a:r>
+            <a:r>
+              <a:rPr lang="zh-CN" altLang="en-US">
+                <a:solidFill>
+                  <a:schemeClr val="accent6"/>
+                </a:solidFill>
+              </a:rPr>
+              <a:t>原理分析。</a:t>
+            </a:r>
+            <a:endParaRPr lang="zh-CN" altLang="en-US">
+              <a:solidFill>
+                <a:schemeClr val="accent6"/>
+              </a:solidFill>
+            </a:endParaRPr>
+          </a:p>
+          <a:p>
+            <a:pPr lvl="1"/>
+            <a:r>
+              <a:rPr lang="zh-CN" altLang="en-US">
+                <a:solidFill>
+                  <a:schemeClr val="accent6"/>
+                </a:solidFill>
+              </a:rPr>
+              <a:t>使用视角：</a:t>
+            </a:r>
+            <a:r>
+              <a:rPr lang="zh-CN" altLang="en-US">
+                <a:solidFill>
+                  <a:schemeClr val="accent6"/>
+                </a:solidFill>
+                <a:sym typeface="+mn-ea"/>
+              </a:rPr>
+              <a:t>系统（含通用服务）</a:t>
+            </a:r>
+            <a:r>
+              <a:rPr lang="en-US" altLang="zh-CN">
+                <a:solidFill>
+                  <a:schemeClr val="accent6"/>
+                </a:solidFill>
+                <a:sym typeface="+mn-ea"/>
+              </a:rPr>
+              <a:t>/</a:t>
+            </a:r>
+            <a:r>
+              <a:rPr lang="zh-CN" altLang="en-US">
+                <a:solidFill>
+                  <a:schemeClr val="accent6"/>
+                </a:solidFill>
+                <a:sym typeface="+mn-ea"/>
+              </a:rPr>
+              <a:t>应用（含业务服务）</a:t>
+            </a:r>
+            <a:r>
+              <a:rPr lang="en-US" altLang="zh-CN">
+                <a:solidFill>
+                  <a:schemeClr val="accent6"/>
+                </a:solidFill>
+                <a:sym typeface="+mn-ea"/>
+              </a:rPr>
+              <a:t>/</a:t>
+            </a:r>
+            <a:r>
+              <a:rPr lang="zh-CN" altLang="en-US">
+                <a:solidFill>
+                  <a:schemeClr val="accent6"/>
+                </a:solidFill>
+                <a:sym typeface="+mn-ea"/>
+              </a:rPr>
+              <a:t>硬件（含设备）。</a:t>
+            </a:r>
+            <a:endParaRPr lang="zh-CN" altLang="en-US">
+              <a:solidFill>
+                <a:schemeClr val="accent6"/>
+              </a:solidFill>
+            </a:endParaRPr>
+          </a:p>
+          <a:p>
+            <a:pPr lvl="1"/>
+            <a:r>
+              <a:rPr lang="zh-CN" altLang="en-US">
+                <a:solidFill>
+                  <a:schemeClr val="accent6"/>
+                </a:solidFill>
+              </a:rPr>
+              <a:t>开发视角：设计层面</a:t>
+            </a:r>
+            <a:r>
+              <a:rPr lang="en-US" altLang="zh-CN">
+                <a:solidFill>
+                  <a:schemeClr val="accent6"/>
+                </a:solidFill>
+              </a:rPr>
+              <a:t>/</a:t>
+            </a:r>
+            <a:r>
+              <a:rPr lang="zh-CN" altLang="en-US">
+                <a:solidFill>
+                  <a:schemeClr val="accent6"/>
+                </a:solidFill>
+              </a:rPr>
+              <a:t>实现层面</a:t>
+            </a:r>
+            <a:r>
+              <a:rPr lang="en-US" altLang="zh-CN">
+                <a:solidFill>
+                  <a:schemeClr val="accent6"/>
+                </a:solidFill>
+              </a:rPr>
+              <a:t>/</a:t>
+            </a:r>
+            <a:r>
+              <a:rPr lang="zh-CN" altLang="en-US">
+                <a:solidFill>
+                  <a:schemeClr val="accent6"/>
+                </a:solidFill>
+              </a:rPr>
+              <a:t>调试层面。</a:t>
+            </a:r>
+            <a:endParaRPr lang="zh-CN" altLang="en-US">
+              <a:solidFill>
+                <a:schemeClr val="accent6"/>
+              </a:solidFill>
+            </a:endParaRPr>
+          </a:p>
+          <a:p>
+            <a:pPr lvl="1"/>
+            <a:r>
+              <a:rPr lang="zh-CN" altLang="en-US">
+                <a:solidFill>
+                  <a:schemeClr val="accent6"/>
+                </a:solidFill>
+              </a:rPr>
+              <a:t>融为一体，知行合一。</a:t>
+            </a:r>
+            <a:endParaRPr lang="zh-CN" altLang="en-US">
+              <a:solidFill>
+                <a:schemeClr val="accent6"/>
+              </a:solidFill>
+            </a:endParaRPr>
+          </a:p>
+          <a:p>
+            <a:r>
+              <a:rPr lang="zh-CN" altLang="en-US">
+                <a:solidFill>
+                  <a:schemeClr val="accent6"/>
+                </a:solidFill>
+              </a:rPr>
+              <a:t>学习</a:t>
+            </a:r>
+            <a:endParaRPr lang="zh-CN" altLang="en-US">
+              <a:solidFill>
+                <a:schemeClr val="accent6"/>
+              </a:solidFill>
+            </a:endParaRPr>
+          </a:p>
+          <a:p>
+            <a:pPr lvl="1"/>
+            <a:r>
+              <a:rPr lang="zh-CN" altLang="en-US" sz="1800">
+                <a:solidFill>
+                  <a:schemeClr val="accent6"/>
+                </a:solidFill>
+              </a:rPr>
+              <a:t>实践：使用</a:t>
+            </a:r>
+            <a:r>
+              <a:rPr lang="en-US" altLang="zh-CN" sz="1800">
+                <a:solidFill>
+                  <a:schemeClr val="accent6"/>
+                </a:solidFill>
+              </a:rPr>
+              <a:t>Linux</a:t>
+            </a:r>
+            <a:r>
+              <a:rPr lang="zh-CN" altLang="en-US" sz="1800">
+                <a:solidFill>
+                  <a:schemeClr val="accent6"/>
+                </a:solidFill>
+              </a:rPr>
+              <a:t>（开源免费</a:t>
+            </a:r>
+            <a:r>
+              <a:rPr lang="en-US" altLang="zh-CN" sz="1800">
+                <a:solidFill>
+                  <a:schemeClr val="accent6"/>
+                </a:solidFill>
+              </a:rPr>
+              <a:t>/</a:t>
+            </a:r>
+            <a:r>
+              <a:rPr lang="zh-CN" altLang="en-US" sz="1800">
+                <a:solidFill>
+                  <a:schemeClr val="accent6"/>
+                </a:solidFill>
+              </a:rPr>
+              <a:t>覆盖面广</a:t>
+            </a:r>
+            <a:r>
+              <a:rPr lang="en-US" altLang="zh-CN" sz="1800">
+                <a:solidFill>
+                  <a:schemeClr val="accent6"/>
+                </a:solidFill>
+              </a:rPr>
+              <a:t>/</a:t>
+            </a:r>
+            <a:r>
+              <a:rPr lang="zh-CN" altLang="en-US" sz="1800">
+                <a:solidFill>
+                  <a:schemeClr val="accent6"/>
+                </a:solidFill>
+              </a:rPr>
+              <a:t>自主可控），</a:t>
+            </a:r>
+            <a:r>
+              <a:rPr lang="en-US" altLang="zh-CN" sz="1800">
+                <a:solidFill>
+                  <a:schemeClr val="accent6"/>
+                </a:solidFill>
+              </a:rPr>
+              <a:t>Linux</a:t>
+            </a:r>
+            <a:r>
+              <a:rPr lang="zh-CN" altLang="en-US" sz="1800">
+                <a:solidFill>
+                  <a:schemeClr val="accent6"/>
+                </a:solidFill>
+              </a:rPr>
+              <a:t>桌面融入生活工作学习，工作学习中实践</a:t>
             </a:r>
             <a:endParaRPr lang="zh-CN" altLang="en-US" sz="1800">
               <a:solidFill>
                 <a:schemeClr val="accent6"/>
               </a:solidFill>
             </a:endParaRPr>
+          </a:p>
+          <a:p>
+            <a:pPr lvl="1"/>
+            <a:r>
+              <a:rPr lang="zh-CN" altLang="en-US" sz="1800">
+                <a:solidFill>
+                  <a:schemeClr val="accent6"/>
+                </a:solidFill>
+              </a:rPr>
+              <a:t>理论：科普了解整体地图（</a:t>
+            </a:r>
+            <a:r>
+              <a:rPr lang="zh-CN" altLang="en-US">
+                <a:solidFill>
+                  <a:schemeClr val="accent6"/>
+                </a:solidFill>
+                <a:sym typeface="+mn-ea"/>
+              </a:rPr>
+              <a:t>引导思路</a:t>
+            </a:r>
+            <a:r>
+              <a:rPr lang="en-US" altLang="zh-CN">
+                <a:solidFill>
+                  <a:schemeClr val="accent6"/>
+                </a:solidFill>
+                <a:sym typeface="+mn-ea"/>
+              </a:rPr>
+              <a:t>/</a:t>
+            </a:r>
+            <a:r>
+              <a:rPr lang="zh-CN" altLang="en-US" sz="1800">
+                <a:solidFill>
+                  <a:schemeClr val="accent6"/>
+                </a:solidFill>
+              </a:rPr>
+              <a:t>开拓视野</a:t>
+            </a:r>
+            <a:r>
+              <a:rPr lang="en-US" altLang="zh-CN">
+                <a:solidFill>
+                  <a:schemeClr val="accent6"/>
+                </a:solidFill>
+                <a:sym typeface="+mn-ea"/>
+              </a:rPr>
+              <a:t>/</a:t>
+            </a:r>
+            <a:r>
+              <a:rPr lang="zh-CN" altLang="en-US">
+                <a:solidFill>
+                  <a:schemeClr val="accent6"/>
+                </a:solidFill>
+                <a:sym typeface="+mn-ea"/>
+              </a:rPr>
+              <a:t>总结整理</a:t>
+            </a:r>
+            <a:r>
+              <a:rPr lang="zh-CN" altLang="en-US" sz="1800">
+                <a:solidFill>
+                  <a:schemeClr val="accent6"/>
+                </a:solidFill>
+              </a:rPr>
+              <a:t>），为实践服务，能更有效地使用</a:t>
+            </a:r>
+            <a:r>
+              <a:rPr lang="en-US" altLang="zh-CN" sz="1800">
+                <a:solidFill>
+                  <a:schemeClr val="accent6"/>
+                </a:solidFill>
+              </a:rPr>
+              <a:t>AI</a:t>
+            </a:r>
+            <a:endParaRPr lang="zh-CN" altLang="en-US" sz="1800">
+              <a:solidFill>
+                <a:schemeClr val="accent6"/>
+              </a:solidFill>
+            </a:endParaRPr>
+          </a:p>
+          <a:p>
+            <a:pPr lvl="1"/>
+            <a:r>
+              <a:rPr lang="en-US" altLang="zh-CN">
+                <a:solidFill>
+                  <a:schemeClr val="accent6"/>
+                </a:solidFill>
+              </a:rPr>
+              <a:t>AI</a:t>
+            </a:r>
+            <a:r>
+              <a:rPr lang="zh-CN" altLang="en-US">
+                <a:solidFill>
+                  <a:schemeClr val="accent6"/>
+                </a:solidFill>
+              </a:rPr>
+              <a:t>：豆包（交互</a:t>
+            </a:r>
+            <a:r>
+              <a:rPr lang="en-US" altLang="zh-CN">
+                <a:solidFill>
+                  <a:schemeClr val="accent6"/>
+                </a:solidFill>
+              </a:rPr>
+              <a:t>/</a:t>
+            </a:r>
+            <a:r>
+              <a:rPr lang="zh-CN" altLang="en-US">
+                <a:solidFill>
+                  <a:schemeClr val="accent6"/>
+                </a:solidFill>
+              </a:rPr>
+              <a:t>灵活</a:t>
+            </a:r>
+            <a:r>
+              <a:rPr lang="en-US" altLang="zh-CN">
+                <a:solidFill>
+                  <a:schemeClr val="accent6"/>
+                </a:solidFill>
+              </a:rPr>
+              <a:t>/</a:t>
+            </a:r>
+            <a:r>
+              <a:rPr lang="zh-CN" altLang="en-US">
+                <a:solidFill>
+                  <a:schemeClr val="accent6"/>
+                </a:solidFill>
+              </a:rPr>
+              <a:t>忽悠），</a:t>
+            </a:r>
+            <a:r>
+              <a:rPr lang="en-US" altLang="zh-CN">
+                <a:solidFill>
+                  <a:schemeClr val="accent6"/>
+                </a:solidFill>
+              </a:rPr>
+              <a:t>DeepSeek</a:t>
+            </a:r>
+            <a:r>
+              <a:rPr lang="zh-CN" altLang="en-US">
+                <a:solidFill>
+                  <a:schemeClr val="accent6"/>
+                </a:solidFill>
+              </a:rPr>
+              <a:t>（界面</a:t>
+            </a:r>
+            <a:r>
+              <a:rPr lang="en-US" altLang="zh-CN">
+                <a:solidFill>
+                  <a:schemeClr val="accent6"/>
+                </a:solidFill>
+              </a:rPr>
+              <a:t>/</a:t>
+            </a:r>
+            <a:r>
+              <a:rPr lang="zh-CN" altLang="en-US">
+                <a:solidFill>
+                  <a:schemeClr val="accent6"/>
+                </a:solidFill>
+              </a:rPr>
+              <a:t>呆板</a:t>
+            </a:r>
+            <a:r>
+              <a:rPr lang="en-US" altLang="zh-CN">
+                <a:solidFill>
+                  <a:schemeClr val="accent6"/>
+                </a:solidFill>
+              </a:rPr>
+              <a:t>/</a:t>
+            </a:r>
+            <a:r>
+              <a:rPr lang="zh-CN" altLang="en-US">
+                <a:solidFill>
+                  <a:schemeClr val="accent6"/>
+                </a:solidFill>
+              </a:rPr>
+              <a:t>踏实），千问（</a:t>
+            </a:r>
+            <a:r>
+              <a:rPr lang="zh-CN" altLang="en-US">
+                <a:solidFill>
+                  <a:schemeClr val="accent6"/>
+                </a:solidFill>
+                <a:sym typeface="+mn-ea"/>
+              </a:rPr>
+              <a:t>互补</a:t>
+            </a:r>
+            <a:r>
+              <a:rPr lang="en-US" altLang="zh-CN">
+                <a:solidFill>
+                  <a:schemeClr val="accent6"/>
+                </a:solidFill>
+                <a:sym typeface="+mn-ea"/>
+              </a:rPr>
+              <a:t>DeepSeek/</a:t>
+            </a:r>
+            <a:r>
+              <a:rPr lang="zh-CN" altLang="en-US">
+                <a:solidFill>
+                  <a:schemeClr val="accent6"/>
+                </a:solidFill>
+              </a:rPr>
+              <a:t>呆板</a:t>
+            </a:r>
+            <a:r>
+              <a:rPr lang="en-US" altLang="zh-CN">
+                <a:solidFill>
+                  <a:schemeClr val="accent6"/>
+                </a:solidFill>
+              </a:rPr>
+              <a:t>/</a:t>
+            </a:r>
+            <a:r>
+              <a:rPr lang="zh-CN" altLang="en-US">
+                <a:solidFill>
+                  <a:schemeClr val="accent6"/>
+                </a:solidFill>
+              </a:rPr>
+              <a:t>踏实）</a:t>
+            </a:r>
+            <a:endParaRPr lang="zh-CN" altLang="en-US" sz="1620">
+              <a:solidFill>
+                <a:schemeClr val="accent6"/>
+              </a:solidFill>
+            </a:endParaRPr>
+          </a:p>
+        </p:txBody>
+      </p:sp>
+      <p:sp>
+        <p:nvSpPr>
+          <p:cNvPr id="4" name="Text Box 3"/>
+          <p:cNvSpPr txBox="1"/>
+          <p:nvPr/>
+        </p:nvSpPr>
+        <p:spPr>
+          <a:xfrm>
+            <a:off x="12666980" y="2277745"/>
+            <a:ext cx="309880" cy="368300"/>
+          </a:xfrm>
+          <a:prstGeom prst="rect">
+            <a:avLst/>
+          </a:prstGeom>
+          <a:noFill/>
+        </p:spPr>
+        <p:txBody>
+          <a:bodyPr wrap="none" rtlCol="0">
+            <a:spAutoFit/>
+          </a:bodyPr>
+          <a:p>
+            <a:endParaRPr lang="en-US"/>
           </a:p>
         </p:txBody>
       </p:sp>
@@ -4309,15 +10495,15 @@
                 </a:solidFill>
                 <a:sym typeface="+mn-ea"/>
               </a:rPr>
-              <a:t>运行时分析：</a:t>
-            </a:r>
-            <a:r>
-              <a:rPr lang="zh-CN" altLang="en-US">
-                <a:solidFill>
-                  <a:schemeClr val="accent6"/>
-                </a:solidFill>
-              </a:rPr>
-              <a:t>辅助示例</a:t>
+              <a:t>运行时分析：具体内容：</a:t>
+            </a:r>
+            <a:r>
+              <a:rPr lang="zh-CN" altLang="en-US">
+                <a:solidFill>
+                  <a:schemeClr val="accent6"/>
+                </a:solidFill>
+              </a:rPr>
+              <a:t>组件联调</a:t>
             </a:r>
             <a:endParaRPr lang="zh-CN" altLang="en-US">
               <a:solidFill>
@@ -4340,7 +10526,7 @@
         <p:spPr>
           <a:xfrm>
             <a:off x="647700" y="952500"/>
-            <a:ext cx="10515600" cy="5859780"/>
+            <a:ext cx="11292840" cy="5859780"/>
           </a:xfrm>
         </p:spPr>
         <p:txBody>
@@ -4352,24 +10538,16 @@
                   <a:schemeClr val="accent6"/>
                 </a:solidFill>
               </a:rPr>
-              <a:t>处理版本</a:t>
-            </a:r>
-            <a:endParaRPr lang="zh-CN" altLang="en-US">
-              <a:solidFill>
-                <a:schemeClr val="accent6"/>
-              </a:solidFill>
-            </a:endParaRPr>
-          </a:p>
-          <a:p>
-            <a:pPr lvl="1"/>
-            <a:r>
-              <a:rPr lang="zh-CN" altLang="en-US">
-                <a:solidFill>
-                  <a:schemeClr val="accent6"/>
-                </a:solidFill>
-              </a:rPr>
-              <a:t>切换分支比对(分布式软总线为例)</a:t>
-            </a:r>
+              <a:t>概要描述</a:t>
+            </a:r>
+            <a:endParaRPr lang="zh-CN" altLang="en-US">
+              <a:solidFill>
+                <a:schemeClr val="accent6"/>
+              </a:solidFill>
+            </a:endParaRPr>
+          </a:p>
+          <a:p>
+            <a:pPr lvl="1"/>
             <a:endParaRPr lang="zh-CN" altLang="en-US" sz="1800">
               <a:solidFill>
                 <a:schemeClr val="accent6"/>
@@ -4378,60 +10556,219 @@
           </a:p>
           <a:p>
             <a:pPr lvl="1"/>
-            <a:r>
-              <a:rPr lang="zh-CN" altLang="en-US">
-                <a:solidFill>
-                  <a:schemeClr val="accent6"/>
-                </a:solidFill>
-              </a:rPr>
-              <a:t>整体信息统计</a:t>
-            </a:r>
+            <a:endParaRPr lang="zh-CN" altLang="en-US">
+              <a:solidFill>
+                <a:schemeClr val="accent6"/>
+              </a:solidFill>
+            </a:endParaRPr>
+          </a:p>
+          <a:p>
+            <a:pPr lvl="1"/>
+            <a:endParaRPr lang="zh-CN" altLang="en-US">
+              <a:solidFill>
+                <a:schemeClr val="accent6"/>
+              </a:solidFill>
+            </a:endParaRPr>
+          </a:p>
+          <a:p>
+            <a:r>
+              <a:rPr lang="zh-CN" altLang="en-US">
+                <a:solidFill>
+                  <a:schemeClr val="accent6"/>
+                </a:solidFill>
+              </a:rPr>
+              <a:t>处理方法</a:t>
+            </a:r>
+            <a:endParaRPr lang="zh-CN" altLang="en-US">
+              <a:solidFill>
+                <a:schemeClr val="accent6"/>
+              </a:solidFill>
+            </a:endParaRPr>
+          </a:p>
+          <a:p>
+            <a:pPr lvl="1"/>
+            <a:endParaRPr lang="zh-CN" altLang="en-US">
+              <a:solidFill>
+                <a:schemeClr val="accent6"/>
+              </a:solidFill>
+              <a:sym typeface="+mn-ea"/>
+            </a:endParaRPr>
+          </a:p>
+          <a:p>
+            <a:pPr lvl="1"/>
+            <a:endParaRPr lang="zh-CN" altLang="en-US">
+              <a:solidFill>
+                <a:schemeClr val="accent6"/>
+              </a:solidFill>
+              <a:sym typeface="+mn-ea"/>
+            </a:endParaRPr>
+          </a:p>
+          <a:p>
+            <a:pPr lvl="1"/>
+            <a:endParaRPr lang="zh-CN" altLang="en-US">
+              <a:solidFill>
+                <a:schemeClr val="accent6"/>
+              </a:solidFill>
+              <a:sym typeface="+mn-ea"/>
+            </a:endParaRPr>
+          </a:p>
+          <a:p>
+            <a:pPr lvl="1"/>
+            <a:endParaRPr lang="zh-CN" altLang="en-US">
+              <a:solidFill>
+                <a:schemeClr val="accent6"/>
+              </a:solidFill>
+            </a:endParaRPr>
+          </a:p>
+          <a:p>
+            <a:r>
+              <a:rPr lang="zh-CN" altLang="en-US">
+                <a:solidFill>
+                  <a:schemeClr val="accent6"/>
+                </a:solidFill>
+              </a:rPr>
+              <a:t>核心难点</a:t>
+            </a:r>
+            <a:endParaRPr lang="zh-CN" altLang="en-US">
+              <a:solidFill>
+                <a:schemeClr val="accent6"/>
+              </a:solidFill>
+            </a:endParaRPr>
+          </a:p>
+          <a:p>
+            <a:pPr marL="0" indent="0">
+              <a:buNone/>
+            </a:pPr>
             <a:endParaRPr lang="zh-CN" altLang="en-US" sz="1800">
               <a:solidFill>
                 <a:schemeClr val="accent6"/>
               </a:solidFill>
             </a:endParaRPr>
           </a:p>
-          <a:p>
-            <a:pPr lvl="1"/>
-            <a:r>
-              <a:rPr lang="zh-CN" altLang="en-US">
-                <a:solidFill>
-                  <a:schemeClr val="accent6"/>
-                </a:solidFill>
-              </a:rPr>
-              <a:t>切分补丁/阅读补丁/内容查找(更改确认)</a:t>
-            </a:r>
-            <a:endParaRPr lang="zh-CN" altLang="en-US">
-              <a:solidFill>
-                <a:schemeClr val="accent6"/>
-              </a:solidFill>
-            </a:endParaRPr>
-          </a:p>
-          <a:p>
-            <a:r>
-              <a:rPr lang="zh-CN" altLang="en-US">
-                <a:solidFill>
-                  <a:schemeClr val="accent6"/>
-                </a:solidFill>
-              </a:rPr>
-              <a:t>细化调试</a:t>
-            </a:r>
-            <a:endParaRPr lang="zh-CN" altLang="en-US">
-              <a:solidFill>
-                <a:schemeClr val="accent6"/>
-              </a:solidFill>
-            </a:endParaRPr>
-          </a:p>
-          <a:p>
-            <a:pPr lvl="1"/>
-            <a:r>
-              <a:rPr lang="zh-CN" altLang="en-US">
-                <a:solidFill>
-                  <a:schemeClr val="accent6"/>
-                </a:solidFill>
-              </a:rPr>
-              <a:t>汇编和源码对应</a:t>
+        </p:txBody>
+      </p:sp>
+    </p:spTree>
+  </p:cSld>
+  <p:clrMapOvr>
+    <a:masterClrMapping/>
+  </p:clrMapOvr>
+</p:sld>
+</file>
+
+<file path=ppt/slides/slide7.xml><?xml version="1.0" encoding="utf-8"?>
+<p:sld xmlns:a="http://schemas.openxmlformats.org/drawingml/2006/main" xmlns:r="http://schemas.openxmlformats.org/officeDocument/2006/relationships" xmlns:p="http://schemas.openxmlformats.org/presentationml/2006/main">
+  <p:cSld>
+    <p:bg>
+      <p:bgPr>
+        <a:solidFill>
+          <a:schemeClr val="tx1"/>
+        </a:solidFill>
+        <a:effectLst/>
+      </p:bgPr>
+    </p:bg>
+    <p:spTree>
+      <p:nvGrpSpPr>
+        <p:cNvPr id="1" name=""/>
+        <p:cNvGrpSpPr/>
+        <p:nvPr/>
+      </p:nvGrpSpPr>
+      <p:grpSpPr/>
+      <p:sp>
+        <p:nvSpPr>
+          <p:cNvPr id="2" name="Title 1"/>
+          <p:cNvSpPr>
+            <a:spLocks noGrp="1"/>
+          </p:cNvSpPr>
+          <p:nvPr>
+            <p:ph type="title"/>
+          </p:nvPr>
+        </p:nvSpPr>
+        <p:spPr>
+          <a:xfrm>
+            <a:off x="647700" y="146685"/>
+            <a:ext cx="10515600" cy="604520"/>
+          </a:xfrm>
+        </p:spPr>
+        <p:txBody>
+          <a:bodyPr/>
+          <a:p>
+            <a:pPr algn="ctr"/>
+            <a:r>
+              <a:rPr lang="zh-CN" altLang="en-US">
+                <a:solidFill>
+                  <a:schemeClr val="accent6"/>
+                </a:solidFill>
+                <a:sym typeface="+mn-ea"/>
+              </a:rPr>
+              <a:t>运行时分析：具体内容：</a:t>
+            </a:r>
+            <a:r>
+              <a:rPr lang="zh-CN" altLang="en-US">
+                <a:solidFill>
+                  <a:schemeClr val="accent6"/>
+                </a:solidFill>
+              </a:rPr>
+              <a:t>组件联调</a:t>
+            </a:r>
+            <a:endParaRPr lang="zh-CN" altLang="en-US">
+              <a:solidFill>
+                <a:schemeClr val="accent6"/>
+              </a:solidFill>
+            </a:endParaRPr>
+          </a:p>
+        </p:txBody>
+      </p:sp>
+      <p:sp>
+        <p:nvSpPr>
+          <p:cNvPr id="3" name="Content Placeholder 2"/>
+          <p:cNvSpPr>
+            <a:spLocks noGrp="1"/>
+          </p:cNvSpPr>
+          <p:nvPr>
+            <p:ph idx="1"/>
+          </p:nvPr>
+        </p:nvSpPr>
+        <p:spPr>
+          <a:xfrm>
+            <a:off x="647700" y="952500"/>
+            <a:ext cx="11292840" cy="5859780"/>
+          </a:xfrm>
+        </p:spPr>
+        <p:txBody>
+          <a:bodyPr/>
+          <a:p>
+            <a:r>
+              <a:rPr lang="zh-CN" altLang="en-US">
+                <a:solidFill>
+                  <a:schemeClr val="accent6"/>
+                </a:solidFill>
+              </a:rPr>
+              <a:t>概要描述</a:t>
+            </a:r>
+            <a:endParaRPr lang="zh-CN" altLang="en-US">
+              <a:solidFill>
+                <a:schemeClr val="accent6"/>
+              </a:solidFill>
+            </a:endParaRPr>
+          </a:p>
+          <a:p>
+            <a:pPr lvl="1"/>
+            <a:r>
+              <a:rPr lang="zh-CN" altLang="en-US" sz="1800">
+                <a:solidFill>
+                  <a:schemeClr val="accent6"/>
+                </a:solidFill>
+              </a:rPr>
+              <a:t>使得各相关组件整体能够完整配合，成功运行起来；</a:t>
+            </a:r>
+            <a:r>
+              <a:rPr lang="zh-CN" altLang="en-US">
+                <a:solidFill>
+                  <a:schemeClr val="accent6"/>
+                </a:solidFill>
+                <a:sym typeface="+mn-ea"/>
+              </a:rPr>
+              <a:t>涉及多个组件，一般需要多方人员配合处理</a:t>
             </a:r>
             <a:endParaRPr lang="zh-CN" altLang="en-US" sz="1800">
               <a:solidFill>
@@ -4447,54 +10784,332 @@
                   <a:schemeClr val="accent6"/>
                 </a:solidFill>
               </a:rPr>
-              <a:t>配合设计和实现的运行时数据流程确认</a:t>
-            </a:r>
+              <a:t>需求目的：实现整体需求功能（可能存在各类</a:t>
+            </a:r>
+            <a:r>
+              <a:rPr lang="en-US" altLang="zh-CN">
+                <a:solidFill>
+                  <a:schemeClr val="accent6"/>
+                </a:solidFill>
+              </a:rPr>
+              <a:t>bug</a:t>
+            </a:r>
+            <a:r>
+              <a:rPr lang="zh-CN" altLang="en-US">
+                <a:solidFill>
+                  <a:schemeClr val="accent6"/>
+                </a:solidFill>
+              </a:rPr>
+              <a:t>），主体流程和数据流形成功能闭环</a:t>
+            </a:r>
+            <a:endParaRPr lang="zh-CN" altLang="en-US">
+              <a:solidFill>
+                <a:schemeClr val="accent6"/>
+              </a:solidFill>
+            </a:endParaRPr>
+          </a:p>
+          <a:p>
+            <a:pPr lvl="1"/>
+            <a:r>
+              <a:rPr lang="zh-CN" altLang="en-US">
+                <a:solidFill>
+                  <a:schemeClr val="accent6"/>
+                </a:solidFill>
+              </a:rPr>
+              <a:t>基础资源：必备（各相关组件可支持联调</a:t>
+            </a:r>
+            <a:r>
+              <a:rPr lang="en-US" altLang="zh-CN">
+                <a:solidFill>
+                  <a:schemeClr val="accent6"/>
+                </a:solidFill>
+              </a:rPr>
+              <a:t>/</a:t>
+            </a:r>
+            <a:r>
+              <a:rPr lang="zh-CN" altLang="en-US">
+                <a:solidFill>
+                  <a:schemeClr val="accent6"/>
+                </a:solidFill>
+              </a:rPr>
+              <a:t>有运行环境），可选（</a:t>
+            </a:r>
+            <a:r>
+              <a:rPr lang="zh-CN" altLang="en-US">
+                <a:solidFill>
+                  <a:schemeClr val="accent6"/>
+                </a:solidFill>
+                <a:sym typeface="+mn-ea"/>
+              </a:rPr>
+              <a:t>厂商或相关人员配合</a:t>
+            </a:r>
+            <a:r>
+              <a:rPr lang="en-US" altLang="zh-CN">
+                <a:solidFill>
+                  <a:schemeClr val="accent6"/>
+                </a:solidFill>
+                <a:sym typeface="+mn-ea"/>
+              </a:rPr>
+              <a:t>/</a:t>
+            </a:r>
+            <a:r>
+              <a:rPr lang="zh-CN" altLang="en-US">
+                <a:solidFill>
+                  <a:schemeClr val="accent6"/>
+                </a:solidFill>
+                <a:sym typeface="+mn-ea"/>
+              </a:rPr>
+              <a:t>文档</a:t>
+            </a:r>
+            <a:r>
+              <a:rPr lang="en-US" altLang="zh-CN">
+                <a:solidFill>
+                  <a:schemeClr val="accent6"/>
+                </a:solidFill>
+                <a:sym typeface="+mn-ea"/>
+              </a:rPr>
+              <a:t>/</a:t>
+            </a:r>
+            <a:r>
+              <a:rPr lang="zh-CN" altLang="en-US">
+                <a:solidFill>
+                  <a:schemeClr val="accent6"/>
+                </a:solidFill>
+                <a:sym typeface="+mn-ea"/>
+              </a:rPr>
+              <a:t>源码</a:t>
+            </a:r>
+            <a:r>
+              <a:rPr lang="en-US" altLang="zh-CN">
+                <a:solidFill>
+                  <a:schemeClr val="accent6"/>
+                </a:solidFill>
+                <a:sym typeface="+mn-ea"/>
+              </a:rPr>
+              <a:t>/</a:t>
+            </a:r>
+            <a:r>
+              <a:rPr lang="zh-CN" altLang="en-US">
+                <a:solidFill>
+                  <a:schemeClr val="accent6"/>
+                </a:solidFill>
+                <a:sym typeface="+mn-ea"/>
+              </a:rPr>
+              <a:t>反汇编</a:t>
+            </a:r>
+            <a:r>
+              <a:rPr lang="zh-CN" altLang="en-US">
+                <a:solidFill>
+                  <a:schemeClr val="accent6"/>
+                </a:solidFill>
+              </a:rPr>
+              <a:t>）</a:t>
+            </a:r>
+            <a:endParaRPr lang="zh-CN" altLang="en-US">
+              <a:solidFill>
+                <a:schemeClr val="accent6"/>
+              </a:solidFill>
+            </a:endParaRPr>
+          </a:p>
+          <a:p>
+            <a:r>
+              <a:rPr lang="zh-CN" altLang="en-US">
+                <a:solidFill>
+                  <a:schemeClr val="accent6"/>
+                </a:solidFill>
+              </a:rPr>
+              <a:t>处理方法</a:t>
+            </a:r>
+            <a:endParaRPr lang="zh-CN" altLang="en-US">
+              <a:solidFill>
+                <a:schemeClr val="accent6"/>
+              </a:solidFill>
+            </a:endParaRPr>
+          </a:p>
+          <a:p>
+            <a:pPr lvl="1"/>
+            <a:endParaRPr lang="zh-CN" altLang="en-US">
+              <a:solidFill>
+                <a:schemeClr val="accent6"/>
+              </a:solidFill>
+              <a:sym typeface="+mn-ea"/>
+            </a:endParaRPr>
+          </a:p>
+          <a:p>
+            <a:pPr lvl="1"/>
+            <a:endParaRPr lang="zh-CN" altLang="en-US">
+              <a:solidFill>
+                <a:schemeClr val="accent6"/>
+              </a:solidFill>
+              <a:sym typeface="+mn-ea"/>
+            </a:endParaRPr>
+          </a:p>
+          <a:p>
+            <a:pPr lvl="1"/>
+            <a:endParaRPr lang="zh-CN" altLang="en-US">
+              <a:solidFill>
+                <a:schemeClr val="accent6"/>
+              </a:solidFill>
+              <a:sym typeface="+mn-ea"/>
+            </a:endParaRPr>
+          </a:p>
+          <a:p>
+            <a:pPr lvl="1"/>
+            <a:endParaRPr lang="zh-CN" altLang="en-US">
+              <a:solidFill>
+                <a:schemeClr val="accent6"/>
+              </a:solidFill>
+            </a:endParaRPr>
+          </a:p>
+          <a:p>
+            <a:r>
+              <a:rPr lang="zh-CN" altLang="en-US">
+                <a:solidFill>
+                  <a:schemeClr val="accent6"/>
+                </a:solidFill>
+              </a:rPr>
+              <a:t>核心难点</a:t>
+            </a:r>
+            <a:endParaRPr lang="zh-CN" altLang="en-US">
+              <a:solidFill>
+                <a:schemeClr val="accent6"/>
+              </a:solidFill>
+            </a:endParaRPr>
+          </a:p>
+          <a:p>
+            <a:pPr marL="0" indent="0">
+              <a:buNone/>
+            </a:pPr>
             <a:endParaRPr lang="zh-CN" altLang="en-US" sz="1800">
               <a:solidFill>
                 <a:schemeClr val="accent6"/>
               </a:solidFill>
             </a:endParaRPr>
           </a:p>
-          <a:p>
-            <a:pPr lvl="1"/>
-            <a:r>
-              <a:rPr lang="zh-CN" altLang="en-US">
-                <a:solidFill>
-                  <a:schemeClr val="accent6"/>
-                </a:solidFill>
-              </a:rPr>
-              <a:t>运行时实际加载(尤其是瞬间处理并释放资源/firefox)</a:t>
-            </a:r>
-            <a:endParaRPr lang="zh-CN" altLang="en-US">
-              <a:solidFill>
-                <a:schemeClr val="accent6"/>
-              </a:solidFill>
-            </a:endParaRPr>
-          </a:p>
-          <a:p>
-            <a:r>
-              <a:rPr lang="zh-CN" altLang="en-US">
-                <a:solidFill>
-                  <a:schemeClr val="accent6"/>
-                </a:solidFill>
-              </a:rPr>
-              <a:t>阅读代码</a:t>
-            </a:r>
-            <a:endParaRPr lang="zh-CN" altLang="en-US">
-              <a:solidFill>
-                <a:schemeClr val="accent6"/>
-              </a:solidFill>
-            </a:endParaRPr>
-          </a:p>
-          <a:p>
-            <a:pPr lvl="1"/>
-            <a:r>
-              <a:rPr lang="zh-CN" altLang="en-US">
-                <a:solidFill>
-                  <a:schemeClr val="accent6"/>
-                </a:solidFill>
-              </a:rPr>
-              <a:t>整体源码阅读(flatpak为例)</a:t>
+        </p:txBody>
+      </p:sp>
+    </p:spTree>
+  </p:cSld>
+  <p:clrMapOvr>
+    <a:masterClrMapping/>
+  </p:clrMapOvr>
+</p:sld>
+</file>
+
+<file path=ppt/slides/slide8.xml><?xml version="1.0" encoding="utf-8"?>
+<p:sld xmlns:a="http://schemas.openxmlformats.org/drawingml/2006/main" xmlns:r="http://schemas.openxmlformats.org/officeDocument/2006/relationships" xmlns:p="http://schemas.openxmlformats.org/presentationml/2006/main">
+  <p:cSld>
+    <p:bg>
+      <p:bgPr>
+        <a:solidFill>
+          <a:schemeClr val="tx1"/>
+        </a:solidFill>
+        <a:effectLst/>
+      </p:bgPr>
+    </p:bg>
+    <p:spTree>
+      <p:nvGrpSpPr>
+        <p:cNvPr id="1" name=""/>
+        <p:cNvGrpSpPr/>
+        <p:nvPr/>
+      </p:nvGrpSpPr>
+      <p:grpSpPr/>
+      <p:sp>
+        <p:nvSpPr>
+          <p:cNvPr id="2" name="Title 1"/>
+          <p:cNvSpPr>
+            <a:spLocks noGrp="1"/>
+          </p:cNvSpPr>
+          <p:nvPr>
+            <p:ph type="title"/>
+          </p:nvPr>
+        </p:nvSpPr>
+        <p:spPr>
+          <a:xfrm>
+            <a:off x="647700" y="146685"/>
+            <a:ext cx="10515600" cy="604520"/>
+          </a:xfrm>
+        </p:spPr>
+        <p:txBody>
+          <a:bodyPr/>
+          <a:p>
+            <a:pPr algn="ctr"/>
+            <a:r>
+              <a:rPr lang="zh-CN" altLang="en-US">
+                <a:solidFill>
+                  <a:schemeClr val="accent6"/>
+                </a:solidFill>
+                <a:sym typeface="+mn-ea"/>
+              </a:rPr>
+              <a:t>运行时分析：具体内容：</a:t>
+            </a:r>
+            <a:r>
+              <a:rPr lang="zh-CN" altLang="en-US">
+                <a:solidFill>
+                  <a:schemeClr val="accent6"/>
+                </a:solidFill>
+              </a:rPr>
+              <a:t>组件联调</a:t>
+            </a:r>
+            <a:endParaRPr lang="zh-CN" altLang="en-US">
+              <a:solidFill>
+                <a:schemeClr val="accent6"/>
+              </a:solidFill>
+            </a:endParaRPr>
+          </a:p>
+        </p:txBody>
+      </p:sp>
+      <p:sp>
+        <p:nvSpPr>
+          <p:cNvPr id="3" name="Content Placeholder 2"/>
+          <p:cNvSpPr>
+            <a:spLocks noGrp="1"/>
+          </p:cNvSpPr>
+          <p:nvPr>
+            <p:ph idx="1"/>
+          </p:nvPr>
+        </p:nvSpPr>
+        <p:spPr>
+          <a:xfrm>
+            <a:off x="647700" y="952500"/>
+            <a:ext cx="11292840" cy="5859780"/>
+          </a:xfrm>
+        </p:spPr>
+        <p:txBody>
+          <a:bodyPr/>
+          <a:p>
+            <a:r>
+              <a:rPr lang="zh-CN" altLang="en-US">
+                <a:solidFill>
+                  <a:schemeClr val="accent6"/>
+                </a:solidFill>
+              </a:rPr>
+              <a:t>概要描述</a:t>
+            </a:r>
+            <a:endParaRPr lang="zh-CN" altLang="en-US">
+              <a:solidFill>
+                <a:schemeClr val="accent6"/>
+              </a:solidFill>
+            </a:endParaRPr>
+          </a:p>
+          <a:p>
+            <a:pPr lvl="1"/>
+            <a:r>
+              <a:rPr lang="zh-CN" altLang="en-US" sz="1800">
+                <a:solidFill>
+                  <a:schemeClr val="accent6"/>
+                </a:solidFill>
+              </a:rPr>
+              <a:t>使得各相关组件整体能够完整配合，成功运行起来；</a:t>
+            </a:r>
+            <a:r>
+              <a:rPr lang="zh-CN" altLang="en-US">
+                <a:solidFill>
+                  <a:schemeClr val="accent6"/>
+                </a:solidFill>
+                <a:sym typeface="+mn-ea"/>
+              </a:rPr>
+              <a:t>涉及多个组件，一般需要多方人员配合处理</a:t>
             </a:r>
             <a:endParaRPr lang="zh-CN" altLang="en-US" sz="1800">
               <a:solidFill>
@@ -4510,24 +11125,1356 @@
                   <a:schemeClr val="accent6"/>
                 </a:solidFill>
               </a:rPr>
-              <a:t>辅助工具/作者思路/整体整理</a:t>
-            </a:r>
+              <a:t>需求目的：实现整体需求功能（可能存在各类</a:t>
+            </a:r>
+            <a:r>
+              <a:rPr lang="en-US" altLang="zh-CN">
+                <a:solidFill>
+                  <a:schemeClr val="accent6"/>
+                </a:solidFill>
+              </a:rPr>
+              <a:t>bug</a:t>
+            </a:r>
+            <a:r>
+              <a:rPr lang="zh-CN" altLang="en-US">
+                <a:solidFill>
+                  <a:schemeClr val="accent6"/>
+                </a:solidFill>
+              </a:rPr>
+              <a:t>），主体流程和数据流形成功能闭环</a:t>
+            </a:r>
+            <a:endParaRPr lang="zh-CN" altLang="en-US">
+              <a:solidFill>
+                <a:schemeClr val="accent6"/>
+              </a:solidFill>
+            </a:endParaRPr>
+          </a:p>
+          <a:p>
+            <a:pPr lvl="1"/>
+            <a:r>
+              <a:rPr lang="zh-CN" altLang="en-US">
+                <a:solidFill>
+                  <a:schemeClr val="accent6"/>
+                </a:solidFill>
+              </a:rPr>
+              <a:t>基础资源：必备（各相关组件可支持联调</a:t>
+            </a:r>
+            <a:r>
+              <a:rPr lang="en-US" altLang="zh-CN">
+                <a:solidFill>
+                  <a:schemeClr val="accent6"/>
+                </a:solidFill>
+              </a:rPr>
+              <a:t>/</a:t>
+            </a:r>
+            <a:r>
+              <a:rPr lang="zh-CN" altLang="en-US">
+                <a:solidFill>
+                  <a:schemeClr val="accent6"/>
+                </a:solidFill>
+              </a:rPr>
+              <a:t>有运行环境），可选（</a:t>
+            </a:r>
+            <a:r>
+              <a:rPr lang="zh-CN" altLang="en-US">
+                <a:solidFill>
+                  <a:schemeClr val="accent6"/>
+                </a:solidFill>
+                <a:sym typeface="+mn-ea"/>
+              </a:rPr>
+              <a:t>厂商或相关人员配合</a:t>
+            </a:r>
+            <a:r>
+              <a:rPr lang="en-US" altLang="zh-CN">
+                <a:solidFill>
+                  <a:schemeClr val="accent6"/>
+                </a:solidFill>
+                <a:sym typeface="+mn-ea"/>
+              </a:rPr>
+              <a:t>/</a:t>
+            </a:r>
+            <a:r>
+              <a:rPr lang="zh-CN" altLang="en-US">
+                <a:solidFill>
+                  <a:schemeClr val="accent6"/>
+                </a:solidFill>
+                <a:sym typeface="+mn-ea"/>
+              </a:rPr>
+              <a:t>文档</a:t>
+            </a:r>
+            <a:r>
+              <a:rPr lang="en-US" altLang="zh-CN">
+                <a:solidFill>
+                  <a:schemeClr val="accent6"/>
+                </a:solidFill>
+                <a:sym typeface="+mn-ea"/>
+              </a:rPr>
+              <a:t>/</a:t>
+            </a:r>
+            <a:r>
+              <a:rPr lang="zh-CN" altLang="en-US">
+                <a:solidFill>
+                  <a:schemeClr val="accent6"/>
+                </a:solidFill>
+                <a:sym typeface="+mn-ea"/>
+              </a:rPr>
+              <a:t>源码</a:t>
+            </a:r>
+            <a:r>
+              <a:rPr lang="en-US" altLang="zh-CN">
+                <a:solidFill>
+                  <a:schemeClr val="accent6"/>
+                </a:solidFill>
+                <a:sym typeface="+mn-ea"/>
+              </a:rPr>
+              <a:t>/</a:t>
+            </a:r>
+            <a:r>
+              <a:rPr lang="zh-CN" altLang="en-US">
+                <a:solidFill>
+                  <a:schemeClr val="accent6"/>
+                </a:solidFill>
+                <a:sym typeface="+mn-ea"/>
+              </a:rPr>
+              <a:t>反汇编</a:t>
+            </a:r>
+            <a:r>
+              <a:rPr lang="zh-CN" altLang="en-US">
+                <a:solidFill>
+                  <a:schemeClr val="accent6"/>
+                </a:solidFill>
+              </a:rPr>
+              <a:t>）</a:t>
+            </a:r>
+            <a:endParaRPr lang="zh-CN" altLang="en-US">
+              <a:solidFill>
+                <a:schemeClr val="accent6"/>
+              </a:solidFill>
+            </a:endParaRPr>
+          </a:p>
+          <a:p>
+            <a:r>
+              <a:rPr lang="zh-CN" altLang="en-US">
+                <a:solidFill>
+                  <a:schemeClr val="accent6"/>
+                </a:solidFill>
+              </a:rPr>
+              <a:t>处理方法</a:t>
+            </a:r>
+            <a:endParaRPr lang="zh-CN" altLang="en-US">
+              <a:solidFill>
+                <a:schemeClr val="accent6"/>
+              </a:solidFill>
+            </a:endParaRPr>
+          </a:p>
+          <a:p>
+            <a:pPr lvl="1"/>
+            <a:r>
+              <a:rPr lang="zh-CN" altLang="en-US">
+                <a:solidFill>
+                  <a:schemeClr val="accent6"/>
+                </a:solidFill>
+                <a:sym typeface="+mn-ea"/>
+              </a:rPr>
+              <a:t>整体设计：了解整体结构</a:t>
+            </a:r>
+            <a:r>
+              <a:rPr lang="en-US" altLang="zh-CN">
+                <a:solidFill>
+                  <a:schemeClr val="accent6"/>
+                </a:solidFill>
+                <a:sym typeface="+mn-ea"/>
+              </a:rPr>
+              <a:t>/</a:t>
+            </a:r>
+            <a:r>
+              <a:rPr lang="zh-CN" altLang="en-US">
+                <a:solidFill>
+                  <a:schemeClr val="accent6"/>
+                </a:solidFill>
+                <a:sym typeface="+mn-ea"/>
+              </a:rPr>
+              <a:t>整体测试和使用，整体</a:t>
+            </a:r>
+            <a:r>
+              <a:rPr lang="zh-CN" altLang="en-US">
+                <a:solidFill>
+                  <a:schemeClr val="accent6"/>
+                </a:solidFill>
+                <a:sym typeface="+mn-ea"/>
+              </a:rPr>
+              <a:t>监控</a:t>
+            </a:r>
+            <a:r>
+              <a:rPr lang="en-US" altLang="zh-CN">
+                <a:solidFill>
+                  <a:schemeClr val="accent6"/>
+                </a:solidFill>
+                <a:sym typeface="+mn-ea"/>
+              </a:rPr>
+              <a:t>/</a:t>
+            </a:r>
+            <a:r>
+              <a:rPr lang="zh-CN" altLang="en-US">
+                <a:solidFill>
+                  <a:schemeClr val="accent6"/>
+                </a:solidFill>
+                <a:sym typeface="+mn-ea"/>
+              </a:rPr>
+              <a:t>各类单元测试</a:t>
+            </a:r>
+            <a:r>
+              <a:rPr lang="en-US" altLang="zh-CN">
+                <a:solidFill>
+                  <a:schemeClr val="accent6"/>
+                </a:solidFill>
+                <a:sym typeface="+mn-ea"/>
+              </a:rPr>
+              <a:t>/</a:t>
+            </a:r>
+            <a:r>
+              <a:rPr lang="zh-CN" altLang="en-US">
+                <a:solidFill>
+                  <a:schemeClr val="accent6"/>
+                </a:solidFill>
+                <a:sym typeface="+mn-ea"/>
+              </a:rPr>
+              <a:t>问题拆分，看文档</a:t>
+            </a:r>
+            <a:r>
+              <a:rPr lang="en-US" altLang="zh-CN">
+                <a:solidFill>
+                  <a:schemeClr val="accent6"/>
+                </a:solidFill>
+                <a:sym typeface="+mn-ea"/>
+              </a:rPr>
+              <a:t>/</a:t>
+            </a:r>
+            <a:r>
+              <a:rPr lang="zh-CN" altLang="en-US">
+                <a:solidFill>
+                  <a:schemeClr val="accent6"/>
+                </a:solidFill>
+                <a:sym typeface="+mn-ea"/>
+              </a:rPr>
+              <a:t>总结整理</a:t>
+            </a:r>
+            <a:endParaRPr lang="zh-CN" altLang="en-US">
+              <a:solidFill>
+                <a:schemeClr val="accent6"/>
+              </a:solidFill>
+              <a:sym typeface="+mn-ea"/>
+            </a:endParaRPr>
+          </a:p>
+          <a:p>
+            <a:pPr lvl="1"/>
+            <a:r>
+              <a:rPr lang="zh-CN" altLang="en-US">
+                <a:solidFill>
+                  <a:schemeClr val="accent6"/>
+                </a:solidFill>
+                <a:sym typeface="+mn-ea"/>
+              </a:rPr>
+              <a:t>静态开发：</a:t>
+            </a:r>
+            <a:r>
+              <a:rPr lang="zh-CN" altLang="en-US">
+                <a:solidFill>
+                  <a:schemeClr val="accent6"/>
+                </a:solidFill>
+                <a:sym typeface="+mn-ea"/>
+              </a:rPr>
+              <a:t>阅读相关源码（软硬件）</a:t>
+            </a:r>
+            <a:r>
+              <a:rPr lang="en-US" altLang="zh-CN">
+                <a:solidFill>
+                  <a:schemeClr val="accent6"/>
+                </a:solidFill>
+                <a:sym typeface="+mn-ea"/>
+              </a:rPr>
+              <a:t>/</a:t>
+            </a:r>
+            <a:r>
+              <a:rPr lang="zh-CN" altLang="en-US">
+                <a:solidFill>
+                  <a:schemeClr val="accent6"/>
+                </a:solidFill>
+                <a:sym typeface="+mn-ea"/>
+              </a:rPr>
+              <a:t>反汇编（布线板）</a:t>
+            </a:r>
+            <a:r>
+              <a:rPr lang="en-US" altLang="zh-CN">
+                <a:solidFill>
+                  <a:schemeClr val="accent6"/>
+                </a:solidFill>
+                <a:sym typeface="+mn-ea"/>
+              </a:rPr>
+              <a:t>/</a:t>
+            </a:r>
+            <a:r>
+              <a:rPr lang="zh-CN" altLang="en-US">
+                <a:solidFill>
+                  <a:schemeClr val="accent6"/>
+                </a:solidFill>
+                <a:sym typeface="+mn-ea"/>
+              </a:rPr>
+              <a:t>版本补丁，为整体设计和动态调试提供支撑</a:t>
+            </a:r>
+            <a:endParaRPr lang="zh-CN" altLang="en-US">
+              <a:solidFill>
+                <a:schemeClr val="accent6"/>
+              </a:solidFill>
+              <a:sym typeface="+mn-ea"/>
+            </a:endParaRPr>
+          </a:p>
+          <a:p>
+            <a:pPr lvl="1"/>
+            <a:r>
+              <a:rPr lang="zh-CN" altLang="en-US">
+                <a:solidFill>
+                  <a:schemeClr val="accent6"/>
+                </a:solidFill>
+                <a:sym typeface="+mn-ea"/>
+              </a:rPr>
+              <a:t>动态调试：</a:t>
+            </a:r>
+            <a:r>
+              <a:rPr lang="zh-CN" altLang="en-US">
+                <a:solidFill>
+                  <a:schemeClr val="accent6"/>
+                </a:solidFill>
+                <a:sym typeface="+mn-ea"/>
+              </a:rPr>
+              <a:t>调试源码</a:t>
+            </a:r>
+            <a:r>
+              <a:rPr lang="en-US" altLang="zh-CN">
+                <a:solidFill>
+                  <a:schemeClr val="accent6"/>
+                </a:solidFill>
+                <a:sym typeface="+mn-ea"/>
+              </a:rPr>
+              <a:t>/</a:t>
+            </a:r>
+            <a:r>
+              <a:rPr lang="zh-CN" altLang="en-US">
+                <a:solidFill>
+                  <a:schemeClr val="accent6"/>
+                </a:solidFill>
+                <a:sym typeface="+mn-ea"/>
+              </a:rPr>
+              <a:t>反汇编，</a:t>
+            </a:r>
+            <a:r>
+              <a:rPr lang="zh-CN" altLang="en-US">
+                <a:solidFill>
+                  <a:schemeClr val="accent6"/>
+                </a:solidFill>
+                <a:sym typeface="+mn-ea"/>
+              </a:rPr>
+              <a:t>定制代码（打印日志</a:t>
+            </a:r>
+            <a:r>
+              <a:rPr lang="en-US" altLang="zh-CN">
+                <a:solidFill>
+                  <a:schemeClr val="accent6"/>
+                </a:solidFill>
+                <a:sym typeface="+mn-ea"/>
+              </a:rPr>
+              <a:t>/</a:t>
+            </a:r>
+            <a:r>
+              <a:rPr lang="zh-CN" altLang="en-US">
+                <a:solidFill>
+                  <a:schemeClr val="accent6"/>
+                </a:solidFill>
+                <a:sym typeface="+mn-ea"/>
+              </a:rPr>
+              <a:t>统计），</a:t>
+            </a:r>
+            <a:r>
+              <a:rPr lang="zh-CN" altLang="en-US">
+                <a:solidFill>
+                  <a:schemeClr val="accent6"/>
+                </a:solidFill>
+                <a:sym typeface="+mn-ea"/>
+              </a:rPr>
+              <a:t>比对分析（流程</a:t>
+            </a:r>
+            <a:r>
+              <a:rPr lang="en-US" altLang="zh-CN">
+                <a:solidFill>
+                  <a:schemeClr val="accent6"/>
+                </a:solidFill>
+                <a:sym typeface="+mn-ea"/>
+              </a:rPr>
+              <a:t>/</a:t>
+            </a:r>
+            <a:r>
+              <a:rPr lang="zh-CN" altLang="en-US">
+                <a:solidFill>
+                  <a:schemeClr val="accent6"/>
+                </a:solidFill>
+                <a:sym typeface="+mn-ea"/>
+              </a:rPr>
+              <a:t>数据</a:t>
+            </a:r>
+            <a:r>
+              <a:rPr lang="en-US" altLang="zh-CN">
+                <a:solidFill>
+                  <a:schemeClr val="accent6"/>
+                </a:solidFill>
+                <a:sym typeface="+mn-ea"/>
+              </a:rPr>
+              <a:t>/</a:t>
+            </a:r>
+            <a:r>
+              <a:rPr lang="zh-CN" altLang="en-US">
+                <a:solidFill>
+                  <a:schemeClr val="accent6"/>
+                </a:solidFill>
+                <a:sym typeface="+mn-ea"/>
+              </a:rPr>
+              <a:t>版本补丁代码</a:t>
+            </a:r>
+            <a:r>
+              <a:rPr lang="en-US" altLang="zh-CN">
+                <a:solidFill>
+                  <a:schemeClr val="accent6"/>
+                </a:solidFill>
+                <a:sym typeface="+mn-ea"/>
+              </a:rPr>
+              <a:t>/</a:t>
+            </a:r>
+            <a:r>
+              <a:rPr lang="zh-CN" altLang="en-US">
+                <a:solidFill>
+                  <a:schemeClr val="accent6"/>
+                </a:solidFill>
+                <a:sym typeface="+mn-ea"/>
+              </a:rPr>
+              <a:t>环境）</a:t>
+            </a:r>
+            <a:endParaRPr lang="zh-CN" altLang="en-US">
+              <a:solidFill>
+                <a:schemeClr val="accent6"/>
+              </a:solidFill>
+              <a:sym typeface="+mn-ea"/>
+            </a:endParaRPr>
+          </a:p>
+          <a:p>
+            <a:pPr lvl="1"/>
+            <a:r>
+              <a:rPr lang="en-US" altLang="zh-CN">
+                <a:solidFill>
+                  <a:schemeClr val="accent6"/>
+                </a:solidFill>
+                <a:sym typeface="+mn-ea"/>
+              </a:rPr>
+              <a:t>AI</a:t>
+            </a:r>
+            <a:r>
+              <a:rPr lang="zh-CN" altLang="en-US">
+                <a:solidFill>
+                  <a:schemeClr val="accent6"/>
+                </a:solidFill>
+                <a:sym typeface="+mn-ea"/>
+              </a:rPr>
+              <a:t>辅助：查资料，配合阅读源码，</a:t>
+            </a:r>
+            <a:r>
+              <a:rPr lang="zh-CN" altLang="en-US">
+                <a:solidFill>
+                  <a:schemeClr val="accent6"/>
+                </a:solidFill>
+                <a:sym typeface="+mn-ea"/>
+              </a:rPr>
+              <a:t>配合分析问题</a:t>
+            </a:r>
+            <a:endParaRPr lang="zh-CN" altLang="en-US">
+              <a:solidFill>
+                <a:schemeClr val="accent6"/>
+              </a:solidFill>
+            </a:endParaRPr>
+          </a:p>
+          <a:p>
+            <a:r>
+              <a:rPr lang="zh-CN" altLang="en-US">
+                <a:solidFill>
+                  <a:schemeClr val="accent6"/>
+                </a:solidFill>
+              </a:rPr>
+              <a:t>核心难点</a:t>
+            </a:r>
+            <a:endParaRPr lang="zh-CN" altLang="en-US">
+              <a:solidFill>
+                <a:schemeClr val="accent6"/>
+              </a:solidFill>
+            </a:endParaRPr>
+          </a:p>
+          <a:p>
+            <a:pPr marL="0" indent="0">
+              <a:buNone/>
+            </a:pPr>
             <a:endParaRPr lang="zh-CN" altLang="en-US" sz="1800">
               <a:solidFill>
                 <a:schemeClr val="accent6"/>
               </a:solidFill>
             </a:endParaRPr>
           </a:p>
-          <a:p>
-            <a:pPr lvl="1"/>
-            <a:r>
-              <a:rPr lang="zh-CN" altLang="en-US">
-                <a:solidFill>
-                  <a:schemeClr val="accent6"/>
-                </a:solidFill>
-              </a:rPr>
-              <a:t>多窗口操作/针对性阅读(具体接口/数据结构/处理流程)</a:t>
-            </a:r>
+        </p:txBody>
+      </p:sp>
+    </p:spTree>
+  </p:cSld>
+  <p:clrMapOvr>
+    <a:masterClrMapping/>
+  </p:clrMapOvr>
+</p:sld>
+</file>
+
+<file path=ppt/slides/slide9.xml><?xml version="1.0" encoding="utf-8"?>
+<p:sld xmlns:a="http://schemas.openxmlformats.org/drawingml/2006/main" xmlns:r="http://schemas.openxmlformats.org/officeDocument/2006/relationships" xmlns:p="http://schemas.openxmlformats.org/presentationml/2006/main">
+  <p:cSld>
+    <p:bg>
+      <p:bgPr>
+        <a:solidFill>
+          <a:schemeClr val="tx1"/>
+        </a:solidFill>
+        <a:effectLst/>
+      </p:bgPr>
+    </p:bg>
+    <p:spTree>
+      <p:nvGrpSpPr>
+        <p:cNvPr id="1" name=""/>
+        <p:cNvGrpSpPr/>
+        <p:nvPr/>
+      </p:nvGrpSpPr>
+      <p:grpSpPr/>
+      <p:sp>
+        <p:nvSpPr>
+          <p:cNvPr id="2" name="Title 1"/>
+          <p:cNvSpPr>
+            <a:spLocks noGrp="1"/>
+          </p:cNvSpPr>
+          <p:nvPr>
+            <p:ph type="title"/>
+          </p:nvPr>
+        </p:nvSpPr>
+        <p:spPr>
+          <a:xfrm>
+            <a:off x="647700" y="146685"/>
+            <a:ext cx="10515600" cy="604520"/>
+          </a:xfrm>
+        </p:spPr>
+        <p:txBody>
+          <a:bodyPr/>
+          <a:p>
+            <a:pPr algn="ctr"/>
+            <a:r>
+              <a:rPr lang="zh-CN" altLang="en-US">
+                <a:solidFill>
+                  <a:schemeClr val="accent6"/>
+                </a:solidFill>
+                <a:sym typeface="+mn-ea"/>
+              </a:rPr>
+              <a:t>运行时分析：具体内容：</a:t>
+            </a:r>
+            <a:r>
+              <a:rPr lang="zh-CN" altLang="en-US">
+                <a:solidFill>
+                  <a:schemeClr val="accent6"/>
+                </a:solidFill>
+              </a:rPr>
+              <a:t>组件联调</a:t>
+            </a:r>
+            <a:endParaRPr lang="zh-CN" altLang="en-US">
+              <a:solidFill>
+                <a:schemeClr val="accent6"/>
+              </a:solidFill>
+            </a:endParaRPr>
+          </a:p>
+        </p:txBody>
+      </p:sp>
+      <p:sp>
+        <p:nvSpPr>
+          <p:cNvPr id="3" name="Content Placeholder 2"/>
+          <p:cNvSpPr>
+            <a:spLocks noGrp="1"/>
+          </p:cNvSpPr>
+          <p:nvPr>
+            <p:ph idx="1"/>
+          </p:nvPr>
+        </p:nvSpPr>
+        <p:spPr>
+          <a:xfrm>
+            <a:off x="647700" y="952500"/>
+            <a:ext cx="11292840" cy="5859780"/>
+          </a:xfrm>
+        </p:spPr>
+        <p:txBody>
+          <a:bodyPr/>
+          <a:p>
+            <a:r>
+              <a:rPr lang="zh-CN" altLang="en-US">
+                <a:solidFill>
+                  <a:schemeClr val="accent6"/>
+                </a:solidFill>
+              </a:rPr>
+              <a:t>概要描述</a:t>
+            </a:r>
+            <a:endParaRPr lang="zh-CN" altLang="en-US">
+              <a:solidFill>
+                <a:schemeClr val="accent6"/>
+              </a:solidFill>
+            </a:endParaRPr>
+          </a:p>
+          <a:p>
+            <a:pPr lvl="1"/>
+            <a:r>
+              <a:rPr lang="zh-CN" altLang="en-US" sz="1800">
+                <a:solidFill>
+                  <a:schemeClr val="accent6"/>
+                </a:solidFill>
+              </a:rPr>
+              <a:t>使得各相关组件整体能够完整配合，成功运行起来；</a:t>
+            </a:r>
+            <a:r>
+              <a:rPr lang="zh-CN" altLang="en-US">
+                <a:solidFill>
+                  <a:schemeClr val="accent6"/>
+                </a:solidFill>
+                <a:sym typeface="+mn-ea"/>
+              </a:rPr>
+              <a:t>涉及多个组件，一般需要多方人员配合处理</a:t>
+            </a:r>
+            <a:endParaRPr lang="zh-CN" altLang="en-US" sz="1800">
+              <a:solidFill>
+                <a:schemeClr val="accent6"/>
+              </a:solidFill>
+            </a:endParaRPr>
+          </a:p>
+          <a:p>
+            <a:pPr lvl="1"/>
+            <a:r>
+              <a:rPr lang="zh-CN" altLang="en-US">
+                <a:solidFill>
+                  <a:schemeClr val="accent6"/>
+                </a:solidFill>
+              </a:rPr>
+              <a:t>需求目的：实现整体需求功能（可能存在各类</a:t>
+            </a:r>
+            <a:r>
+              <a:rPr lang="en-US" altLang="zh-CN">
+                <a:solidFill>
+                  <a:schemeClr val="accent6"/>
+                </a:solidFill>
+              </a:rPr>
+              <a:t>bug</a:t>
+            </a:r>
+            <a:r>
+              <a:rPr lang="zh-CN" altLang="en-US">
+                <a:solidFill>
+                  <a:schemeClr val="accent6"/>
+                </a:solidFill>
+              </a:rPr>
+              <a:t>），主体流程和数据流形成功能闭环</a:t>
+            </a:r>
+            <a:endParaRPr lang="zh-CN" altLang="en-US">
+              <a:solidFill>
+                <a:schemeClr val="accent6"/>
+              </a:solidFill>
+            </a:endParaRPr>
+          </a:p>
+          <a:p>
+            <a:pPr lvl="1"/>
+            <a:r>
+              <a:rPr lang="zh-CN" altLang="en-US">
+                <a:solidFill>
+                  <a:schemeClr val="accent6"/>
+                </a:solidFill>
+              </a:rPr>
+              <a:t>基础资源：必备（各相关组件可支持联调</a:t>
+            </a:r>
+            <a:r>
+              <a:rPr lang="en-US" altLang="zh-CN">
+                <a:solidFill>
+                  <a:schemeClr val="accent6"/>
+                </a:solidFill>
+              </a:rPr>
+              <a:t>/</a:t>
+            </a:r>
+            <a:r>
+              <a:rPr lang="zh-CN" altLang="en-US">
+                <a:solidFill>
+                  <a:schemeClr val="accent6"/>
+                </a:solidFill>
+              </a:rPr>
+              <a:t>有运行环境），可选（</a:t>
+            </a:r>
+            <a:r>
+              <a:rPr lang="zh-CN" altLang="en-US">
+                <a:solidFill>
+                  <a:schemeClr val="accent6"/>
+                </a:solidFill>
+                <a:sym typeface="+mn-ea"/>
+              </a:rPr>
+              <a:t>厂商或相关人员配合</a:t>
+            </a:r>
+            <a:r>
+              <a:rPr lang="en-US" altLang="zh-CN">
+                <a:solidFill>
+                  <a:schemeClr val="accent6"/>
+                </a:solidFill>
+                <a:sym typeface="+mn-ea"/>
+              </a:rPr>
+              <a:t>/</a:t>
+            </a:r>
+            <a:r>
+              <a:rPr lang="zh-CN" altLang="en-US">
+                <a:solidFill>
+                  <a:schemeClr val="accent6"/>
+                </a:solidFill>
+                <a:sym typeface="+mn-ea"/>
+              </a:rPr>
+              <a:t>文档</a:t>
+            </a:r>
+            <a:r>
+              <a:rPr lang="en-US" altLang="zh-CN">
+                <a:solidFill>
+                  <a:schemeClr val="accent6"/>
+                </a:solidFill>
+                <a:sym typeface="+mn-ea"/>
+              </a:rPr>
+              <a:t>/</a:t>
+            </a:r>
+            <a:r>
+              <a:rPr lang="zh-CN" altLang="en-US">
+                <a:solidFill>
+                  <a:schemeClr val="accent6"/>
+                </a:solidFill>
+                <a:sym typeface="+mn-ea"/>
+              </a:rPr>
+              <a:t>源码</a:t>
+            </a:r>
+            <a:r>
+              <a:rPr lang="en-US" altLang="zh-CN">
+                <a:solidFill>
+                  <a:schemeClr val="accent6"/>
+                </a:solidFill>
+                <a:sym typeface="+mn-ea"/>
+              </a:rPr>
+              <a:t>/</a:t>
+            </a:r>
+            <a:r>
+              <a:rPr lang="zh-CN" altLang="en-US">
+                <a:solidFill>
+                  <a:schemeClr val="accent6"/>
+                </a:solidFill>
+                <a:sym typeface="+mn-ea"/>
+              </a:rPr>
+              <a:t>反汇编</a:t>
+            </a:r>
+            <a:r>
+              <a:rPr lang="zh-CN" altLang="en-US">
+                <a:solidFill>
+                  <a:schemeClr val="accent6"/>
+                </a:solidFill>
+              </a:rPr>
+              <a:t>）</a:t>
+            </a:r>
+            <a:endParaRPr lang="zh-CN" altLang="en-US">
+              <a:solidFill>
+                <a:schemeClr val="accent6"/>
+              </a:solidFill>
+            </a:endParaRPr>
+          </a:p>
+          <a:p>
+            <a:r>
+              <a:rPr lang="zh-CN" altLang="en-US">
+                <a:solidFill>
+                  <a:schemeClr val="accent6"/>
+                </a:solidFill>
+              </a:rPr>
+              <a:t>处理方法</a:t>
+            </a:r>
+            <a:endParaRPr lang="zh-CN" altLang="en-US">
+              <a:solidFill>
+                <a:schemeClr val="accent6"/>
+              </a:solidFill>
+            </a:endParaRPr>
+          </a:p>
+          <a:p>
+            <a:pPr lvl="1"/>
+            <a:r>
+              <a:rPr lang="zh-CN" altLang="en-US">
+                <a:solidFill>
+                  <a:schemeClr val="accent6"/>
+                </a:solidFill>
+                <a:sym typeface="+mn-ea"/>
+              </a:rPr>
+              <a:t>整体设计：了解整体结构</a:t>
+            </a:r>
+            <a:r>
+              <a:rPr lang="en-US" altLang="zh-CN">
+                <a:solidFill>
+                  <a:schemeClr val="accent6"/>
+                </a:solidFill>
+                <a:sym typeface="+mn-ea"/>
+              </a:rPr>
+              <a:t>/</a:t>
+            </a:r>
+            <a:r>
+              <a:rPr lang="zh-CN" altLang="en-US">
+                <a:solidFill>
+                  <a:schemeClr val="accent6"/>
+                </a:solidFill>
+                <a:sym typeface="+mn-ea"/>
+              </a:rPr>
+              <a:t>整体测试和使用，整体</a:t>
+            </a:r>
+            <a:r>
+              <a:rPr lang="zh-CN" altLang="en-US">
+                <a:solidFill>
+                  <a:schemeClr val="accent6"/>
+                </a:solidFill>
+                <a:sym typeface="+mn-ea"/>
+              </a:rPr>
+              <a:t>监控</a:t>
+            </a:r>
+            <a:r>
+              <a:rPr lang="en-US" altLang="zh-CN">
+                <a:solidFill>
+                  <a:schemeClr val="accent6"/>
+                </a:solidFill>
+                <a:sym typeface="+mn-ea"/>
+              </a:rPr>
+              <a:t>/</a:t>
+            </a:r>
+            <a:r>
+              <a:rPr lang="zh-CN" altLang="en-US">
+                <a:solidFill>
+                  <a:schemeClr val="accent6"/>
+                </a:solidFill>
+                <a:sym typeface="+mn-ea"/>
+              </a:rPr>
+              <a:t>各类单元测试</a:t>
+            </a:r>
+            <a:r>
+              <a:rPr lang="en-US" altLang="zh-CN">
+                <a:solidFill>
+                  <a:schemeClr val="accent6"/>
+                </a:solidFill>
+                <a:sym typeface="+mn-ea"/>
+              </a:rPr>
+              <a:t>/</a:t>
+            </a:r>
+            <a:r>
+              <a:rPr lang="zh-CN" altLang="en-US">
+                <a:solidFill>
+                  <a:schemeClr val="accent6"/>
+                </a:solidFill>
+                <a:sym typeface="+mn-ea"/>
+              </a:rPr>
+              <a:t>问题拆分，看文档</a:t>
+            </a:r>
+            <a:r>
+              <a:rPr lang="en-US" altLang="zh-CN">
+                <a:solidFill>
+                  <a:schemeClr val="accent6"/>
+                </a:solidFill>
+                <a:sym typeface="+mn-ea"/>
+              </a:rPr>
+              <a:t>/</a:t>
+            </a:r>
+            <a:r>
+              <a:rPr lang="zh-CN" altLang="en-US">
+                <a:solidFill>
+                  <a:schemeClr val="accent6"/>
+                </a:solidFill>
+                <a:sym typeface="+mn-ea"/>
+              </a:rPr>
+              <a:t>总结整理</a:t>
+            </a:r>
+            <a:endParaRPr lang="zh-CN" altLang="en-US">
+              <a:solidFill>
+                <a:schemeClr val="accent6"/>
+              </a:solidFill>
+              <a:sym typeface="+mn-ea"/>
+            </a:endParaRPr>
+          </a:p>
+          <a:p>
+            <a:pPr lvl="1"/>
+            <a:r>
+              <a:rPr lang="zh-CN" altLang="en-US">
+                <a:solidFill>
+                  <a:schemeClr val="accent6"/>
+                </a:solidFill>
+                <a:sym typeface="+mn-ea"/>
+              </a:rPr>
+              <a:t>静态开发：</a:t>
+            </a:r>
+            <a:r>
+              <a:rPr lang="zh-CN" altLang="en-US">
+                <a:solidFill>
+                  <a:schemeClr val="accent6"/>
+                </a:solidFill>
+                <a:sym typeface="+mn-ea"/>
+              </a:rPr>
+              <a:t>阅读相关源码（软硬件）</a:t>
+            </a:r>
+            <a:r>
+              <a:rPr lang="en-US" altLang="zh-CN">
+                <a:solidFill>
+                  <a:schemeClr val="accent6"/>
+                </a:solidFill>
+                <a:sym typeface="+mn-ea"/>
+              </a:rPr>
+              <a:t>/</a:t>
+            </a:r>
+            <a:r>
+              <a:rPr lang="zh-CN" altLang="en-US">
+                <a:solidFill>
+                  <a:schemeClr val="accent6"/>
+                </a:solidFill>
+                <a:sym typeface="+mn-ea"/>
+              </a:rPr>
+              <a:t>反汇编（布线板）</a:t>
+            </a:r>
+            <a:r>
+              <a:rPr lang="en-US" altLang="zh-CN">
+                <a:solidFill>
+                  <a:schemeClr val="accent6"/>
+                </a:solidFill>
+                <a:sym typeface="+mn-ea"/>
+              </a:rPr>
+              <a:t>/</a:t>
+            </a:r>
+            <a:r>
+              <a:rPr lang="zh-CN" altLang="en-US">
+                <a:solidFill>
+                  <a:schemeClr val="accent6"/>
+                </a:solidFill>
+                <a:sym typeface="+mn-ea"/>
+              </a:rPr>
+              <a:t>版本补丁，为整体设计和动态调试提供支撑</a:t>
+            </a:r>
+            <a:endParaRPr lang="zh-CN" altLang="en-US">
+              <a:solidFill>
+                <a:schemeClr val="accent6"/>
+              </a:solidFill>
+              <a:sym typeface="+mn-ea"/>
+            </a:endParaRPr>
+          </a:p>
+          <a:p>
+            <a:pPr lvl="1"/>
+            <a:r>
+              <a:rPr lang="zh-CN" altLang="en-US">
+                <a:solidFill>
+                  <a:schemeClr val="accent6"/>
+                </a:solidFill>
+                <a:sym typeface="+mn-ea"/>
+              </a:rPr>
+              <a:t>动态调试：</a:t>
+            </a:r>
+            <a:r>
+              <a:rPr lang="zh-CN" altLang="en-US">
+                <a:solidFill>
+                  <a:schemeClr val="accent6"/>
+                </a:solidFill>
+                <a:sym typeface="+mn-ea"/>
+              </a:rPr>
+              <a:t>调试源码</a:t>
+            </a:r>
+            <a:r>
+              <a:rPr lang="en-US" altLang="zh-CN">
+                <a:solidFill>
+                  <a:schemeClr val="accent6"/>
+                </a:solidFill>
+                <a:sym typeface="+mn-ea"/>
+              </a:rPr>
+              <a:t>/</a:t>
+            </a:r>
+            <a:r>
+              <a:rPr lang="zh-CN" altLang="en-US">
+                <a:solidFill>
+                  <a:schemeClr val="accent6"/>
+                </a:solidFill>
+                <a:sym typeface="+mn-ea"/>
+              </a:rPr>
+              <a:t>反汇编，</a:t>
+            </a:r>
+            <a:r>
+              <a:rPr lang="zh-CN" altLang="en-US">
+                <a:solidFill>
+                  <a:schemeClr val="accent6"/>
+                </a:solidFill>
+                <a:sym typeface="+mn-ea"/>
+              </a:rPr>
+              <a:t>定制代码（打印日志</a:t>
+            </a:r>
+            <a:r>
+              <a:rPr lang="en-US" altLang="zh-CN">
+                <a:solidFill>
+                  <a:schemeClr val="accent6"/>
+                </a:solidFill>
+                <a:sym typeface="+mn-ea"/>
+              </a:rPr>
+              <a:t>/</a:t>
+            </a:r>
+            <a:r>
+              <a:rPr lang="zh-CN" altLang="en-US">
+                <a:solidFill>
+                  <a:schemeClr val="accent6"/>
+                </a:solidFill>
+                <a:sym typeface="+mn-ea"/>
+              </a:rPr>
+              <a:t>统计），</a:t>
+            </a:r>
+            <a:r>
+              <a:rPr lang="zh-CN" altLang="en-US">
+                <a:solidFill>
+                  <a:schemeClr val="accent6"/>
+                </a:solidFill>
+                <a:sym typeface="+mn-ea"/>
+              </a:rPr>
+              <a:t>比对分析（流程</a:t>
+            </a:r>
+            <a:r>
+              <a:rPr lang="en-US" altLang="zh-CN">
+                <a:solidFill>
+                  <a:schemeClr val="accent6"/>
+                </a:solidFill>
+                <a:sym typeface="+mn-ea"/>
+              </a:rPr>
+              <a:t>/</a:t>
+            </a:r>
+            <a:r>
+              <a:rPr lang="zh-CN" altLang="en-US">
+                <a:solidFill>
+                  <a:schemeClr val="accent6"/>
+                </a:solidFill>
+                <a:sym typeface="+mn-ea"/>
+              </a:rPr>
+              <a:t>数据</a:t>
+            </a:r>
+            <a:r>
+              <a:rPr lang="en-US" altLang="zh-CN">
+                <a:solidFill>
+                  <a:schemeClr val="accent6"/>
+                </a:solidFill>
+                <a:sym typeface="+mn-ea"/>
+              </a:rPr>
+              <a:t>/</a:t>
+            </a:r>
+            <a:r>
+              <a:rPr lang="zh-CN" altLang="en-US">
+                <a:solidFill>
+                  <a:schemeClr val="accent6"/>
+                </a:solidFill>
+                <a:sym typeface="+mn-ea"/>
+              </a:rPr>
+              <a:t>版本补丁代码</a:t>
+            </a:r>
+            <a:r>
+              <a:rPr lang="en-US" altLang="zh-CN">
+                <a:solidFill>
+                  <a:schemeClr val="accent6"/>
+                </a:solidFill>
+                <a:sym typeface="+mn-ea"/>
+              </a:rPr>
+              <a:t>/</a:t>
+            </a:r>
+            <a:r>
+              <a:rPr lang="zh-CN" altLang="en-US">
+                <a:solidFill>
+                  <a:schemeClr val="accent6"/>
+                </a:solidFill>
+                <a:sym typeface="+mn-ea"/>
+              </a:rPr>
+              <a:t>环境）</a:t>
+            </a:r>
+            <a:endParaRPr lang="zh-CN" altLang="en-US">
+              <a:solidFill>
+                <a:schemeClr val="accent6"/>
+              </a:solidFill>
+              <a:sym typeface="+mn-ea"/>
+            </a:endParaRPr>
+          </a:p>
+          <a:p>
+            <a:pPr lvl="1"/>
+            <a:r>
+              <a:rPr lang="en-US" altLang="zh-CN">
+                <a:solidFill>
+                  <a:schemeClr val="accent6"/>
+                </a:solidFill>
+                <a:sym typeface="+mn-ea"/>
+              </a:rPr>
+              <a:t>AI</a:t>
+            </a:r>
+            <a:r>
+              <a:rPr lang="zh-CN" altLang="en-US">
+                <a:solidFill>
+                  <a:schemeClr val="accent6"/>
+                </a:solidFill>
+                <a:sym typeface="+mn-ea"/>
+              </a:rPr>
+              <a:t>辅助：查资料，配合阅读源码，</a:t>
+            </a:r>
+            <a:r>
+              <a:rPr lang="zh-CN" altLang="en-US">
+                <a:solidFill>
+                  <a:schemeClr val="accent6"/>
+                </a:solidFill>
+                <a:sym typeface="+mn-ea"/>
+              </a:rPr>
+              <a:t>配合分析问题</a:t>
+            </a:r>
+            <a:endParaRPr lang="zh-CN" altLang="en-US">
+              <a:solidFill>
+                <a:schemeClr val="accent6"/>
+              </a:solidFill>
+            </a:endParaRPr>
+          </a:p>
+          <a:p>
+            <a:r>
+              <a:rPr lang="zh-CN" altLang="en-US">
+                <a:solidFill>
+                  <a:schemeClr val="accent6"/>
+                </a:solidFill>
+              </a:rPr>
+              <a:t>核心难点</a:t>
+            </a:r>
+            <a:endParaRPr lang="zh-CN" altLang="en-US">
+              <a:solidFill>
+                <a:schemeClr val="accent6"/>
+              </a:solidFill>
+            </a:endParaRPr>
+          </a:p>
+          <a:p>
+            <a:pPr lvl="1"/>
+            <a:r>
+              <a:rPr lang="zh-CN" altLang="en-US" sz="1800">
+                <a:solidFill>
+                  <a:schemeClr val="accent6"/>
+                </a:solidFill>
+              </a:rPr>
+              <a:t>资源缺失：缺少相关组件的可选资源（</a:t>
+            </a:r>
+            <a:r>
+              <a:rPr lang="zh-CN" altLang="en-US">
+                <a:solidFill>
+                  <a:schemeClr val="accent6"/>
+                </a:solidFill>
+                <a:sym typeface="+mn-ea"/>
+              </a:rPr>
+              <a:t>厂商或相关人员配合</a:t>
+            </a:r>
+            <a:r>
+              <a:rPr lang="en-US" altLang="zh-CN">
+                <a:solidFill>
+                  <a:schemeClr val="accent6"/>
+                </a:solidFill>
+                <a:sym typeface="+mn-ea"/>
+              </a:rPr>
+              <a:t>/</a:t>
+            </a:r>
+            <a:r>
+              <a:rPr lang="zh-CN" altLang="en-US">
+                <a:solidFill>
+                  <a:schemeClr val="accent6"/>
+                </a:solidFill>
+                <a:sym typeface="+mn-ea"/>
+              </a:rPr>
+              <a:t>文档</a:t>
+            </a:r>
+            <a:r>
+              <a:rPr lang="en-US" altLang="zh-CN">
+                <a:solidFill>
+                  <a:schemeClr val="accent6"/>
+                </a:solidFill>
+                <a:sym typeface="+mn-ea"/>
+              </a:rPr>
+              <a:t>/</a:t>
+            </a:r>
+            <a:r>
+              <a:rPr lang="zh-CN" altLang="en-US">
+                <a:solidFill>
+                  <a:schemeClr val="accent6"/>
+                </a:solidFill>
+                <a:sym typeface="+mn-ea"/>
+              </a:rPr>
+              <a:t>源码</a:t>
+            </a:r>
+            <a:r>
+              <a:rPr lang="en-US" altLang="zh-CN">
+                <a:solidFill>
+                  <a:schemeClr val="accent6"/>
+                </a:solidFill>
+                <a:sym typeface="+mn-ea"/>
+              </a:rPr>
+              <a:t>/</a:t>
+            </a:r>
+            <a:r>
+              <a:rPr lang="zh-CN" altLang="en-US">
+                <a:solidFill>
+                  <a:schemeClr val="accent6"/>
+                </a:solidFill>
+                <a:sym typeface="+mn-ea"/>
+              </a:rPr>
+              <a:t>反汇编）</a:t>
+            </a:r>
+            <a:endParaRPr lang="zh-CN" altLang="en-US" sz="1800">
+              <a:solidFill>
+                <a:schemeClr val="accent6"/>
+              </a:solidFill>
+            </a:endParaRPr>
+          </a:p>
+          <a:p>
+            <a:pPr lvl="1"/>
+            <a:r>
+              <a:rPr lang="zh-CN" altLang="en-US">
+                <a:solidFill>
+                  <a:schemeClr val="accent6"/>
+                </a:solidFill>
+              </a:rPr>
+              <a:t>环境搭建：</a:t>
+            </a:r>
+            <a:r>
+              <a:rPr lang="zh-CN" altLang="en-US">
+                <a:solidFill>
+                  <a:schemeClr val="accent6"/>
+                </a:solidFill>
+                <a:sym typeface="+mn-ea"/>
+              </a:rPr>
+              <a:t>涉及多方协调沟通配合，复现难（出差</a:t>
+            </a:r>
+            <a:r>
+              <a:rPr lang="en-US" altLang="zh-CN">
+                <a:solidFill>
+                  <a:schemeClr val="accent6"/>
+                </a:solidFill>
+                <a:sym typeface="+mn-ea"/>
+              </a:rPr>
+              <a:t>/</a:t>
+            </a:r>
+            <a:r>
+              <a:rPr lang="zh-CN" altLang="en-US">
+                <a:solidFill>
+                  <a:schemeClr val="accent6"/>
+                </a:solidFill>
+                <a:sym typeface="+mn-ea"/>
+              </a:rPr>
+              <a:t>环境差</a:t>
+            </a:r>
+            <a:r>
+              <a:rPr lang="en-US" altLang="zh-CN">
+                <a:solidFill>
+                  <a:schemeClr val="accent6"/>
+                </a:solidFill>
+                <a:sym typeface="+mn-ea"/>
+              </a:rPr>
+              <a:t>/</a:t>
+            </a:r>
+            <a:r>
+              <a:rPr lang="zh-CN" altLang="en-US">
+                <a:solidFill>
+                  <a:schemeClr val="accent6"/>
+                </a:solidFill>
+                <a:sym typeface="+mn-ea"/>
+              </a:rPr>
+              <a:t>复现几率低）</a:t>
+            </a:r>
+            <a:endParaRPr lang="zh-CN" altLang="en-US">
+              <a:solidFill>
+                <a:schemeClr val="accent6"/>
+              </a:solidFill>
+            </a:endParaRPr>
+          </a:p>
+          <a:p>
+            <a:pPr lvl="1"/>
+            <a:r>
+              <a:rPr lang="zh-CN" altLang="en-US">
+                <a:solidFill>
+                  <a:schemeClr val="accent6"/>
+                </a:solidFill>
+              </a:rPr>
+              <a:t>熟悉了解：</a:t>
+            </a:r>
+            <a:r>
+              <a:rPr lang="zh-CN" altLang="en-US">
+                <a:solidFill>
+                  <a:schemeClr val="accent6"/>
+                </a:solidFill>
+                <a:sym typeface="+mn-ea"/>
+              </a:rPr>
+              <a:t>业务（专业度高</a:t>
+            </a:r>
+            <a:r>
+              <a:rPr lang="en-US" altLang="zh-CN">
+                <a:solidFill>
+                  <a:schemeClr val="accent6"/>
+                </a:solidFill>
+                <a:sym typeface="+mn-ea"/>
+              </a:rPr>
+              <a:t>/</a:t>
+            </a:r>
+            <a:r>
+              <a:rPr lang="zh-CN" altLang="en-US">
+                <a:solidFill>
+                  <a:schemeClr val="accent6"/>
+                </a:solidFill>
+                <a:sym typeface="+mn-ea"/>
+              </a:rPr>
+              <a:t>模型复杂</a:t>
+            </a:r>
+            <a:r>
+              <a:rPr lang="en-US" altLang="zh-CN">
+                <a:solidFill>
+                  <a:schemeClr val="accent6"/>
+                </a:solidFill>
+                <a:sym typeface="+mn-ea"/>
+              </a:rPr>
+              <a:t>/</a:t>
+            </a:r>
+            <a:r>
+              <a:rPr lang="zh-CN" altLang="en-US">
+                <a:solidFill>
+                  <a:schemeClr val="accent6"/>
+                </a:solidFill>
+                <a:sym typeface="+mn-ea"/>
+              </a:rPr>
+              <a:t>无专业人员），设计（不了解结构），代码（不了解代码</a:t>
+            </a:r>
+            <a:r>
+              <a:rPr lang="en-US" altLang="zh-CN">
+                <a:solidFill>
+                  <a:schemeClr val="accent6"/>
+                </a:solidFill>
+                <a:sym typeface="+mn-ea"/>
+              </a:rPr>
+              <a:t>/</a:t>
+            </a:r>
+            <a:r>
+              <a:rPr lang="zh-CN" altLang="en-US">
+                <a:solidFill>
+                  <a:schemeClr val="accent6"/>
+                </a:solidFill>
+                <a:sym typeface="+mn-ea"/>
+              </a:rPr>
+              <a:t>无代码）</a:t>
+            </a:r>
+            <a:endParaRPr lang="zh-CN" altLang="en-US">
+              <a:solidFill>
+                <a:schemeClr val="accent6"/>
+              </a:solidFill>
+            </a:endParaRPr>
+          </a:p>
+          <a:p>
+            <a:pPr marL="0" indent="0">
+              <a:buNone/>
+            </a:pPr>
             <a:endParaRPr lang="zh-CN" altLang="en-US" sz="1800">
               <a:solidFill>
                 <a:schemeClr val="accent6"/>

--- a/toolchains/runtime-xxx/runtime-analyzing/运行时分析.pptx
+++ b/toolchains/runtime-xxx/runtime-analyzing/运行时分析.pptx
@@ -9180,7 +9180,7 @@
                   <a:schemeClr val="accent6"/>
                 </a:solidFill>
               </a:rPr>
-              <a:t>动态：运行时监控是主要数据来源，运行时调试是主要处理方法。</a:t>
+              <a:t>动态：实践（运行时监控是主要数据来源，运行时调试是主要处理方法）；理论（整理总结）。</a:t>
             </a:r>
             <a:endParaRPr lang="zh-CN" altLang="en-US">
               <a:solidFill>
@@ -9454,7 +9454,16 @@
                   <a:schemeClr val="accent6"/>
                 </a:solidFill>
               </a:rPr>
-              <a:t>动态：运行时监控是主要数据来源，运行时调试是主要处理方法。</a:t>
+              <a:t>动态：</a:t>
+            </a:r>
+            <a:r>
+              <a:rPr lang="zh-CN" altLang="en-US">
+                <a:solidFill>
+                  <a:schemeClr val="accent6"/>
+                </a:solidFill>
+                <a:sym typeface="+mn-ea"/>
+              </a:rPr>
+              <a:t>实践（运行时监控是主要数据来源，运行时调试是主要处理方法）；理论（整理总结）。</a:t>
             </a:r>
             <a:endParaRPr lang="zh-CN" altLang="en-US">
               <a:solidFill>
@@ -9869,7 +9878,16 @@
                   <a:schemeClr val="accent6"/>
                 </a:solidFill>
               </a:rPr>
-              <a:t>动态：运行时监控是主要数据来源，运行时调试是主要处理方法。</a:t>
+              <a:t>动态：</a:t>
+            </a:r>
+            <a:r>
+              <a:rPr lang="zh-CN" altLang="en-US">
+                <a:solidFill>
+                  <a:schemeClr val="accent6"/>
+                </a:solidFill>
+                <a:sym typeface="+mn-ea"/>
+              </a:rPr>
+              <a:t>实践（运行时监控是主要数据来源，运行时调试是主要处理方法）；理论（整理总结）。</a:t>
             </a:r>
             <a:endParaRPr lang="zh-CN" altLang="en-US">
               <a:solidFill>
